--- a/00_共同開発テンプレ/07_ライブラリ/外部資料/ハコノナカ_企画書.pptx
+++ b/00_共同開発テンプレ/07_ライブラリ/外部資料/ハコノナカ_企画書.pptx
@@ -243,7 +243,7 @@
           <a:p>
             <a:fld id="{5D7AAD1D-DEDA-4A6B-9C96-ABACE7990C54}" type="datetimeFigureOut">
               <a:rPr kumimoji="1" lang="ja-JP" altLang="en-US" smtClean="0"/>
-              <a:t>2026/10/24</a:t>
+              <a:t>2026/10/25</a:t>
             </a:fld>
             <a:endParaRPr kumimoji="1" lang="ja-JP" altLang="en-US"/>
           </a:p>
@@ -445,7 +445,7 @@
           <a:p>
             <a:fld id="{5D7AAD1D-DEDA-4A6B-9C96-ABACE7990C54}" type="datetimeFigureOut">
               <a:rPr kumimoji="1" lang="ja-JP" altLang="en-US" smtClean="0"/>
-              <a:t>2026/10/24</a:t>
+              <a:t>2026/10/26</a:t>
             </a:fld>
             <a:endParaRPr kumimoji="1" lang="ja-JP" altLang="en-US"/>
           </a:p>
@@ -657,7 +657,7 @@
           <a:p>
             <a:fld id="{5D7AAD1D-DEDA-4A6B-9C96-ABACE7990C54}" type="datetimeFigureOut">
               <a:rPr kumimoji="1" lang="ja-JP" altLang="en-US" smtClean="0"/>
-              <a:t>2026/10/24</a:t>
+              <a:t>2026/10/26</a:t>
             </a:fld>
             <a:endParaRPr kumimoji="1" lang="ja-JP" altLang="en-US"/>
           </a:p>
@@ -859,7 +859,7 @@
           <a:p>
             <a:fld id="{5D7AAD1D-DEDA-4A6B-9C96-ABACE7990C54}" type="datetimeFigureOut">
               <a:rPr kumimoji="1" lang="ja-JP" altLang="en-US" smtClean="0"/>
-              <a:t>2026/10/24</a:t>
+              <a:t>2026/10/26</a:t>
             </a:fld>
             <a:endParaRPr kumimoji="1" lang="ja-JP" altLang="en-US"/>
           </a:p>
@@ -1105,7 +1105,7 @@
           <a:p>
             <a:fld id="{5D7AAD1D-DEDA-4A6B-9C96-ABACE7990C54}" type="datetimeFigureOut">
               <a:rPr kumimoji="1" lang="ja-JP" altLang="en-US" smtClean="0"/>
-              <a:t>2026/10/24</a:t>
+              <a:t>2026/10/26</a:t>
             </a:fld>
             <a:endParaRPr kumimoji="1" lang="ja-JP" altLang="en-US"/>
           </a:p>
@@ -1401,7 +1401,7 @@
           <a:p>
             <a:fld id="{5D7AAD1D-DEDA-4A6B-9C96-ABACE7990C54}" type="datetimeFigureOut">
               <a:rPr kumimoji="1" lang="ja-JP" altLang="en-US" smtClean="0"/>
-              <a:t>2026/10/24</a:t>
+              <a:t>2026/10/26</a:t>
             </a:fld>
             <a:endParaRPr kumimoji="1" lang="ja-JP" altLang="en-US"/>
           </a:p>
@@ -1832,7 +1832,7 @@
           <a:p>
             <a:fld id="{5D7AAD1D-DEDA-4A6B-9C96-ABACE7990C54}" type="datetimeFigureOut">
               <a:rPr kumimoji="1" lang="ja-JP" altLang="en-US" smtClean="0"/>
-              <a:t>2026/10/24</a:t>
+              <a:t>2026/10/26</a:t>
             </a:fld>
             <a:endParaRPr kumimoji="1" lang="ja-JP" altLang="en-US"/>
           </a:p>
@@ -1950,7 +1950,7 @@
           <a:p>
             <a:fld id="{5D7AAD1D-DEDA-4A6B-9C96-ABACE7990C54}" type="datetimeFigureOut">
               <a:rPr kumimoji="1" lang="ja-JP" altLang="en-US" smtClean="0"/>
-              <a:t>2026/10/24</a:t>
+              <a:t>2026/10/26</a:t>
             </a:fld>
             <a:endParaRPr kumimoji="1" lang="ja-JP" altLang="en-US"/>
           </a:p>
@@ -2045,7 +2045,7 @@
           <a:p>
             <a:fld id="{5D7AAD1D-DEDA-4A6B-9C96-ABACE7990C54}" type="datetimeFigureOut">
               <a:rPr kumimoji="1" lang="ja-JP" altLang="en-US" smtClean="0"/>
-              <a:t>2026/10/24</a:t>
+              <a:t>2026/10/26</a:t>
             </a:fld>
             <a:endParaRPr kumimoji="1" lang="ja-JP" altLang="en-US"/>
           </a:p>
@@ -2354,7 +2354,7 @@
           <a:p>
             <a:fld id="{5D7AAD1D-DEDA-4A6B-9C96-ABACE7990C54}" type="datetimeFigureOut">
               <a:rPr kumimoji="1" lang="ja-JP" altLang="en-US" smtClean="0"/>
-              <a:t>2026/10/24</a:t>
+              <a:t>2026/10/26</a:t>
             </a:fld>
             <a:endParaRPr kumimoji="1" lang="ja-JP" altLang="en-US"/>
           </a:p>
@@ -2611,7 +2611,7 @@
           <a:p>
             <a:fld id="{5D7AAD1D-DEDA-4A6B-9C96-ABACE7990C54}" type="datetimeFigureOut">
               <a:rPr kumimoji="1" lang="ja-JP" altLang="en-US" smtClean="0"/>
-              <a:t>2026/10/24</a:t>
+              <a:t>2026/10/26</a:t>
             </a:fld>
             <a:endParaRPr kumimoji="1" lang="ja-JP" altLang="en-US"/>
           </a:p>
@@ -2861,7 +2861,7 @@
           <a:p>
             <a:fld id="{5D7AAD1D-DEDA-4A6B-9C96-ABACE7990C54}" type="datetimeFigureOut">
               <a:rPr kumimoji="1" lang="ja-JP" altLang="en-US" smtClean="0"/>
-              <a:t>2026/10/24</a:t>
+              <a:t>2026/10/25</a:t>
             </a:fld>
             <a:endParaRPr kumimoji="1" lang="ja-JP" altLang="en-US"/>
           </a:p>

--- a/00_共同開発テンプレ/07_ライブラリ/外部資料/ハコノナカ_企画書.pptx
+++ b/00_共同開発テンプレ/07_ライブラリ/外部資料/ハコノナカ_企画書.pptx
@@ -6,6 +6,17 @@
   </p:sldMasterIdLst>
   <p:sldIdLst>
     <p:sldId id="256" r:id="rId2"/>
+    <p:sldId id="265" r:id="rId3"/>
+    <p:sldId id="261" r:id="rId4"/>
+    <p:sldId id="262" r:id="rId5"/>
+    <p:sldId id="260" r:id="rId6"/>
+    <p:sldId id="267" r:id="rId7"/>
+    <p:sldId id="263" r:id="rId8"/>
+    <p:sldId id="264" r:id="rId9"/>
+    <p:sldId id="266" r:id="rId10"/>
+    <p:sldId id="259" r:id="rId11"/>
+    <p:sldId id="257" r:id="rId12"/>
+    <p:sldId id="258" r:id="rId13"/>
   </p:sldIdLst>
   <p:sldSz cx="9906000" cy="6858000" type="A4"/>
   <p:notesSz cx="6858000" cy="9144000"/>
@@ -243,7 +254,7 @@
           <a:p>
             <a:fld id="{5D7AAD1D-DEDA-4A6B-9C96-ABACE7990C54}" type="datetimeFigureOut">
               <a:rPr kumimoji="1" lang="ja-JP" altLang="en-US" smtClean="0"/>
-              <a:t>2026/10/25</a:t>
+              <a:t>2026/10/26</a:t>
             </a:fld>
             <a:endParaRPr kumimoji="1" lang="ja-JP" altLang="en-US"/>
           </a:p>
@@ -2861,7 +2872,7 @@
           <a:p>
             <a:fld id="{5D7AAD1D-DEDA-4A6B-9C96-ABACE7990C54}" type="datetimeFigureOut">
               <a:rPr kumimoji="1" lang="ja-JP" altLang="en-US" smtClean="0"/>
-              <a:t>2026/10/25</a:t>
+              <a:t>2026/10/26</a:t>
             </a:fld>
             <a:endParaRPr kumimoji="1" lang="ja-JP" altLang="en-US"/>
           </a:p>
@@ -3280,8 +3291,8 @@
         </p:nvSpPr>
         <p:spPr>
           <a:xfrm>
-            <a:off x="1782901" y="2644170"/>
-            <a:ext cx="6340197" cy="1569660"/>
+            <a:off x="410731" y="2321005"/>
+            <a:ext cx="9084539" cy="2215991"/>
           </a:xfrm>
           <a:prstGeom prst="rect">
             <a:avLst/>
@@ -3296,21 +3307,21 @@
           <a:p>
             <a:pPr algn="ctr"/>
             <a:r>
-              <a:rPr kumimoji="1" lang="ja-JP" altLang="en-US" sz="9600">
+              <a:rPr kumimoji="1" lang="ja-JP" altLang="en-US" sz="13800">
                 <a:latin typeface="クラフト明朝" panose="02000700000000000000" pitchFamily="50" charset="-128"/>
                 <a:ea typeface="クラフト明朝" panose="02000700000000000000" pitchFamily="50" charset="-128"/>
               </a:rPr>
               <a:t>ハコ</a:t>
             </a:r>
             <a:r>
-              <a:rPr kumimoji="1" lang="ja-JP" altLang="en-US" sz="9600">
+              <a:rPr kumimoji="1" lang="ja-JP" altLang="en-US" sz="13800">
                 <a:latin typeface="KaitouYokokuGothic Heavy" panose="020B0A00000000000000" pitchFamily="34" charset="0"/>
                 <a:ea typeface="KaitouYokokuGothic Heavy" panose="020B0A00000000000000" pitchFamily="34" charset="0"/>
               </a:rPr>
               <a:t>ノ</a:t>
             </a:r>
             <a:r>
-              <a:rPr kumimoji="1" lang="ja-JP" altLang="en-US" sz="9600">
+              <a:rPr kumimoji="1" lang="ja-JP" altLang="en-US" sz="13800">
                 <a:latin typeface="装甲明朝" panose="02000600000000000000" pitchFamily="2" charset="-128"/>
                 <a:ea typeface="装甲明朝" panose="02000600000000000000" pitchFamily="2" charset="-128"/>
               </a:rPr>
@@ -3323,6 +3334,5061 @@
     <p:extLst>
       <p:ext uri="{BB962C8B-B14F-4D97-AF65-F5344CB8AC3E}">
         <p14:creationId xmlns:p14="http://schemas.microsoft.com/office/powerpoint/2010/main" val="3443042251"/>
+      </p:ext>
+    </p:extLst>
+  </p:cSld>
+  <p:clrMapOvr>
+    <a:masterClrMapping/>
+  </p:clrMapOvr>
+</p:sld>
+</file>
+
+<file path=ppt/slides/slide10.xml><?xml version="1.0" encoding="utf-8"?>
+<p:sld xmlns:a="http://schemas.openxmlformats.org/drawingml/2006/main" xmlns:r="http://schemas.openxmlformats.org/officeDocument/2006/relationships" xmlns:p="http://schemas.openxmlformats.org/presentationml/2006/main" show="0">
+  <p:cSld>
+    <p:bg>
+      <p:bgPr>
+        <a:solidFill>
+          <a:srgbClr val="262626"/>
+        </a:solidFill>
+        <a:effectLst/>
+      </p:bgPr>
+    </p:bg>
+    <p:spTree>
+      <p:nvGrpSpPr>
+        <p:cNvPr id="1" name=""/>
+        <p:cNvGrpSpPr/>
+        <p:nvPr/>
+      </p:nvGrpSpPr>
+      <p:grpSpPr>
+        <a:xfrm>
+          <a:off x="0" y="0"/>
+          <a:ext cx="0" cy="0"/>
+          <a:chOff x="0" y="0"/>
+          <a:chExt cx="0" cy="0"/>
+        </a:xfrm>
+      </p:grpSpPr>
+      <p:sp>
+        <p:nvSpPr>
+          <p:cNvPr id="5" name="テキスト ボックス 4">
+            <a:extLst>
+              <a:ext uri="{FF2B5EF4-FFF2-40B4-BE49-F238E27FC236}">
+                <a16:creationId xmlns:a16="http://schemas.microsoft.com/office/drawing/2014/main" id="{7B4839D8-37F8-822E-27CA-18DF898D00AC}"/>
+              </a:ext>
+            </a:extLst>
+          </p:cNvPr>
+          <p:cNvSpPr txBox="1"/>
+          <p:nvPr/>
+        </p:nvSpPr>
+        <p:spPr>
+          <a:xfrm>
+            <a:off x="278483" y="5786970"/>
+            <a:ext cx="9349034" cy="707886"/>
+          </a:xfrm>
+          <a:prstGeom prst="rect">
+            <a:avLst/>
+          </a:prstGeom>
+          <a:noFill/>
+        </p:spPr>
+        <p:txBody>
+          <a:bodyPr wrap="none" rtlCol="0">
+            <a:spAutoFit/>
+          </a:bodyPr>
+          <a:lstStyle/>
+          <a:p>
+            <a:pPr algn="ctr"/>
+            <a:r>
+              <a:rPr kumimoji="1" lang="ja-JP" altLang="en-US" sz="4000">
+                <a:latin typeface="KaitouYokokuGothic Heavy" panose="020B0A00000000000000" pitchFamily="34" charset="0"/>
+                <a:ea typeface="KaitouYokokuGothic Heavy" panose="020B0A00000000000000" pitchFamily="34" charset="0"/>
+              </a:rPr>
+              <a:t>貼って戦い、ハコノナカを制しろ。</a:t>
+            </a:r>
+            <a:endParaRPr kumimoji="1" lang="ja-JP" altLang="en-US" sz="5400">
+              <a:latin typeface="KaitouYokokuGothic Heavy" panose="020B0A00000000000000" pitchFamily="34" charset="0"/>
+              <a:ea typeface="KaitouYokokuGothic Heavy" panose="020B0A00000000000000" pitchFamily="34" charset="0"/>
+            </a:endParaRPr>
+          </a:p>
+        </p:txBody>
+      </p:sp>
+      <p:pic>
+        <p:nvPicPr>
+          <p:cNvPr id="7" name="図 6">
+            <a:extLst>
+              <a:ext uri="{FF2B5EF4-FFF2-40B4-BE49-F238E27FC236}">
+                <a16:creationId xmlns:a16="http://schemas.microsoft.com/office/drawing/2014/main" id="{4DD1359B-1B83-08F8-94F3-C36492DE4344}"/>
+              </a:ext>
+            </a:extLst>
+          </p:cNvPr>
+          <p:cNvPicPr>
+            <a:picLocks noGrp="1" noRot="1" noChangeAspect="1" noMove="1" noResize="1" noEditPoints="1" noAdjustHandles="1" noChangeArrowheads="1" noChangeShapeType="1" noCrop="1"/>
+          </p:cNvPicPr>
+          <p:nvPr/>
+        </p:nvPicPr>
+        <p:blipFill>
+          <a:blip r:embed="rId2">
+            <a:extLst>
+              <a:ext uri="{28A0092B-C50C-407E-A947-70E740481C1C}">
+                <a14:useLocalDpi xmlns:a14="http://schemas.microsoft.com/office/drawing/2010/main" val="0"/>
+              </a:ext>
+            </a:extLst>
+          </a:blip>
+          <a:stretch>
+            <a:fillRect/>
+          </a:stretch>
+        </p:blipFill>
+        <p:spPr>
+          <a:xfrm>
+            <a:off x="0" y="266694"/>
+            <a:ext cx="9906000" cy="5572125"/>
+          </a:xfrm>
+          <a:prstGeom prst="rect">
+            <a:avLst/>
+          </a:prstGeom>
+        </p:spPr>
+      </p:pic>
+      <p:sp>
+        <p:nvSpPr>
+          <p:cNvPr id="9" name="テキスト ボックス 8">
+            <a:extLst>
+              <a:ext uri="{FF2B5EF4-FFF2-40B4-BE49-F238E27FC236}">
+                <a16:creationId xmlns:a16="http://schemas.microsoft.com/office/drawing/2014/main" id="{956617B9-B6D1-0799-E9BF-6E901F402A8E}"/>
+              </a:ext>
+            </a:extLst>
+          </p:cNvPr>
+          <p:cNvSpPr txBox="1"/>
+          <p:nvPr/>
+        </p:nvSpPr>
+        <p:spPr>
+          <a:xfrm>
+            <a:off x="9205312" y="82028"/>
+            <a:ext cx="609461" cy="369332"/>
+          </a:xfrm>
+          <a:prstGeom prst="rect">
+            <a:avLst/>
+          </a:prstGeom>
+          <a:noFill/>
+        </p:spPr>
+        <p:txBody>
+          <a:bodyPr wrap="none" rtlCol="0">
+            <a:spAutoFit/>
+          </a:bodyPr>
+          <a:lstStyle/>
+          <a:p>
+            <a:pPr algn="ctr"/>
+            <a:r>
+              <a:rPr kumimoji="1" lang="en-US" altLang="ja-JP">
+                <a:latin typeface="KaitouYokokuGothic Heavy" panose="020B0A00000000000000" pitchFamily="34" charset="0"/>
+                <a:ea typeface="KaitouYokokuGothic Heavy" panose="020B0A00000000000000" pitchFamily="34" charset="0"/>
+              </a:rPr>
+              <a:t>1/5</a:t>
+            </a:r>
+            <a:endParaRPr kumimoji="1" lang="ja-JP" altLang="en-US" sz="2800">
+              <a:latin typeface="KaitouYokokuGothic Heavy" panose="020B0A00000000000000" pitchFamily="34" charset="0"/>
+              <a:ea typeface="KaitouYokokuGothic Heavy" panose="020B0A00000000000000" pitchFamily="34" charset="0"/>
+            </a:endParaRPr>
+          </a:p>
+        </p:txBody>
+      </p:sp>
+      <p:sp>
+        <p:nvSpPr>
+          <p:cNvPr id="15" name="テキスト ボックス 14">
+            <a:extLst>
+              <a:ext uri="{FF2B5EF4-FFF2-40B4-BE49-F238E27FC236}">
+                <a16:creationId xmlns:a16="http://schemas.microsoft.com/office/drawing/2014/main" id="{DDB8911D-9722-67D9-1CF1-657852FEDB44}"/>
+              </a:ext>
+            </a:extLst>
+          </p:cNvPr>
+          <p:cNvSpPr txBox="1"/>
+          <p:nvPr/>
+        </p:nvSpPr>
+        <p:spPr>
+          <a:xfrm>
+            <a:off x="91227" y="82028"/>
+            <a:ext cx="1580882" cy="369332"/>
+          </a:xfrm>
+          <a:prstGeom prst="rect">
+            <a:avLst/>
+          </a:prstGeom>
+          <a:noFill/>
+        </p:spPr>
+        <p:txBody>
+          <a:bodyPr wrap="none" rtlCol="0">
+            <a:spAutoFit/>
+          </a:bodyPr>
+          <a:lstStyle/>
+          <a:p>
+            <a:r>
+              <a:rPr kumimoji="1" lang="ja-JP" altLang="en-US">
+                <a:latin typeface="KaitouYokokuGothic Heavy" panose="020B0A00000000000000" pitchFamily="34" charset="0"/>
+                <a:ea typeface="KaitouYokokuGothic Heavy" panose="020B0A00000000000000" pitchFamily="34" charset="0"/>
+              </a:rPr>
+              <a:t>ゲーム体験</a:t>
+            </a:r>
+          </a:p>
+        </p:txBody>
+      </p:sp>
+    </p:spTree>
+    <p:extLst>
+      <p:ext uri="{BB962C8B-B14F-4D97-AF65-F5344CB8AC3E}">
+        <p14:creationId xmlns:p14="http://schemas.microsoft.com/office/powerpoint/2010/main" val="2616445087"/>
+      </p:ext>
+    </p:extLst>
+  </p:cSld>
+  <p:clrMapOvr>
+    <a:masterClrMapping/>
+  </p:clrMapOvr>
+</p:sld>
+</file>
+
+<file path=ppt/slides/slide11.xml><?xml version="1.0" encoding="utf-8"?>
+<p:sld xmlns:a="http://schemas.openxmlformats.org/drawingml/2006/main" xmlns:r="http://schemas.openxmlformats.org/officeDocument/2006/relationships" xmlns:p="http://schemas.openxmlformats.org/presentationml/2006/main" show="0">
+  <p:cSld>
+    <p:spTree>
+      <p:nvGrpSpPr>
+        <p:cNvPr id="1" name="">
+          <a:extLst>
+            <a:ext uri="{FF2B5EF4-FFF2-40B4-BE49-F238E27FC236}">
+              <a16:creationId xmlns:a16="http://schemas.microsoft.com/office/drawing/2014/main" id="{652541AE-5D0C-666F-C55C-E9D6AFE826A0}"/>
+            </a:ext>
+          </a:extLst>
+        </p:cNvPr>
+        <p:cNvGrpSpPr/>
+        <p:nvPr/>
+      </p:nvGrpSpPr>
+      <p:grpSpPr>
+        <a:xfrm>
+          <a:off x="0" y="0"/>
+          <a:ext cx="0" cy="0"/>
+          <a:chOff x="0" y="0"/>
+          <a:chExt cx="0" cy="0"/>
+        </a:xfrm>
+      </p:grpSpPr>
+      <p:sp>
+        <p:nvSpPr>
+          <p:cNvPr id="2" name="テキスト ボックス 1">
+            <a:extLst>
+              <a:ext uri="{FF2B5EF4-FFF2-40B4-BE49-F238E27FC236}">
+                <a16:creationId xmlns:a16="http://schemas.microsoft.com/office/drawing/2014/main" id="{10100CC2-80A6-FE05-0201-8571F0340F66}"/>
+              </a:ext>
+            </a:extLst>
+          </p:cNvPr>
+          <p:cNvSpPr txBox="1"/>
+          <p:nvPr/>
+        </p:nvSpPr>
+        <p:spPr>
+          <a:xfrm>
+            <a:off x="573217" y="355600"/>
+            <a:ext cx="1819730" cy="923330"/>
+          </a:xfrm>
+          <a:prstGeom prst="rect">
+            <a:avLst/>
+          </a:prstGeom>
+          <a:noFill/>
+        </p:spPr>
+        <p:txBody>
+          <a:bodyPr wrap="none" rtlCol="0">
+            <a:spAutoFit/>
+          </a:bodyPr>
+          <a:lstStyle/>
+          <a:p>
+            <a:pPr algn="ctr"/>
+            <a:r>
+              <a:rPr kumimoji="1" lang="ja-JP" altLang="en-US" sz="5400">
+                <a:latin typeface="KaitouYokokuGothic Heavy" panose="020B0A00000000000000" pitchFamily="34" charset="0"/>
+                <a:ea typeface="KaitouYokokuGothic Heavy" panose="020B0A00000000000000" pitchFamily="34" charset="0"/>
+              </a:rPr>
+              <a:t>目次</a:t>
+            </a:r>
+          </a:p>
+        </p:txBody>
+      </p:sp>
+      <p:sp>
+        <p:nvSpPr>
+          <p:cNvPr id="5" name="テキスト ボックス 4">
+            <a:extLst>
+              <a:ext uri="{FF2B5EF4-FFF2-40B4-BE49-F238E27FC236}">
+                <a16:creationId xmlns:a16="http://schemas.microsoft.com/office/drawing/2014/main" id="{2A72B826-DE49-3884-FE84-1AC0E42EE416}"/>
+              </a:ext>
+            </a:extLst>
+          </p:cNvPr>
+          <p:cNvSpPr txBox="1"/>
+          <p:nvPr/>
+        </p:nvSpPr>
+        <p:spPr>
+          <a:xfrm>
+            <a:off x="1136620" y="1502834"/>
+            <a:ext cx="5150769" cy="923330"/>
+          </a:xfrm>
+          <a:prstGeom prst="rect">
+            <a:avLst/>
+          </a:prstGeom>
+          <a:noFill/>
+        </p:spPr>
+        <p:txBody>
+          <a:bodyPr wrap="none" rtlCol="0">
+            <a:spAutoFit/>
+          </a:bodyPr>
+          <a:lstStyle/>
+          <a:p>
+            <a:r>
+              <a:rPr kumimoji="1" lang="ja-JP" altLang="en-US" sz="4000">
+                <a:latin typeface="HGP創英角ｺﾞｼｯｸUB" panose="020B0900000000000000" pitchFamily="50" charset="-128"/>
+                <a:ea typeface="HGP創英角ｺﾞｼｯｸUB" panose="020B0900000000000000" pitchFamily="50" charset="-128"/>
+              </a:rPr>
+              <a:t>キャッチコピー</a:t>
+            </a:r>
+            <a:r>
+              <a:rPr kumimoji="1" lang="en-US" altLang="ja-JP" sz="4000">
+                <a:latin typeface="HGP創英角ｺﾞｼｯｸUB" panose="020B0900000000000000" pitchFamily="50" charset="-128"/>
+                <a:ea typeface="HGP創英角ｺﾞｼｯｸUB" panose="020B0900000000000000" pitchFamily="50" charset="-128"/>
+              </a:rPr>
+              <a:t>…</a:t>
+            </a:r>
+            <a:r>
+              <a:rPr kumimoji="1" lang="en-US" altLang="ja-JP" sz="5400">
+                <a:latin typeface="KaitouYokokuGothic Heavy" panose="020B0A00000000000000" pitchFamily="34" charset="0"/>
+                <a:ea typeface="KaitouYokokuGothic Heavy" panose="020B0A00000000000000" pitchFamily="34" charset="0"/>
+              </a:rPr>
+              <a:t>00</a:t>
+            </a:r>
+            <a:r>
+              <a:rPr kumimoji="1" lang="ja-JP" altLang="en-US" sz="4000">
+                <a:latin typeface="HGP創英角ｺﾞｼｯｸUB" panose="020B0900000000000000" pitchFamily="50" charset="-128"/>
+                <a:ea typeface="HGP創英角ｺﾞｼｯｸUB" panose="020B0900000000000000" pitchFamily="50" charset="-128"/>
+              </a:rPr>
+              <a:t>ｐ</a:t>
+            </a:r>
+            <a:r>
+              <a:rPr kumimoji="1" lang="en-US" altLang="ja-JP" sz="4000">
+                <a:latin typeface="HGP創英角ｺﾞｼｯｸUB" panose="020B0900000000000000" pitchFamily="50" charset="-128"/>
+                <a:ea typeface="HGP創英角ｺﾞｼｯｸUB" panose="020B0900000000000000" pitchFamily="50" charset="-128"/>
+              </a:rPr>
+              <a:t>.</a:t>
+            </a:r>
+            <a:endParaRPr kumimoji="1" lang="ja-JP" altLang="en-US" sz="5400">
+              <a:latin typeface="HGP創英角ｺﾞｼｯｸUB" panose="020B0900000000000000" pitchFamily="50" charset="-128"/>
+              <a:ea typeface="HGP創英角ｺﾞｼｯｸUB" panose="020B0900000000000000" pitchFamily="50" charset="-128"/>
+            </a:endParaRPr>
+          </a:p>
+        </p:txBody>
+      </p:sp>
+      <p:sp>
+        <p:nvSpPr>
+          <p:cNvPr id="19" name="テキスト ボックス 18">
+            <a:extLst>
+              <a:ext uri="{FF2B5EF4-FFF2-40B4-BE49-F238E27FC236}">
+                <a16:creationId xmlns:a16="http://schemas.microsoft.com/office/drawing/2014/main" id="{232216E5-0370-88ED-E620-D78D18959F0F}"/>
+              </a:ext>
+            </a:extLst>
+          </p:cNvPr>
+          <p:cNvSpPr txBox="1"/>
+          <p:nvPr/>
+        </p:nvSpPr>
+        <p:spPr>
+          <a:xfrm>
+            <a:off x="1339820" y="2538347"/>
+            <a:ext cx="4879862" cy="923330"/>
+          </a:xfrm>
+          <a:prstGeom prst="rect">
+            <a:avLst/>
+          </a:prstGeom>
+          <a:noFill/>
+        </p:spPr>
+        <p:txBody>
+          <a:bodyPr wrap="none" rtlCol="0">
+            <a:spAutoFit/>
+          </a:bodyPr>
+          <a:lstStyle/>
+          <a:p>
+            <a:r>
+              <a:rPr kumimoji="1" lang="ja-JP" altLang="en-US" sz="4000">
+                <a:latin typeface="HGP創英角ｺﾞｼｯｸUB" panose="020B0900000000000000" pitchFamily="50" charset="-128"/>
+                <a:ea typeface="HGP創英角ｺﾞｼｯｸUB" panose="020B0900000000000000" pitchFamily="50" charset="-128"/>
+              </a:rPr>
+              <a:t>ゲームフロー</a:t>
+            </a:r>
+            <a:r>
+              <a:rPr kumimoji="1" lang="en-US" altLang="ja-JP" sz="4000">
+                <a:latin typeface="HGP創英角ｺﾞｼｯｸUB" panose="020B0900000000000000" pitchFamily="50" charset="-128"/>
+                <a:ea typeface="HGP創英角ｺﾞｼｯｸUB" panose="020B0900000000000000" pitchFamily="50" charset="-128"/>
+              </a:rPr>
+              <a:t>…</a:t>
+            </a:r>
+            <a:r>
+              <a:rPr kumimoji="1" lang="en-US" altLang="ja-JP" sz="5400">
+                <a:latin typeface="KaitouYokokuGothic Heavy" panose="020B0A00000000000000" pitchFamily="34" charset="0"/>
+                <a:ea typeface="KaitouYokokuGothic Heavy" panose="020B0A00000000000000" pitchFamily="34" charset="0"/>
+              </a:rPr>
+              <a:t>00</a:t>
+            </a:r>
+            <a:r>
+              <a:rPr kumimoji="1" lang="ja-JP" altLang="en-US" sz="4000">
+                <a:latin typeface="HGP創英角ｺﾞｼｯｸUB" panose="020B0900000000000000" pitchFamily="50" charset="-128"/>
+                <a:ea typeface="HGP創英角ｺﾞｼｯｸUB" panose="020B0900000000000000" pitchFamily="50" charset="-128"/>
+              </a:rPr>
+              <a:t>ｐ</a:t>
+            </a:r>
+            <a:r>
+              <a:rPr kumimoji="1" lang="en-US" altLang="ja-JP" sz="4000">
+                <a:latin typeface="HGP創英角ｺﾞｼｯｸUB" panose="020B0900000000000000" pitchFamily="50" charset="-128"/>
+                <a:ea typeface="HGP創英角ｺﾞｼｯｸUB" panose="020B0900000000000000" pitchFamily="50" charset="-128"/>
+              </a:rPr>
+              <a:t>.</a:t>
+            </a:r>
+            <a:endParaRPr kumimoji="1" lang="ja-JP" altLang="en-US" sz="5400">
+              <a:latin typeface="HGP創英角ｺﾞｼｯｸUB" panose="020B0900000000000000" pitchFamily="50" charset="-128"/>
+              <a:ea typeface="HGP創英角ｺﾞｼｯｸUB" panose="020B0900000000000000" pitchFamily="50" charset="-128"/>
+            </a:endParaRPr>
+          </a:p>
+        </p:txBody>
+      </p:sp>
+      <p:sp>
+        <p:nvSpPr>
+          <p:cNvPr id="21" name="テキスト ボックス 20">
+            <a:extLst>
+              <a:ext uri="{FF2B5EF4-FFF2-40B4-BE49-F238E27FC236}">
+                <a16:creationId xmlns:a16="http://schemas.microsoft.com/office/drawing/2014/main" id="{6EFFC80D-18A9-B942-1A1D-759CA047AE9A}"/>
+              </a:ext>
+            </a:extLst>
+          </p:cNvPr>
+          <p:cNvSpPr txBox="1"/>
+          <p:nvPr/>
+        </p:nvSpPr>
+        <p:spPr>
+          <a:xfrm>
+            <a:off x="1864753" y="3589867"/>
+            <a:ext cx="5705408" cy="923330"/>
+          </a:xfrm>
+          <a:prstGeom prst="rect">
+            <a:avLst/>
+          </a:prstGeom>
+          <a:noFill/>
+        </p:spPr>
+        <p:txBody>
+          <a:bodyPr wrap="none" rtlCol="0">
+            <a:spAutoFit/>
+          </a:bodyPr>
+          <a:lstStyle/>
+          <a:p>
+            <a:r>
+              <a:rPr kumimoji="1" lang="ja-JP" altLang="en-US" sz="4000">
+                <a:latin typeface="HGP創英角ｺﾞｼｯｸUB" panose="020B0900000000000000" pitchFamily="50" charset="-128"/>
+                <a:ea typeface="HGP創英角ｺﾞｼｯｸUB" panose="020B0900000000000000" pitchFamily="50" charset="-128"/>
+              </a:rPr>
+              <a:t>ゲームシステム</a:t>
+            </a:r>
+            <a:r>
+              <a:rPr kumimoji="1" lang="en-US" altLang="ja-JP" sz="4000">
+                <a:latin typeface="HGP創英角ｺﾞｼｯｸUB" panose="020B0900000000000000" pitchFamily="50" charset="-128"/>
+                <a:ea typeface="HGP創英角ｺﾞｼｯｸUB" panose="020B0900000000000000" pitchFamily="50" charset="-128"/>
+              </a:rPr>
+              <a:t>1…</a:t>
+            </a:r>
+            <a:r>
+              <a:rPr kumimoji="1" lang="en-US" altLang="ja-JP" sz="5400">
+                <a:latin typeface="KaitouYokokuGothic Heavy" panose="020B0A00000000000000" pitchFamily="34" charset="0"/>
+                <a:ea typeface="KaitouYokokuGothic Heavy" panose="020B0A00000000000000" pitchFamily="34" charset="0"/>
+              </a:rPr>
+              <a:t>00</a:t>
+            </a:r>
+            <a:r>
+              <a:rPr kumimoji="1" lang="ja-JP" altLang="en-US" sz="4000">
+                <a:latin typeface="HGP創英角ｺﾞｼｯｸUB" panose="020B0900000000000000" pitchFamily="50" charset="-128"/>
+                <a:ea typeface="HGP創英角ｺﾞｼｯｸUB" panose="020B0900000000000000" pitchFamily="50" charset="-128"/>
+              </a:rPr>
+              <a:t>ｐ</a:t>
+            </a:r>
+            <a:r>
+              <a:rPr kumimoji="1" lang="en-US" altLang="ja-JP" sz="4000">
+                <a:latin typeface="HGP創英角ｺﾞｼｯｸUB" panose="020B0900000000000000" pitchFamily="50" charset="-128"/>
+                <a:ea typeface="HGP創英角ｺﾞｼｯｸUB" panose="020B0900000000000000" pitchFamily="50" charset="-128"/>
+              </a:rPr>
+              <a:t>.</a:t>
+            </a:r>
+            <a:endParaRPr kumimoji="1" lang="ja-JP" altLang="en-US" sz="5400">
+              <a:latin typeface="HGP創英角ｺﾞｼｯｸUB" panose="020B0900000000000000" pitchFamily="50" charset="-128"/>
+              <a:ea typeface="HGP創英角ｺﾞｼｯｸUB" panose="020B0900000000000000" pitchFamily="50" charset="-128"/>
+            </a:endParaRPr>
+          </a:p>
+        </p:txBody>
+      </p:sp>
+      <p:sp>
+        <p:nvSpPr>
+          <p:cNvPr id="23" name="テキスト ボックス 22">
+            <a:extLst>
+              <a:ext uri="{FF2B5EF4-FFF2-40B4-BE49-F238E27FC236}">
+                <a16:creationId xmlns:a16="http://schemas.microsoft.com/office/drawing/2014/main" id="{A847463B-BE0D-9B50-8568-ABA31CFFDB8A}"/>
+              </a:ext>
+            </a:extLst>
+          </p:cNvPr>
+          <p:cNvSpPr txBox="1"/>
+          <p:nvPr/>
+        </p:nvSpPr>
+        <p:spPr>
+          <a:xfrm>
+            <a:off x="3528079" y="5452534"/>
+            <a:ext cx="5383205" cy="923330"/>
+          </a:xfrm>
+          <a:prstGeom prst="rect">
+            <a:avLst/>
+          </a:prstGeom>
+          <a:noFill/>
+        </p:spPr>
+        <p:txBody>
+          <a:bodyPr wrap="none" rtlCol="0">
+            <a:spAutoFit/>
+          </a:bodyPr>
+          <a:lstStyle/>
+          <a:p>
+            <a:r>
+              <a:rPr kumimoji="1" lang="ja-JP" altLang="en-US" sz="4000">
+                <a:latin typeface="HGP創英角ｺﾞｼｯｸUB" panose="020B0900000000000000" pitchFamily="50" charset="-128"/>
+                <a:ea typeface="HGP創英角ｺﾞｼｯｸUB" panose="020B0900000000000000" pitchFamily="50" charset="-128"/>
+              </a:rPr>
+              <a:t>ゲームシステム</a:t>
+            </a:r>
+            <a:r>
+              <a:rPr kumimoji="1" lang="en-US" altLang="ja-JP" sz="4000">
+                <a:latin typeface="HGP創英角ｺﾞｼｯｸUB" panose="020B0900000000000000" pitchFamily="50" charset="-128"/>
+                <a:ea typeface="HGP創英角ｺﾞｼｯｸUB" panose="020B0900000000000000" pitchFamily="50" charset="-128"/>
+              </a:rPr>
+              <a:t>…</a:t>
+            </a:r>
+            <a:r>
+              <a:rPr kumimoji="1" lang="en-US" altLang="ja-JP" sz="5400">
+                <a:latin typeface="KaitouYokokuGothic Heavy" panose="020B0A00000000000000" pitchFamily="34" charset="0"/>
+                <a:ea typeface="KaitouYokokuGothic Heavy" panose="020B0A00000000000000" pitchFamily="34" charset="0"/>
+              </a:rPr>
+              <a:t>00</a:t>
+            </a:r>
+            <a:r>
+              <a:rPr kumimoji="1" lang="ja-JP" altLang="en-US" sz="4000">
+                <a:latin typeface="HGP創英角ｺﾞｼｯｸUB" panose="020B0900000000000000" pitchFamily="50" charset="-128"/>
+                <a:ea typeface="HGP創英角ｺﾞｼｯｸUB" panose="020B0900000000000000" pitchFamily="50" charset="-128"/>
+              </a:rPr>
+              <a:t>ｐ</a:t>
+            </a:r>
+            <a:r>
+              <a:rPr kumimoji="1" lang="en-US" altLang="ja-JP" sz="4000">
+                <a:latin typeface="HGP創英角ｺﾞｼｯｸUB" panose="020B0900000000000000" pitchFamily="50" charset="-128"/>
+                <a:ea typeface="HGP創英角ｺﾞｼｯｸUB" panose="020B0900000000000000" pitchFamily="50" charset="-128"/>
+              </a:rPr>
+              <a:t>.</a:t>
+            </a:r>
+            <a:endParaRPr kumimoji="1" lang="ja-JP" altLang="en-US" sz="5400">
+              <a:latin typeface="HGP創英角ｺﾞｼｯｸUB" panose="020B0900000000000000" pitchFamily="50" charset="-128"/>
+              <a:ea typeface="HGP創英角ｺﾞｼｯｸUB" panose="020B0900000000000000" pitchFamily="50" charset="-128"/>
+            </a:endParaRPr>
+          </a:p>
+        </p:txBody>
+      </p:sp>
+    </p:spTree>
+    <p:extLst>
+      <p:ext uri="{BB962C8B-B14F-4D97-AF65-F5344CB8AC3E}">
+        <p14:creationId xmlns:p14="http://schemas.microsoft.com/office/powerpoint/2010/main" val="2403632532"/>
+      </p:ext>
+    </p:extLst>
+  </p:cSld>
+  <p:clrMapOvr>
+    <a:masterClrMapping/>
+  </p:clrMapOvr>
+</p:sld>
+</file>
+
+<file path=ppt/slides/slide12.xml><?xml version="1.0" encoding="utf-8"?>
+<p:sld xmlns:a="http://schemas.openxmlformats.org/drawingml/2006/main" xmlns:r="http://schemas.openxmlformats.org/officeDocument/2006/relationships" xmlns:p="http://schemas.openxmlformats.org/presentationml/2006/main" show="0">
+  <p:cSld>
+    <p:spTree>
+      <p:nvGrpSpPr>
+        <p:cNvPr id="1" name="">
+          <a:extLst>
+            <a:ext uri="{FF2B5EF4-FFF2-40B4-BE49-F238E27FC236}">
+              <a16:creationId xmlns:a16="http://schemas.microsoft.com/office/drawing/2014/main" id="{74780620-4BFC-DC4C-87C0-435B8614CC71}"/>
+            </a:ext>
+          </a:extLst>
+        </p:cNvPr>
+        <p:cNvGrpSpPr/>
+        <p:nvPr/>
+      </p:nvGrpSpPr>
+      <p:grpSpPr>
+        <a:xfrm>
+          <a:off x="0" y="0"/>
+          <a:ext cx="0" cy="0"/>
+          <a:chOff x="0" y="0"/>
+          <a:chExt cx="0" cy="0"/>
+        </a:xfrm>
+      </p:grpSpPr>
+      <p:sp>
+        <p:nvSpPr>
+          <p:cNvPr id="2" name="テキスト ボックス 1">
+            <a:extLst>
+              <a:ext uri="{FF2B5EF4-FFF2-40B4-BE49-F238E27FC236}">
+                <a16:creationId xmlns:a16="http://schemas.microsoft.com/office/drawing/2014/main" id="{848E40EA-58A4-9EC2-7918-C1DEE7069FAF}"/>
+              </a:ext>
+            </a:extLst>
+          </p:cNvPr>
+          <p:cNvSpPr txBox="1"/>
+          <p:nvPr/>
+        </p:nvSpPr>
+        <p:spPr>
+          <a:xfrm>
+            <a:off x="573217" y="355600"/>
+            <a:ext cx="1819730" cy="923330"/>
+          </a:xfrm>
+          <a:prstGeom prst="rect">
+            <a:avLst/>
+          </a:prstGeom>
+          <a:noFill/>
+        </p:spPr>
+        <p:txBody>
+          <a:bodyPr wrap="none" rtlCol="0">
+            <a:spAutoFit/>
+          </a:bodyPr>
+          <a:lstStyle/>
+          <a:p>
+            <a:pPr algn="ctr"/>
+            <a:r>
+              <a:rPr kumimoji="1" lang="ja-JP" altLang="en-US" sz="5400">
+                <a:latin typeface="KaitouYokokuGothic Heavy" panose="020B0A00000000000000" pitchFamily="34" charset="0"/>
+                <a:ea typeface="KaitouYokokuGothic Heavy" panose="020B0A00000000000000" pitchFamily="34" charset="0"/>
+              </a:rPr>
+              <a:t>目次</a:t>
+            </a:r>
+          </a:p>
+        </p:txBody>
+      </p:sp>
+      <p:sp>
+        <p:nvSpPr>
+          <p:cNvPr id="5" name="テキスト ボックス 4">
+            <a:extLst>
+              <a:ext uri="{FF2B5EF4-FFF2-40B4-BE49-F238E27FC236}">
+                <a16:creationId xmlns:a16="http://schemas.microsoft.com/office/drawing/2014/main" id="{75CD706F-60D2-C2F3-6B3A-6BEFADB04AB6}"/>
+              </a:ext>
+            </a:extLst>
+          </p:cNvPr>
+          <p:cNvSpPr txBox="1"/>
+          <p:nvPr/>
+        </p:nvSpPr>
+        <p:spPr>
+          <a:xfrm>
+            <a:off x="1136620" y="1502834"/>
+            <a:ext cx="3086101" cy="707886"/>
+          </a:xfrm>
+          <a:prstGeom prst="rect">
+            <a:avLst/>
+          </a:prstGeom>
+          <a:noFill/>
+        </p:spPr>
+        <p:txBody>
+          <a:bodyPr wrap="none" rtlCol="0">
+            <a:spAutoFit/>
+          </a:bodyPr>
+          <a:lstStyle/>
+          <a:p>
+            <a:r>
+              <a:rPr kumimoji="1" lang="ja-JP" altLang="en-US" sz="4000">
+                <a:latin typeface="HGP創英角ｺﾞｼｯｸUB" panose="020B0900000000000000" pitchFamily="50" charset="-128"/>
+                <a:ea typeface="HGP創英角ｺﾞｼｯｸUB" panose="020B0900000000000000" pitchFamily="50" charset="-128"/>
+              </a:rPr>
+              <a:t>キャッチコピー</a:t>
+            </a:r>
+            <a:endParaRPr kumimoji="1" lang="ja-JP" altLang="en-US" sz="5400">
+              <a:latin typeface="HGP創英角ｺﾞｼｯｸUB" panose="020B0900000000000000" pitchFamily="50" charset="-128"/>
+              <a:ea typeface="HGP創英角ｺﾞｼｯｸUB" panose="020B0900000000000000" pitchFamily="50" charset="-128"/>
+            </a:endParaRPr>
+          </a:p>
+        </p:txBody>
+      </p:sp>
+      <p:sp>
+        <p:nvSpPr>
+          <p:cNvPr id="19" name="テキスト ボックス 18">
+            <a:extLst>
+              <a:ext uri="{FF2B5EF4-FFF2-40B4-BE49-F238E27FC236}">
+                <a16:creationId xmlns:a16="http://schemas.microsoft.com/office/drawing/2014/main" id="{39E20479-FF40-F5C4-AD31-DC9F03DD2099}"/>
+              </a:ext>
+            </a:extLst>
+          </p:cNvPr>
+          <p:cNvSpPr txBox="1"/>
+          <p:nvPr/>
+        </p:nvSpPr>
+        <p:spPr>
+          <a:xfrm>
+            <a:off x="1339820" y="2538347"/>
+            <a:ext cx="2815194" cy="707886"/>
+          </a:xfrm>
+          <a:prstGeom prst="rect">
+            <a:avLst/>
+          </a:prstGeom>
+          <a:noFill/>
+        </p:spPr>
+        <p:txBody>
+          <a:bodyPr wrap="none" rtlCol="0">
+            <a:spAutoFit/>
+          </a:bodyPr>
+          <a:lstStyle/>
+          <a:p>
+            <a:r>
+              <a:rPr kumimoji="1" lang="ja-JP" altLang="en-US" sz="4000">
+                <a:latin typeface="HGP創英角ｺﾞｼｯｸUB" panose="020B0900000000000000" pitchFamily="50" charset="-128"/>
+                <a:ea typeface="HGP創英角ｺﾞｼｯｸUB" panose="020B0900000000000000" pitchFamily="50" charset="-128"/>
+              </a:rPr>
+              <a:t>ゲームフロー</a:t>
+            </a:r>
+            <a:endParaRPr kumimoji="1" lang="ja-JP" altLang="en-US" sz="5400">
+              <a:latin typeface="HGP創英角ｺﾞｼｯｸUB" panose="020B0900000000000000" pitchFamily="50" charset="-128"/>
+              <a:ea typeface="HGP創英角ｺﾞｼｯｸUB" panose="020B0900000000000000" pitchFamily="50" charset="-128"/>
+            </a:endParaRPr>
+          </a:p>
+        </p:txBody>
+      </p:sp>
+      <p:sp>
+        <p:nvSpPr>
+          <p:cNvPr id="21" name="テキスト ボックス 20">
+            <a:extLst>
+              <a:ext uri="{FF2B5EF4-FFF2-40B4-BE49-F238E27FC236}">
+                <a16:creationId xmlns:a16="http://schemas.microsoft.com/office/drawing/2014/main" id="{F26ED407-58F8-35FF-CF03-1C6D6D8F5D9F}"/>
+              </a:ext>
+            </a:extLst>
+          </p:cNvPr>
+          <p:cNvSpPr txBox="1"/>
+          <p:nvPr/>
+        </p:nvSpPr>
+        <p:spPr>
+          <a:xfrm>
+            <a:off x="1864753" y="3589867"/>
+            <a:ext cx="3640740" cy="707886"/>
+          </a:xfrm>
+          <a:prstGeom prst="rect">
+            <a:avLst/>
+          </a:prstGeom>
+          <a:noFill/>
+        </p:spPr>
+        <p:txBody>
+          <a:bodyPr wrap="none" rtlCol="0">
+            <a:spAutoFit/>
+          </a:bodyPr>
+          <a:lstStyle/>
+          <a:p>
+            <a:r>
+              <a:rPr kumimoji="1" lang="ja-JP" altLang="en-US" sz="4000">
+                <a:latin typeface="HGP創英角ｺﾞｼｯｸUB" panose="020B0900000000000000" pitchFamily="50" charset="-128"/>
+                <a:ea typeface="HGP創英角ｺﾞｼｯｸUB" panose="020B0900000000000000" pitchFamily="50" charset="-128"/>
+              </a:rPr>
+              <a:t>ゲームシステム</a:t>
+            </a:r>
+            <a:r>
+              <a:rPr kumimoji="1" lang="en-US" altLang="ja-JP" sz="4000">
+                <a:latin typeface="HGP創英角ｺﾞｼｯｸUB" panose="020B0900000000000000" pitchFamily="50" charset="-128"/>
+                <a:ea typeface="HGP創英角ｺﾞｼｯｸUB" panose="020B0900000000000000" pitchFamily="50" charset="-128"/>
+              </a:rPr>
+              <a:t>1</a:t>
+            </a:r>
+            <a:endParaRPr kumimoji="1" lang="ja-JP" altLang="en-US" sz="5400">
+              <a:latin typeface="HGP創英角ｺﾞｼｯｸUB" panose="020B0900000000000000" pitchFamily="50" charset="-128"/>
+              <a:ea typeface="HGP創英角ｺﾞｼｯｸUB" panose="020B0900000000000000" pitchFamily="50" charset="-128"/>
+            </a:endParaRPr>
+          </a:p>
+        </p:txBody>
+      </p:sp>
+      <p:sp>
+        <p:nvSpPr>
+          <p:cNvPr id="23" name="テキスト ボックス 22">
+            <a:extLst>
+              <a:ext uri="{FF2B5EF4-FFF2-40B4-BE49-F238E27FC236}">
+                <a16:creationId xmlns:a16="http://schemas.microsoft.com/office/drawing/2014/main" id="{29752E3B-69CC-9ACF-302C-2FD5570F60AF}"/>
+              </a:ext>
+            </a:extLst>
+          </p:cNvPr>
+          <p:cNvSpPr txBox="1"/>
+          <p:nvPr/>
+        </p:nvSpPr>
+        <p:spPr>
+          <a:xfrm>
+            <a:off x="2747417" y="4516967"/>
+            <a:ext cx="3640740" cy="707886"/>
+          </a:xfrm>
+          <a:prstGeom prst="rect">
+            <a:avLst/>
+          </a:prstGeom>
+          <a:noFill/>
+        </p:spPr>
+        <p:txBody>
+          <a:bodyPr wrap="none" rtlCol="0">
+            <a:spAutoFit/>
+          </a:bodyPr>
+          <a:lstStyle/>
+          <a:p>
+            <a:r>
+              <a:rPr kumimoji="1" lang="ja-JP" altLang="en-US" sz="4000">
+                <a:latin typeface="HGP創英角ｺﾞｼｯｸUB" panose="020B0900000000000000" pitchFamily="50" charset="-128"/>
+                <a:ea typeface="HGP創英角ｺﾞｼｯｸUB" panose="020B0900000000000000" pitchFamily="50" charset="-128"/>
+              </a:rPr>
+              <a:t>ゲームシステム</a:t>
+            </a:r>
+            <a:r>
+              <a:rPr kumimoji="1" lang="en-US" altLang="ja-JP" sz="4000">
+                <a:latin typeface="HGP創英角ｺﾞｼｯｸUB" panose="020B0900000000000000" pitchFamily="50" charset="-128"/>
+                <a:ea typeface="HGP創英角ｺﾞｼｯｸUB" panose="020B0900000000000000" pitchFamily="50" charset="-128"/>
+              </a:rPr>
+              <a:t>2</a:t>
+            </a:r>
+            <a:endParaRPr kumimoji="1" lang="ja-JP" altLang="en-US" sz="5400">
+              <a:latin typeface="HGP創英角ｺﾞｼｯｸUB" panose="020B0900000000000000" pitchFamily="50" charset="-128"/>
+              <a:ea typeface="HGP創英角ｺﾞｼｯｸUB" panose="020B0900000000000000" pitchFamily="50" charset="-128"/>
+            </a:endParaRPr>
+          </a:p>
+        </p:txBody>
+      </p:sp>
+      <p:sp>
+        <p:nvSpPr>
+          <p:cNvPr id="4" name="テキスト ボックス 3">
+            <a:extLst>
+              <a:ext uri="{FF2B5EF4-FFF2-40B4-BE49-F238E27FC236}">
+                <a16:creationId xmlns:a16="http://schemas.microsoft.com/office/drawing/2014/main" id="{CE3ADC83-836F-247D-1F00-8F4DC795DDDD}"/>
+              </a:ext>
+            </a:extLst>
+          </p:cNvPr>
+          <p:cNvSpPr txBox="1"/>
+          <p:nvPr/>
+        </p:nvSpPr>
+        <p:spPr>
+          <a:xfrm>
+            <a:off x="3890417" y="5630334"/>
+            <a:ext cx="3640740" cy="707886"/>
+          </a:xfrm>
+          <a:prstGeom prst="rect">
+            <a:avLst/>
+          </a:prstGeom>
+          <a:noFill/>
+        </p:spPr>
+        <p:txBody>
+          <a:bodyPr wrap="none" rtlCol="0">
+            <a:spAutoFit/>
+          </a:bodyPr>
+          <a:lstStyle/>
+          <a:p>
+            <a:r>
+              <a:rPr kumimoji="1" lang="ja-JP" altLang="en-US" sz="4000">
+                <a:latin typeface="HGP創英角ｺﾞｼｯｸUB" panose="020B0900000000000000" pitchFamily="50" charset="-128"/>
+                <a:ea typeface="HGP創英角ｺﾞｼｯｸUB" panose="020B0900000000000000" pitchFamily="50" charset="-128"/>
+              </a:rPr>
+              <a:t>プロジェクト概要</a:t>
+            </a:r>
+            <a:endParaRPr kumimoji="1" lang="ja-JP" altLang="en-US" sz="5400">
+              <a:latin typeface="HGP創英角ｺﾞｼｯｸUB" panose="020B0900000000000000" pitchFamily="50" charset="-128"/>
+              <a:ea typeface="HGP創英角ｺﾞｼｯｸUB" panose="020B0900000000000000" pitchFamily="50" charset="-128"/>
+            </a:endParaRPr>
+          </a:p>
+        </p:txBody>
+      </p:sp>
+    </p:spTree>
+    <p:extLst>
+      <p:ext uri="{BB962C8B-B14F-4D97-AF65-F5344CB8AC3E}">
+        <p14:creationId xmlns:p14="http://schemas.microsoft.com/office/powerpoint/2010/main" val="1995168487"/>
+      </p:ext>
+    </p:extLst>
+  </p:cSld>
+  <p:clrMapOvr>
+    <a:masterClrMapping/>
+  </p:clrMapOvr>
+</p:sld>
+</file>
+
+<file path=ppt/slides/slide2.xml><?xml version="1.0" encoding="utf-8"?>
+<p:sld xmlns:a="http://schemas.openxmlformats.org/drawingml/2006/main" xmlns:r="http://schemas.openxmlformats.org/officeDocument/2006/relationships" xmlns:p="http://schemas.openxmlformats.org/presentationml/2006/main">
+  <p:cSld>
+    <p:bg>
+      <p:bgPr>
+        <a:solidFill>
+          <a:srgbClr val="262626"/>
+        </a:solidFill>
+        <a:effectLst/>
+      </p:bgPr>
+    </p:bg>
+    <p:spTree>
+      <p:nvGrpSpPr>
+        <p:cNvPr id="1" name="">
+          <a:extLst>
+            <a:ext uri="{FF2B5EF4-FFF2-40B4-BE49-F238E27FC236}">
+              <a16:creationId xmlns:a16="http://schemas.microsoft.com/office/drawing/2014/main" id="{D38F272C-3257-0F9A-8B40-71EDC5E01897}"/>
+            </a:ext>
+          </a:extLst>
+        </p:cNvPr>
+        <p:cNvGrpSpPr/>
+        <p:nvPr/>
+      </p:nvGrpSpPr>
+      <p:grpSpPr>
+        <a:xfrm>
+          <a:off x="0" y="0"/>
+          <a:ext cx="0" cy="0"/>
+          <a:chOff x="0" y="0"/>
+          <a:chExt cx="0" cy="0"/>
+        </a:xfrm>
+      </p:grpSpPr>
+      <p:sp>
+        <p:nvSpPr>
+          <p:cNvPr id="5" name="テキスト ボックス 4">
+            <a:extLst>
+              <a:ext uri="{FF2B5EF4-FFF2-40B4-BE49-F238E27FC236}">
+                <a16:creationId xmlns:a16="http://schemas.microsoft.com/office/drawing/2014/main" id="{11990FC9-608A-8FD6-444A-03F1198F619D}"/>
+              </a:ext>
+            </a:extLst>
+          </p:cNvPr>
+          <p:cNvSpPr txBox="1"/>
+          <p:nvPr/>
+        </p:nvSpPr>
+        <p:spPr>
+          <a:xfrm>
+            <a:off x="213563" y="5786970"/>
+            <a:ext cx="9478877" cy="707886"/>
+          </a:xfrm>
+          <a:prstGeom prst="rect">
+            <a:avLst/>
+          </a:prstGeom>
+          <a:noFill/>
+        </p:spPr>
+        <p:txBody>
+          <a:bodyPr wrap="none" rtlCol="0">
+            <a:spAutoFit/>
+          </a:bodyPr>
+          <a:lstStyle/>
+          <a:p>
+            <a:pPr algn="ctr"/>
+            <a:r>
+              <a:rPr kumimoji="1" lang="ja-JP" altLang="en-US" sz="4000">
+                <a:latin typeface="KaitouYokokuGothic Heavy" panose="020B0A00000000000000" pitchFamily="34" charset="0"/>
+                <a:ea typeface="KaitouYokokuGothic Heavy" panose="020B0A00000000000000" pitchFamily="34" charset="0"/>
+              </a:rPr>
+              <a:t>貼って戦い、ハコノナカを制せよ。</a:t>
+            </a:r>
+            <a:endParaRPr kumimoji="1" lang="ja-JP" altLang="en-US" sz="5400">
+              <a:latin typeface="KaitouYokokuGothic Heavy" panose="020B0A00000000000000" pitchFamily="34" charset="0"/>
+              <a:ea typeface="KaitouYokokuGothic Heavy" panose="020B0A00000000000000" pitchFamily="34" charset="0"/>
+            </a:endParaRPr>
+          </a:p>
+        </p:txBody>
+      </p:sp>
+      <p:pic>
+        <p:nvPicPr>
+          <p:cNvPr id="7" name="図 6">
+            <a:extLst>
+              <a:ext uri="{FF2B5EF4-FFF2-40B4-BE49-F238E27FC236}">
+                <a16:creationId xmlns:a16="http://schemas.microsoft.com/office/drawing/2014/main" id="{1686EB8F-D5BB-601C-1046-60EE6DA2CA8D}"/>
+              </a:ext>
+            </a:extLst>
+          </p:cNvPr>
+          <p:cNvPicPr>
+            <a:picLocks noGrp="1" noRot="1" noChangeAspect="1" noMove="1" noResize="1" noEditPoints="1" noAdjustHandles="1" noChangeArrowheads="1" noChangeShapeType="1" noCrop="1"/>
+          </p:cNvPicPr>
+          <p:nvPr/>
+        </p:nvPicPr>
+        <p:blipFill>
+          <a:blip r:embed="rId2">
+            <a:extLst>
+              <a:ext uri="{28A0092B-C50C-407E-A947-70E740481C1C}">
+                <a14:useLocalDpi xmlns:a14="http://schemas.microsoft.com/office/drawing/2010/main" val="0"/>
+              </a:ext>
+            </a:extLst>
+          </a:blip>
+          <a:srcRect/>
+          <a:stretch/>
+        </p:blipFill>
+        <p:spPr>
+          <a:xfrm>
+            <a:off x="0" y="266694"/>
+            <a:ext cx="9906000" cy="5572125"/>
+          </a:xfrm>
+          <a:prstGeom prst="rect">
+            <a:avLst/>
+          </a:prstGeom>
+        </p:spPr>
+      </p:pic>
+      <p:sp>
+        <p:nvSpPr>
+          <p:cNvPr id="9" name="テキスト ボックス 8">
+            <a:extLst>
+              <a:ext uri="{FF2B5EF4-FFF2-40B4-BE49-F238E27FC236}">
+                <a16:creationId xmlns:a16="http://schemas.microsoft.com/office/drawing/2014/main" id="{7164BFA2-9B20-D663-0272-93B4A4F2B76F}"/>
+              </a:ext>
+            </a:extLst>
+          </p:cNvPr>
+          <p:cNvSpPr txBox="1"/>
+          <p:nvPr/>
+        </p:nvSpPr>
+        <p:spPr>
+          <a:xfrm>
+            <a:off x="9205312" y="82028"/>
+            <a:ext cx="609461" cy="369332"/>
+          </a:xfrm>
+          <a:prstGeom prst="rect">
+            <a:avLst/>
+          </a:prstGeom>
+          <a:noFill/>
+        </p:spPr>
+        <p:txBody>
+          <a:bodyPr wrap="none" rtlCol="0">
+            <a:spAutoFit/>
+          </a:bodyPr>
+          <a:lstStyle/>
+          <a:p>
+            <a:pPr algn="ctr"/>
+            <a:r>
+              <a:rPr kumimoji="1" lang="en-US" altLang="ja-JP">
+                <a:latin typeface="KaitouYokokuGothic Heavy" panose="020B0A00000000000000" pitchFamily="34" charset="0"/>
+                <a:ea typeface="KaitouYokokuGothic Heavy" panose="020B0A00000000000000" pitchFamily="34" charset="0"/>
+              </a:rPr>
+              <a:t>1/5</a:t>
+            </a:r>
+            <a:endParaRPr kumimoji="1" lang="ja-JP" altLang="en-US" sz="2800">
+              <a:latin typeface="KaitouYokokuGothic Heavy" panose="020B0A00000000000000" pitchFamily="34" charset="0"/>
+              <a:ea typeface="KaitouYokokuGothic Heavy" panose="020B0A00000000000000" pitchFamily="34" charset="0"/>
+            </a:endParaRPr>
+          </a:p>
+        </p:txBody>
+      </p:sp>
+      <p:sp>
+        <p:nvSpPr>
+          <p:cNvPr id="13" name="テキスト ボックス 12">
+            <a:extLst>
+              <a:ext uri="{FF2B5EF4-FFF2-40B4-BE49-F238E27FC236}">
+                <a16:creationId xmlns:a16="http://schemas.microsoft.com/office/drawing/2014/main" id="{7A7BFE26-7421-AB3D-F8D9-B36C79ED7117}"/>
+              </a:ext>
+            </a:extLst>
+          </p:cNvPr>
+          <p:cNvSpPr txBox="1"/>
+          <p:nvPr/>
+        </p:nvSpPr>
+        <p:spPr>
+          <a:xfrm>
+            <a:off x="91227" y="82028"/>
+            <a:ext cx="1580882" cy="369332"/>
+          </a:xfrm>
+          <a:prstGeom prst="rect">
+            <a:avLst/>
+          </a:prstGeom>
+          <a:noFill/>
+        </p:spPr>
+        <p:txBody>
+          <a:bodyPr wrap="none" rtlCol="0">
+            <a:spAutoFit/>
+          </a:bodyPr>
+          <a:lstStyle/>
+          <a:p>
+            <a:r>
+              <a:rPr kumimoji="1" lang="ja-JP" altLang="en-US">
+                <a:latin typeface="KaitouYokokuGothic Heavy" panose="020B0A00000000000000" pitchFamily="34" charset="0"/>
+                <a:ea typeface="KaitouYokokuGothic Heavy" panose="020B0A00000000000000" pitchFamily="34" charset="0"/>
+              </a:rPr>
+              <a:t>ゲーム体験</a:t>
+            </a:r>
+          </a:p>
+        </p:txBody>
+      </p:sp>
+      <p:pic>
+        <p:nvPicPr>
+          <p:cNvPr id="3" name="図 2">
+            <a:extLst>
+              <a:ext uri="{FF2B5EF4-FFF2-40B4-BE49-F238E27FC236}">
+                <a16:creationId xmlns:a16="http://schemas.microsoft.com/office/drawing/2014/main" id="{4AF19FB5-8A97-CD21-B815-8E0F3EEEC73C}"/>
+              </a:ext>
+            </a:extLst>
+          </p:cNvPr>
+          <p:cNvPicPr>
+            <a:picLocks noChangeAspect="1"/>
+          </p:cNvPicPr>
+          <p:nvPr/>
+        </p:nvPicPr>
+        <p:blipFill>
+          <a:blip r:embed="rId3">
+            <a:duotone>
+              <a:schemeClr val="accent1">
+                <a:shade val="45000"/>
+                <a:satMod val="135000"/>
+              </a:schemeClr>
+              <a:prstClr val="white"/>
+            </a:duotone>
+            <a:extLst>
+              <a:ext uri="{28A0092B-C50C-407E-A947-70E740481C1C}">
+                <a14:useLocalDpi xmlns:a14="http://schemas.microsoft.com/office/drawing/2010/main" val="0"/>
+              </a:ext>
+            </a:extLst>
+          </a:blip>
+          <a:stretch>
+            <a:fillRect/>
+          </a:stretch>
+        </p:blipFill>
+        <p:spPr>
+          <a:xfrm rot="19109427">
+            <a:off x="8872120" y="2584265"/>
+            <a:ext cx="781768" cy="781768"/>
+          </a:xfrm>
+          <a:prstGeom prst="rect">
+            <a:avLst/>
+          </a:prstGeom>
+        </p:spPr>
+      </p:pic>
+      <p:pic>
+        <p:nvPicPr>
+          <p:cNvPr id="6" name="図 5">
+            <a:extLst>
+              <a:ext uri="{FF2B5EF4-FFF2-40B4-BE49-F238E27FC236}">
+                <a16:creationId xmlns:a16="http://schemas.microsoft.com/office/drawing/2014/main" id="{9B98D765-7E4C-BF49-D25A-4A392019C600}"/>
+              </a:ext>
+            </a:extLst>
+          </p:cNvPr>
+          <p:cNvPicPr>
+            <a:picLocks noChangeAspect="1"/>
+          </p:cNvPicPr>
+          <p:nvPr/>
+        </p:nvPicPr>
+        <p:blipFill>
+          <a:blip r:embed="rId3">
+            <a:duotone>
+              <a:schemeClr val="accent3">
+                <a:shade val="45000"/>
+                <a:satMod val="135000"/>
+              </a:schemeClr>
+              <a:prstClr val="white"/>
+            </a:duotone>
+            <a:extLst>
+              <a:ext uri="{28A0092B-C50C-407E-A947-70E740481C1C}">
+                <a14:useLocalDpi xmlns:a14="http://schemas.microsoft.com/office/drawing/2010/main" val="0"/>
+              </a:ext>
+            </a:extLst>
+          </a:blip>
+          <a:stretch>
+            <a:fillRect/>
+          </a:stretch>
+        </p:blipFill>
+        <p:spPr>
+          <a:xfrm rot="19109427">
+            <a:off x="536686" y="2584265"/>
+            <a:ext cx="781768" cy="781768"/>
+          </a:xfrm>
+          <a:prstGeom prst="rect">
+            <a:avLst/>
+          </a:prstGeom>
+        </p:spPr>
+      </p:pic>
+    </p:spTree>
+    <p:extLst>
+      <p:ext uri="{BB962C8B-B14F-4D97-AF65-F5344CB8AC3E}">
+        <p14:creationId xmlns:p14="http://schemas.microsoft.com/office/powerpoint/2010/main" val="2259816362"/>
+      </p:ext>
+    </p:extLst>
+  </p:cSld>
+  <p:clrMapOvr>
+    <a:masterClrMapping/>
+  </p:clrMapOvr>
+</p:sld>
+</file>
+
+<file path=ppt/slides/slide3.xml><?xml version="1.0" encoding="utf-8"?>
+<p:sld xmlns:a="http://schemas.openxmlformats.org/drawingml/2006/main" xmlns:r="http://schemas.openxmlformats.org/officeDocument/2006/relationships" xmlns:p="http://schemas.openxmlformats.org/presentationml/2006/main">
+  <p:cSld>
+    <p:bg>
+      <p:bgPr>
+        <a:solidFill>
+          <a:schemeClr val="accent3"/>
+        </a:solidFill>
+        <a:effectLst/>
+      </p:bgPr>
+    </p:bg>
+    <p:spTree>
+      <p:nvGrpSpPr>
+        <p:cNvPr id="1" name="">
+          <a:extLst>
+            <a:ext uri="{FF2B5EF4-FFF2-40B4-BE49-F238E27FC236}">
+              <a16:creationId xmlns:a16="http://schemas.microsoft.com/office/drawing/2014/main" id="{D5A17896-523C-8A07-9FA5-E7B30B283B4B}"/>
+            </a:ext>
+          </a:extLst>
+        </p:cNvPr>
+        <p:cNvGrpSpPr/>
+        <p:nvPr/>
+      </p:nvGrpSpPr>
+      <p:grpSpPr>
+        <a:xfrm>
+          <a:off x="0" y="0"/>
+          <a:ext cx="0" cy="0"/>
+          <a:chOff x="0" y="0"/>
+          <a:chExt cx="0" cy="0"/>
+        </a:xfrm>
+      </p:grpSpPr>
+      <p:sp>
+        <p:nvSpPr>
+          <p:cNvPr id="9" name="正方形/長方形 8">
+            <a:extLst>
+              <a:ext uri="{FF2B5EF4-FFF2-40B4-BE49-F238E27FC236}">
+                <a16:creationId xmlns:a16="http://schemas.microsoft.com/office/drawing/2014/main" id="{F176DCB7-F572-83C7-1A29-55BC3BBD4E9F}"/>
+              </a:ext>
+            </a:extLst>
+          </p:cNvPr>
+          <p:cNvSpPr>
+            <a:spLocks noGrp="1" noRot="1" noMove="1" noResize="1" noEditPoints="1" noAdjustHandles="1" noChangeArrowheads="1" noChangeShapeType="1"/>
+          </p:cNvSpPr>
+          <p:nvPr/>
+        </p:nvSpPr>
+        <p:spPr>
+          <a:xfrm>
+            <a:off x="4953001" y="0"/>
+            <a:ext cx="4953000" cy="6858000"/>
+          </a:xfrm>
+          <a:prstGeom prst="rect">
+            <a:avLst/>
+          </a:prstGeom>
+          <a:solidFill>
+            <a:schemeClr val="accent1"/>
+          </a:solidFill>
+          <a:ln>
+            <a:noFill/>
+          </a:ln>
+        </p:spPr>
+        <p:style>
+          <a:lnRef idx="2">
+            <a:schemeClr val="accent1">
+              <a:shade val="15000"/>
+            </a:schemeClr>
+          </a:lnRef>
+          <a:fillRef idx="1">
+            <a:schemeClr val="accent1"/>
+          </a:fillRef>
+          <a:effectRef idx="0">
+            <a:schemeClr val="accent1"/>
+          </a:effectRef>
+          <a:fontRef idx="minor">
+            <a:schemeClr val="lt1"/>
+          </a:fontRef>
+        </p:style>
+        <p:txBody>
+          <a:bodyPr rtlCol="0" anchor="ctr"/>
+          <a:lstStyle/>
+          <a:p>
+            <a:pPr algn="ctr"/>
+            <a:endParaRPr kumimoji="1" lang="ja-JP" altLang="en-US"/>
+          </a:p>
+        </p:txBody>
+      </p:sp>
+      <p:pic>
+        <p:nvPicPr>
+          <p:cNvPr id="73" name="図 72">
+            <a:extLst>
+              <a:ext uri="{FF2B5EF4-FFF2-40B4-BE49-F238E27FC236}">
+                <a16:creationId xmlns:a16="http://schemas.microsoft.com/office/drawing/2014/main" id="{94F0DF16-2D33-6E92-7A24-82ABE9F94781}"/>
+              </a:ext>
+            </a:extLst>
+          </p:cNvPr>
+          <p:cNvPicPr>
+            <a:picLocks noChangeAspect="1"/>
+          </p:cNvPicPr>
+          <p:nvPr/>
+        </p:nvPicPr>
+        <p:blipFill>
+          <a:blip r:embed="rId2">
+            <a:extLst>
+              <a:ext uri="{28A0092B-C50C-407E-A947-70E740481C1C}">
+                <a14:useLocalDpi xmlns:a14="http://schemas.microsoft.com/office/drawing/2010/main" val="0"/>
+              </a:ext>
+            </a:extLst>
+          </a:blip>
+          <a:stretch>
+            <a:fillRect/>
+          </a:stretch>
+        </p:blipFill>
+        <p:spPr>
+          <a:xfrm>
+            <a:off x="2319113" y="1549278"/>
+            <a:ext cx="5267775" cy="2963123"/>
+          </a:xfrm>
+          <a:prstGeom prst="rect">
+            <a:avLst/>
+          </a:prstGeom>
+          <a:ln w="38100">
+            <a:solidFill>
+              <a:schemeClr val="tx1"/>
+            </a:solidFill>
+          </a:ln>
+        </p:spPr>
+      </p:pic>
+      <p:sp>
+        <p:nvSpPr>
+          <p:cNvPr id="26" name="正方形/長方形 25">
+            <a:extLst>
+              <a:ext uri="{FF2B5EF4-FFF2-40B4-BE49-F238E27FC236}">
+                <a16:creationId xmlns:a16="http://schemas.microsoft.com/office/drawing/2014/main" id="{F5DE7DCC-E5A2-4CDD-F50C-A44B63D9ECBE}"/>
+              </a:ext>
+            </a:extLst>
+          </p:cNvPr>
+          <p:cNvSpPr/>
+          <p:nvPr/>
+        </p:nvSpPr>
+        <p:spPr>
+          <a:xfrm>
+            <a:off x="0" y="5846233"/>
+            <a:ext cx="9944101" cy="1011767"/>
+          </a:xfrm>
+          <a:prstGeom prst="rect">
+            <a:avLst/>
+          </a:prstGeom>
+          <a:solidFill>
+            <a:schemeClr val="bg1"/>
+          </a:solidFill>
+          <a:ln>
+            <a:noFill/>
+          </a:ln>
+        </p:spPr>
+        <p:style>
+          <a:lnRef idx="2">
+            <a:schemeClr val="accent1">
+              <a:shade val="15000"/>
+            </a:schemeClr>
+          </a:lnRef>
+          <a:fillRef idx="1">
+            <a:schemeClr val="accent1"/>
+          </a:fillRef>
+          <a:effectRef idx="0">
+            <a:schemeClr val="accent1"/>
+          </a:effectRef>
+          <a:fontRef idx="minor">
+            <a:schemeClr val="lt1"/>
+          </a:fontRef>
+        </p:style>
+        <p:txBody>
+          <a:bodyPr rtlCol="0" anchor="ctr"/>
+          <a:lstStyle/>
+          <a:p>
+            <a:pPr algn="ctr"/>
+            <a:endParaRPr kumimoji="1" lang="ja-JP" altLang="en-US"/>
+          </a:p>
+        </p:txBody>
+      </p:sp>
+      <p:sp>
+        <p:nvSpPr>
+          <p:cNvPr id="3" name="テキスト ボックス 2">
+            <a:extLst>
+              <a:ext uri="{FF2B5EF4-FFF2-40B4-BE49-F238E27FC236}">
+                <a16:creationId xmlns:a16="http://schemas.microsoft.com/office/drawing/2014/main" id="{34F8E0E1-8E1E-D141-4BC5-F3716F81B686}"/>
+              </a:ext>
+            </a:extLst>
+          </p:cNvPr>
+          <p:cNvSpPr txBox="1"/>
+          <p:nvPr/>
+        </p:nvSpPr>
+        <p:spPr>
+          <a:xfrm>
+            <a:off x="3086141" y="5977008"/>
+            <a:ext cx="3733715" cy="707886"/>
+          </a:xfrm>
+          <a:prstGeom prst="rect">
+            <a:avLst/>
+          </a:prstGeom>
+          <a:noFill/>
+        </p:spPr>
+        <p:txBody>
+          <a:bodyPr wrap="none" rtlCol="0">
+            <a:spAutoFit/>
+          </a:bodyPr>
+          <a:lstStyle/>
+          <a:p>
+            <a:pPr algn="ctr"/>
+            <a:r>
+              <a:rPr kumimoji="1" lang="ja-JP" altLang="en-US" sz="4000">
+                <a:latin typeface="KaitouYokokuGothic Heavy" panose="020B0A00000000000000" pitchFamily="34" charset="0"/>
+                <a:ea typeface="KaitouYokokuGothic Heavy" panose="020B0A00000000000000" pitchFamily="34" charset="0"/>
+              </a:rPr>
+              <a:t>陣営を選べ！</a:t>
+            </a:r>
+            <a:endParaRPr kumimoji="1" lang="ja-JP" altLang="en-US" sz="5400">
+              <a:latin typeface="KaitouYokokuGothic Heavy" panose="020B0A00000000000000" pitchFamily="34" charset="0"/>
+              <a:ea typeface="KaitouYokokuGothic Heavy" panose="020B0A00000000000000" pitchFamily="34" charset="0"/>
+            </a:endParaRPr>
+          </a:p>
+        </p:txBody>
+      </p:sp>
+      <p:sp>
+        <p:nvSpPr>
+          <p:cNvPr id="11" name="テキスト ボックス 10">
+            <a:extLst>
+              <a:ext uri="{FF2B5EF4-FFF2-40B4-BE49-F238E27FC236}">
+                <a16:creationId xmlns:a16="http://schemas.microsoft.com/office/drawing/2014/main" id="{C874BE7E-93C9-F7EE-F508-237078C86587}"/>
+              </a:ext>
+            </a:extLst>
+          </p:cNvPr>
+          <p:cNvSpPr txBox="1"/>
+          <p:nvPr/>
+        </p:nvSpPr>
+        <p:spPr>
+          <a:xfrm>
+            <a:off x="9205312" y="82028"/>
+            <a:ext cx="609461" cy="369332"/>
+          </a:xfrm>
+          <a:prstGeom prst="rect">
+            <a:avLst/>
+          </a:prstGeom>
+          <a:noFill/>
+        </p:spPr>
+        <p:txBody>
+          <a:bodyPr wrap="none" rtlCol="0">
+            <a:spAutoFit/>
+          </a:bodyPr>
+          <a:lstStyle/>
+          <a:p>
+            <a:pPr algn="ctr"/>
+            <a:r>
+              <a:rPr kumimoji="1" lang="en-US" altLang="ja-JP">
+                <a:latin typeface="KaitouYokokuGothic Heavy" panose="020B0A00000000000000" pitchFamily="34" charset="0"/>
+                <a:ea typeface="KaitouYokokuGothic Heavy" panose="020B0A00000000000000" pitchFamily="34" charset="0"/>
+              </a:rPr>
+              <a:t>1/5</a:t>
+            </a:r>
+            <a:endParaRPr kumimoji="1" lang="ja-JP" altLang="en-US" sz="2800">
+              <a:latin typeface="KaitouYokokuGothic Heavy" panose="020B0A00000000000000" pitchFamily="34" charset="0"/>
+              <a:ea typeface="KaitouYokokuGothic Heavy" panose="020B0A00000000000000" pitchFamily="34" charset="0"/>
+            </a:endParaRPr>
+          </a:p>
+        </p:txBody>
+      </p:sp>
+      <p:sp>
+        <p:nvSpPr>
+          <p:cNvPr id="13" name="テキスト ボックス 12">
+            <a:extLst>
+              <a:ext uri="{FF2B5EF4-FFF2-40B4-BE49-F238E27FC236}">
+                <a16:creationId xmlns:a16="http://schemas.microsoft.com/office/drawing/2014/main" id="{0E0069F4-7B41-BCB1-2D2A-173D4CDA076F}"/>
+              </a:ext>
+            </a:extLst>
+          </p:cNvPr>
+          <p:cNvSpPr txBox="1"/>
+          <p:nvPr/>
+        </p:nvSpPr>
+        <p:spPr>
+          <a:xfrm>
+            <a:off x="91227" y="82028"/>
+            <a:ext cx="2064989" cy="369332"/>
+          </a:xfrm>
+          <a:prstGeom prst="rect">
+            <a:avLst/>
+          </a:prstGeom>
+          <a:noFill/>
+        </p:spPr>
+        <p:txBody>
+          <a:bodyPr wrap="none" rtlCol="0">
+            <a:spAutoFit/>
+          </a:bodyPr>
+          <a:lstStyle/>
+          <a:p>
+            <a:r>
+              <a:rPr kumimoji="1" lang="ja-JP" altLang="en-US">
+                <a:latin typeface="KaitouYokokuGothic Heavy" panose="020B0A00000000000000" pitchFamily="34" charset="0"/>
+                <a:ea typeface="KaitouYokokuGothic Heavy" panose="020B0A00000000000000" pitchFamily="34" charset="0"/>
+              </a:rPr>
+              <a:t>ゲームシステム</a:t>
+            </a:r>
+            <a:endParaRPr kumimoji="1" lang="ja-JP" altLang="en-US" sz="2800">
+              <a:latin typeface="KaitouYokokuGothic Heavy" panose="020B0A00000000000000" pitchFamily="34" charset="0"/>
+              <a:ea typeface="KaitouYokokuGothic Heavy" panose="020B0A00000000000000" pitchFamily="34" charset="0"/>
+            </a:endParaRPr>
+          </a:p>
+        </p:txBody>
+      </p:sp>
+      <p:grpSp>
+        <p:nvGrpSpPr>
+          <p:cNvPr id="61" name="グループ化 60">
+            <a:extLst>
+              <a:ext uri="{FF2B5EF4-FFF2-40B4-BE49-F238E27FC236}">
+                <a16:creationId xmlns:a16="http://schemas.microsoft.com/office/drawing/2014/main" id="{9E889919-FE89-1EEA-68FB-5307691F7F49}"/>
+              </a:ext>
+            </a:extLst>
+          </p:cNvPr>
+          <p:cNvGrpSpPr/>
+          <p:nvPr/>
+        </p:nvGrpSpPr>
+        <p:grpSpPr>
+          <a:xfrm>
+            <a:off x="305620" y="3914349"/>
+            <a:ext cx="4125603" cy="1859919"/>
+            <a:chOff x="305620" y="3914349"/>
+            <a:chExt cx="4125603" cy="1859919"/>
+          </a:xfrm>
+        </p:grpSpPr>
+        <p:sp>
+          <p:nvSpPr>
+            <p:cNvPr id="22" name="テキスト ボックス 21">
+              <a:extLst>
+                <a:ext uri="{FF2B5EF4-FFF2-40B4-BE49-F238E27FC236}">
+                  <a16:creationId xmlns:a16="http://schemas.microsoft.com/office/drawing/2014/main" id="{96B903F6-2C71-7758-895E-4D962042347E}"/>
+                </a:ext>
+              </a:extLst>
+            </p:cNvPr>
+            <p:cNvSpPr txBox="1"/>
+            <p:nvPr/>
+          </p:nvSpPr>
+          <p:spPr>
+            <a:xfrm>
+              <a:off x="445438" y="4664565"/>
+              <a:ext cx="3647152" cy="1015663"/>
+            </a:xfrm>
+            <a:prstGeom prst="rect">
+              <a:avLst/>
+            </a:prstGeom>
+            <a:noFill/>
+          </p:spPr>
+          <p:txBody>
+            <a:bodyPr wrap="none" rtlCol="0">
+              <a:spAutoFit/>
+            </a:bodyPr>
+            <a:lstStyle/>
+            <a:p>
+              <a:r>
+                <a:rPr kumimoji="1" lang="ja-JP" altLang="en-US" sz="3000">
+                  <a:latin typeface="+mj-ea"/>
+                  <a:ea typeface="+mj-ea"/>
+                </a:rPr>
+                <a:t>ハコを完全に封じ</a:t>
+              </a:r>
+              <a:br>
+                <a:rPr kumimoji="1" lang="en-US" altLang="ja-JP" sz="3000">
+                  <a:latin typeface="+mj-ea"/>
+                  <a:ea typeface="+mj-ea"/>
+                </a:rPr>
+              </a:br>
+              <a:r>
+                <a:rPr kumimoji="1" lang="ja-JP" altLang="en-US" sz="3000">
+                  <a:latin typeface="+mj-ea"/>
+                  <a:ea typeface="+mj-ea"/>
+                </a:rPr>
+                <a:t>モノノケを滅却する</a:t>
+              </a:r>
+            </a:p>
+          </p:txBody>
+        </p:sp>
+        <p:sp>
+          <p:nvSpPr>
+            <p:cNvPr id="28" name="テキスト ボックス 27">
+              <a:extLst>
+                <a:ext uri="{FF2B5EF4-FFF2-40B4-BE49-F238E27FC236}">
+                  <a16:creationId xmlns:a16="http://schemas.microsoft.com/office/drawing/2014/main" id="{1D280F8E-712C-1D46-773A-0DDC2B6A691F}"/>
+                </a:ext>
+              </a:extLst>
+            </p:cNvPr>
+            <p:cNvSpPr txBox="1"/>
+            <p:nvPr/>
+          </p:nvSpPr>
+          <p:spPr>
+            <a:xfrm>
+              <a:off x="445438" y="3914349"/>
+              <a:ext cx="1210588" cy="707886"/>
+            </a:xfrm>
+            <a:prstGeom prst="rect">
+              <a:avLst/>
+            </a:prstGeom>
+            <a:noFill/>
+          </p:spPr>
+          <p:txBody>
+            <a:bodyPr wrap="none" rtlCol="0">
+              <a:spAutoFit/>
+            </a:bodyPr>
+            <a:lstStyle/>
+            <a:p>
+              <a:pPr algn="ctr"/>
+              <a:r>
+                <a:rPr kumimoji="1" lang="ja-JP" altLang="en-US" sz="4000">
+                  <a:latin typeface="+mj-ea"/>
+                  <a:ea typeface="+mj-ea"/>
+                </a:rPr>
+                <a:t>目的</a:t>
+              </a:r>
+              <a:endParaRPr kumimoji="1" lang="ja-JP" altLang="en-US" sz="5400">
+                <a:latin typeface="+mj-ea"/>
+                <a:ea typeface="+mj-ea"/>
+              </a:endParaRPr>
+            </a:p>
+          </p:txBody>
+        </p:sp>
+        <p:cxnSp>
+          <p:nvCxnSpPr>
+            <p:cNvPr id="30" name="直線コネクタ 29">
+              <a:extLst>
+                <a:ext uri="{FF2B5EF4-FFF2-40B4-BE49-F238E27FC236}">
+                  <a16:creationId xmlns:a16="http://schemas.microsoft.com/office/drawing/2014/main" id="{9760CACE-EE33-DC75-E421-753B792992B4}"/>
+                </a:ext>
+              </a:extLst>
+            </p:cNvPr>
+            <p:cNvCxnSpPr>
+              <a:cxnSpLocks/>
+            </p:cNvCxnSpPr>
+            <p:nvPr/>
+          </p:nvCxnSpPr>
+          <p:spPr>
+            <a:xfrm>
+              <a:off x="305620" y="4669368"/>
+              <a:ext cx="1620547" cy="0"/>
+            </a:xfrm>
+            <a:prstGeom prst="line">
+              <a:avLst/>
+            </a:prstGeom>
+            <a:ln>
+              <a:solidFill>
+                <a:schemeClr val="tx1"/>
+              </a:solidFill>
+            </a:ln>
+          </p:spPr>
+          <p:style>
+            <a:lnRef idx="2">
+              <a:schemeClr val="accent1"/>
+            </a:lnRef>
+            <a:fillRef idx="0">
+              <a:schemeClr val="accent1"/>
+            </a:fillRef>
+            <a:effectRef idx="1">
+              <a:schemeClr val="accent1"/>
+            </a:effectRef>
+            <a:fontRef idx="minor">
+              <a:schemeClr val="tx1"/>
+            </a:fontRef>
+          </p:style>
+        </p:cxnSp>
+        <p:cxnSp>
+          <p:nvCxnSpPr>
+            <p:cNvPr id="32" name="直線コネクタ 31">
+              <a:extLst>
+                <a:ext uri="{FF2B5EF4-FFF2-40B4-BE49-F238E27FC236}">
+                  <a16:creationId xmlns:a16="http://schemas.microsoft.com/office/drawing/2014/main" id="{0F6655F1-BEB3-A491-3202-27B9966B43AC}"/>
+                </a:ext>
+              </a:extLst>
+            </p:cNvPr>
+            <p:cNvCxnSpPr>
+              <a:cxnSpLocks/>
+            </p:cNvCxnSpPr>
+            <p:nvPr/>
+          </p:nvCxnSpPr>
+          <p:spPr>
+            <a:xfrm rot="16200000">
+              <a:off x="-359011" y="4821768"/>
+              <a:ext cx="1620547" cy="0"/>
+            </a:xfrm>
+            <a:prstGeom prst="line">
+              <a:avLst/>
+            </a:prstGeom>
+            <a:ln>
+              <a:solidFill>
+                <a:schemeClr val="tx1"/>
+              </a:solidFill>
+            </a:ln>
+          </p:spPr>
+          <p:style>
+            <a:lnRef idx="2">
+              <a:schemeClr val="accent1"/>
+            </a:lnRef>
+            <a:fillRef idx="0">
+              <a:schemeClr val="accent1"/>
+            </a:fillRef>
+            <a:effectRef idx="1">
+              <a:schemeClr val="accent1"/>
+            </a:effectRef>
+            <a:fontRef idx="minor">
+              <a:schemeClr val="tx1"/>
+            </a:fontRef>
+          </p:style>
+        </p:cxnSp>
+        <p:grpSp>
+          <p:nvGrpSpPr>
+            <p:cNvPr id="35" name="グループ化 34">
+              <a:extLst>
+                <a:ext uri="{FF2B5EF4-FFF2-40B4-BE49-F238E27FC236}">
+                  <a16:creationId xmlns:a16="http://schemas.microsoft.com/office/drawing/2014/main" id="{12995F75-E174-EE9B-9C18-59BC0A249678}"/>
+                </a:ext>
+              </a:extLst>
+            </p:cNvPr>
+            <p:cNvGrpSpPr/>
+            <p:nvPr/>
+          </p:nvGrpSpPr>
+          <p:grpSpPr>
+            <a:xfrm rot="5400000" flipH="1">
+              <a:off x="3325884" y="4668929"/>
+              <a:ext cx="1056856" cy="1153822"/>
+              <a:chOff x="523224" y="4630621"/>
+              <a:chExt cx="1056856" cy="1153822"/>
+            </a:xfrm>
+          </p:grpSpPr>
+          <p:cxnSp>
+            <p:nvCxnSpPr>
+              <p:cNvPr id="33" name="直線コネクタ 32">
+                <a:extLst>
+                  <a:ext uri="{FF2B5EF4-FFF2-40B4-BE49-F238E27FC236}">
+                    <a16:creationId xmlns:a16="http://schemas.microsoft.com/office/drawing/2014/main" id="{F7F0D957-FE50-03FE-F67B-CD15861A6094}"/>
+                  </a:ext>
+                </a:extLst>
+              </p:cNvPr>
+              <p:cNvCxnSpPr>
+                <a:cxnSpLocks/>
+              </p:cNvCxnSpPr>
+              <p:nvPr/>
+            </p:nvCxnSpPr>
+            <p:spPr>
+              <a:xfrm rot="5400000" flipH="1" flipV="1">
+                <a:off x="1051652" y="4293339"/>
+                <a:ext cx="0" cy="1056856"/>
+              </a:xfrm>
+              <a:prstGeom prst="line">
+                <a:avLst/>
+              </a:prstGeom>
+              <a:ln>
+                <a:solidFill>
+                  <a:schemeClr val="tx1"/>
+                </a:solidFill>
+              </a:ln>
+            </p:spPr>
+            <p:style>
+              <a:lnRef idx="2">
+                <a:schemeClr val="accent1"/>
+              </a:lnRef>
+              <a:fillRef idx="0">
+                <a:schemeClr val="accent1"/>
+              </a:fillRef>
+              <a:effectRef idx="1">
+                <a:schemeClr val="accent1"/>
+              </a:effectRef>
+              <a:fontRef idx="minor">
+                <a:schemeClr val="tx1"/>
+              </a:fontRef>
+            </p:style>
+          </p:cxnSp>
+          <p:cxnSp>
+            <p:nvCxnSpPr>
+              <p:cNvPr id="34" name="直線コネクタ 33">
+                <a:extLst>
+                  <a:ext uri="{FF2B5EF4-FFF2-40B4-BE49-F238E27FC236}">
+                    <a16:creationId xmlns:a16="http://schemas.microsoft.com/office/drawing/2014/main" id="{13DEE22C-A174-CDE8-5733-E8F62A55926C}"/>
+                  </a:ext>
+                </a:extLst>
+              </p:cNvPr>
+              <p:cNvCxnSpPr>
+                <a:cxnSpLocks/>
+              </p:cNvCxnSpPr>
+              <p:nvPr/>
+            </p:nvCxnSpPr>
+            <p:spPr>
+              <a:xfrm rot="5400000" flipH="1">
+                <a:off x="26752" y="5207532"/>
+                <a:ext cx="1153822" cy="0"/>
+              </a:xfrm>
+              <a:prstGeom prst="line">
+                <a:avLst/>
+              </a:prstGeom>
+              <a:ln>
+                <a:solidFill>
+                  <a:schemeClr val="tx1"/>
+                </a:solidFill>
+              </a:ln>
+            </p:spPr>
+            <p:style>
+              <a:lnRef idx="2">
+                <a:schemeClr val="accent1"/>
+              </a:lnRef>
+              <a:fillRef idx="0">
+                <a:schemeClr val="accent1"/>
+              </a:fillRef>
+              <a:effectRef idx="1">
+                <a:schemeClr val="accent1"/>
+              </a:effectRef>
+              <a:fontRef idx="minor">
+                <a:schemeClr val="tx1"/>
+              </a:fontRef>
+            </p:style>
+          </p:cxnSp>
+        </p:grpSp>
+      </p:grpSp>
+      <p:grpSp>
+        <p:nvGrpSpPr>
+          <p:cNvPr id="51" name="グループ化 50">
+            <a:extLst>
+              <a:ext uri="{FF2B5EF4-FFF2-40B4-BE49-F238E27FC236}">
+                <a16:creationId xmlns:a16="http://schemas.microsoft.com/office/drawing/2014/main" id="{5A41F544-AFEA-078F-D6B3-D8BBF6108123}"/>
+              </a:ext>
+            </a:extLst>
+          </p:cNvPr>
+          <p:cNvGrpSpPr/>
+          <p:nvPr/>
+        </p:nvGrpSpPr>
+        <p:grpSpPr>
+          <a:xfrm>
+            <a:off x="305620" y="607659"/>
+            <a:ext cx="4125602" cy="2723973"/>
+            <a:chOff x="305620" y="607659"/>
+            <a:chExt cx="4125602" cy="2723973"/>
+          </a:xfrm>
+        </p:grpSpPr>
+        <p:sp>
+          <p:nvSpPr>
+            <p:cNvPr id="50" name="四角形: 角を丸くする 49">
+              <a:extLst>
+                <a:ext uri="{FF2B5EF4-FFF2-40B4-BE49-F238E27FC236}">
+                  <a16:creationId xmlns:a16="http://schemas.microsoft.com/office/drawing/2014/main" id="{5DCF1B56-86C6-D1FE-7BF1-29C682CC8E28}"/>
+                </a:ext>
+              </a:extLst>
+            </p:cNvPr>
+            <p:cNvSpPr/>
+            <p:nvPr/>
+          </p:nvSpPr>
+          <p:spPr>
+            <a:xfrm>
+              <a:off x="1058333" y="666230"/>
+              <a:ext cx="3372889" cy="662435"/>
+            </a:xfrm>
+            <a:prstGeom prst="roundRect">
+              <a:avLst/>
+            </a:prstGeom>
+            <a:solidFill>
+              <a:schemeClr val="tx1">
+                <a:lumMod val="25000"/>
+                <a:alpha val="50000"/>
+              </a:schemeClr>
+            </a:solidFill>
+            <a:ln>
+              <a:solidFill>
+                <a:schemeClr val="bg1">
+                  <a:lumMod val="10000"/>
+                  <a:lumOff val="90000"/>
+                </a:schemeClr>
+              </a:solidFill>
+            </a:ln>
+          </p:spPr>
+          <p:style>
+            <a:lnRef idx="2">
+              <a:schemeClr val="accent1">
+                <a:shade val="15000"/>
+              </a:schemeClr>
+            </a:lnRef>
+            <a:fillRef idx="1">
+              <a:schemeClr val="accent1"/>
+            </a:fillRef>
+            <a:effectRef idx="0">
+              <a:schemeClr val="accent1"/>
+            </a:effectRef>
+            <a:fontRef idx="minor">
+              <a:schemeClr val="lt1"/>
+            </a:fontRef>
+          </p:style>
+          <p:txBody>
+            <a:bodyPr rtlCol="0" anchor="ctr"/>
+            <a:lstStyle/>
+            <a:p>
+              <a:pPr algn="ctr"/>
+              <a:endParaRPr kumimoji="1" lang="ja-JP" altLang="en-US"/>
+            </a:p>
+          </p:txBody>
+        </p:sp>
+        <p:grpSp>
+          <p:nvGrpSpPr>
+            <p:cNvPr id="14" name="グループ化 13">
+              <a:extLst>
+                <a:ext uri="{FF2B5EF4-FFF2-40B4-BE49-F238E27FC236}">
+                  <a16:creationId xmlns:a16="http://schemas.microsoft.com/office/drawing/2014/main" id="{5A596075-43A2-9B12-1BDD-5CF5E22E482B}"/>
+                </a:ext>
+              </a:extLst>
+            </p:cNvPr>
+            <p:cNvGrpSpPr/>
+            <p:nvPr/>
+          </p:nvGrpSpPr>
+          <p:grpSpPr>
+            <a:xfrm>
+              <a:off x="305620" y="666231"/>
+              <a:ext cx="1692519" cy="1692519"/>
+              <a:chOff x="4483246" y="3219025"/>
+              <a:chExt cx="1665251" cy="1665251"/>
+            </a:xfrm>
+            <a:effectLst>
+              <a:glow rad="88900">
+                <a:schemeClr val="tx1">
+                  <a:alpha val="70000"/>
+                </a:schemeClr>
+              </a:glow>
+            </a:effectLst>
+            <a:scene3d>
+              <a:camera prst="perspectiveLeft" fov="1200000">
+                <a:rot lat="0" lon="600002" rev="0"/>
+              </a:camera>
+              <a:lightRig rig="threePt" dir="t"/>
+            </a:scene3d>
+          </p:grpSpPr>
+          <p:sp>
+            <p:nvSpPr>
+              <p:cNvPr id="15" name="楕円 14">
+                <a:extLst>
+                  <a:ext uri="{FF2B5EF4-FFF2-40B4-BE49-F238E27FC236}">
+                    <a16:creationId xmlns:a16="http://schemas.microsoft.com/office/drawing/2014/main" id="{97FD4281-A011-6291-1D2C-8819F606FF9D}"/>
+                  </a:ext>
+                </a:extLst>
+              </p:cNvPr>
+              <p:cNvSpPr/>
+              <p:nvPr/>
+            </p:nvSpPr>
+            <p:spPr>
+              <a:xfrm>
+                <a:off x="4483246" y="3219025"/>
+                <a:ext cx="1665251" cy="1665251"/>
+              </a:xfrm>
+              <a:prstGeom prst="ellipse">
+                <a:avLst/>
+              </a:prstGeom>
+              <a:solidFill>
+                <a:schemeClr val="accent3"/>
+              </a:solidFill>
+              <a:ln w="38100">
+                <a:solidFill>
+                  <a:schemeClr val="tx1"/>
+                </a:solidFill>
+              </a:ln>
+            </p:spPr>
+            <p:style>
+              <a:lnRef idx="2">
+                <a:schemeClr val="accent1">
+                  <a:shade val="15000"/>
+                </a:schemeClr>
+              </a:lnRef>
+              <a:fillRef idx="1">
+                <a:schemeClr val="accent1"/>
+              </a:fillRef>
+              <a:effectRef idx="0">
+                <a:schemeClr val="accent1"/>
+              </a:effectRef>
+              <a:fontRef idx="minor">
+                <a:schemeClr val="lt1"/>
+              </a:fontRef>
+            </p:style>
+            <p:txBody>
+              <a:bodyPr rtlCol="0" anchor="ctr"/>
+              <a:lstStyle/>
+              <a:p>
+                <a:pPr algn="ctr"/>
+                <a:endParaRPr kumimoji="1" lang="ja-JP" altLang="en-US"/>
+              </a:p>
+            </p:txBody>
+          </p:sp>
+          <p:grpSp>
+            <p:nvGrpSpPr>
+              <p:cNvPr id="16" name="グループ化 15">
+                <a:extLst>
+                  <a:ext uri="{FF2B5EF4-FFF2-40B4-BE49-F238E27FC236}">
+                    <a16:creationId xmlns:a16="http://schemas.microsoft.com/office/drawing/2014/main" id="{6EB57D03-CD53-B7C3-45ED-B19DE9C3429C}"/>
+                  </a:ext>
+                </a:extLst>
+              </p:cNvPr>
+              <p:cNvGrpSpPr/>
+              <p:nvPr/>
+            </p:nvGrpSpPr>
+            <p:grpSpPr>
+              <a:xfrm>
+                <a:off x="4788714" y="3667651"/>
+                <a:ext cx="1054315" cy="767998"/>
+                <a:chOff x="6786897" y="4358057"/>
+                <a:chExt cx="1322470" cy="963332"/>
+              </a:xfrm>
+            </p:grpSpPr>
+            <p:sp>
+              <p:nvSpPr>
+                <p:cNvPr id="17" name="月 16">
+                  <a:extLst>
+                    <a:ext uri="{FF2B5EF4-FFF2-40B4-BE49-F238E27FC236}">
+                      <a16:creationId xmlns:a16="http://schemas.microsoft.com/office/drawing/2014/main" id="{6A092C48-0A06-ED5C-B1EA-EAF7E78263C7}"/>
+                    </a:ext>
+                  </a:extLst>
+                </p:cNvPr>
+                <p:cNvSpPr/>
+                <p:nvPr/>
+              </p:nvSpPr>
+              <p:spPr>
+                <a:xfrm rot="16200000">
+                  <a:off x="7211850" y="4423873"/>
+                  <a:ext cx="472563" cy="1322470"/>
+                </a:xfrm>
+                <a:prstGeom prst="moon">
+                  <a:avLst>
+                    <a:gd name="adj" fmla="val 21507"/>
+                  </a:avLst>
+                </a:prstGeom>
+                <a:solidFill>
+                  <a:schemeClr val="tx1"/>
+                </a:solidFill>
+                <a:ln>
+                  <a:noFill/>
+                </a:ln>
+              </p:spPr>
+              <p:style>
+                <a:lnRef idx="2">
+                  <a:schemeClr val="accent1">
+                    <a:shade val="15000"/>
+                  </a:schemeClr>
+                </a:lnRef>
+                <a:fillRef idx="1">
+                  <a:schemeClr val="accent1"/>
+                </a:fillRef>
+                <a:effectRef idx="0">
+                  <a:schemeClr val="accent1"/>
+                </a:effectRef>
+                <a:fontRef idx="minor">
+                  <a:schemeClr val="lt1"/>
+                </a:fontRef>
+              </p:style>
+              <p:txBody>
+                <a:bodyPr rtlCol="0" anchor="ctr"/>
+                <a:lstStyle/>
+                <a:p>
+                  <a:pPr algn="ctr"/>
+                  <a:endParaRPr kumimoji="1" lang="ja-JP" altLang="en-US"/>
+                </a:p>
+              </p:txBody>
+            </p:sp>
+            <p:sp>
+              <p:nvSpPr>
+                <p:cNvPr id="18" name="二等辺三角形 17">
+                  <a:extLst>
+                    <a:ext uri="{FF2B5EF4-FFF2-40B4-BE49-F238E27FC236}">
+                      <a16:creationId xmlns:a16="http://schemas.microsoft.com/office/drawing/2014/main" id="{490EBB0F-091A-1B75-EF7F-22AA17610AD4}"/>
+                    </a:ext>
+                  </a:extLst>
+                </p:cNvPr>
+                <p:cNvSpPr/>
+                <p:nvPr/>
+              </p:nvSpPr>
+              <p:spPr>
+                <a:xfrm>
+                  <a:off x="7047674" y="4358057"/>
+                  <a:ext cx="800911" cy="878569"/>
+                </a:xfrm>
+                <a:prstGeom prst="triangle">
+                  <a:avLst/>
+                </a:prstGeom>
+                <a:solidFill>
+                  <a:schemeClr val="tx1"/>
+                </a:solidFill>
+                <a:ln>
+                  <a:noFill/>
+                </a:ln>
+              </p:spPr>
+              <p:style>
+                <a:lnRef idx="2">
+                  <a:schemeClr val="accent1">
+                    <a:shade val="15000"/>
+                  </a:schemeClr>
+                </a:lnRef>
+                <a:fillRef idx="1">
+                  <a:schemeClr val="accent1"/>
+                </a:fillRef>
+                <a:effectRef idx="0">
+                  <a:schemeClr val="accent1"/>
+                </a:effectRef>
+                <a:fontRef idx="minor">
+                  <a:schemeClr val="lt1"/>
+                </a:fontRef>
+              </p:style>
+              <p:txBody>
+                <a:bodyPr rtlCol="0" anchor="ctr"/>
+                <a:lstStyle/>
+                <a:p>
+                  <a:pPr algn="ctr"/>
+                  <a:endParaRPr kumimoji="1" lang="ja-JP" altLang="en-US"/>
+                </a:p>
+              </p:txBody>
+            </p:sp>
+          </p:grpSp>
+        </p:grpSp>
+        <p:sp>
+          <p:nvSpPr>
+            <p:cNvPr id="20" name="テキスト ボックス 19">
+              <a:extLst>
+                <a:ext uri="{FF2B5EF4-FFF2-40B4-BE49-F238E27FC236}">
+                  <a16:creationId xmlns:a16="http://schemas.microsoft.com/office/drawing/2014/main" id="{D672AA4E-0E5C-E7BC-3EA3-698547EE4A1A}"/>
+                </a:ext>
+              </a:extLst>
+            </p:cNvPr>
+            <p:cNvSpPr txBox="1"/>
+            <p:nvPr/>
+          </p:nvSpPr>
+          <p:spPr>
+            <a:xfrm>
+              <a:off x="1991518" y="607659"/>
+              <a:ext cx="2236510" cy="707886"/>
+            </a:xfrm>
+            <a:prstGeom prst="rect">
+              <a:avLst/>
+            </a:prstGeom>
+            <a:noFill/>
+          </p:spPr>
+          <p:txBody>
+            <a:bodyPr wrap="none" rtlCol="0">
+              <a:spAutoFit/>
+            </a:bodyPr>
+            <a:lstStyle/>
+            <a:p>
+              <a:pPr algn="ctr"/>
+              <a:r>
+                <a:rPr kumimoji="1" lang="ja-JP" altLang="en-US" sz="4000">
+                  <a:latin typeface="+mj-ea"/>
+                  <a:ea typeface="+mj-ea"/>
+                </a:rPr>
+                <a:t>ジュツシ</a:t>
+              </a:r>
+              <a:endParaRPr kumimoji="1" lang="ja-JP" altLang="en-US" sz="5400">
+                <a:latin typeface="+mj-ea"/>
+                <a:ea typeface="+mj-ea"/>
+              </a:endParaRPr>
+            </a:p>
+          </p:txBody>
+        </p:sp>
+        <p:cxnSp>
+          <p:nvCxnSpPr>
+            <p:cNvPr id="40" name="コネクタ: カギ線 39">
+              <a:extLst>
+                <a:ext uri="{FF2B5EF4-FFF2-40B4-BE49-F238E27FC236}">
+                  <a16:creationId xmlns:a16="http://schemas.microsoft.com/office/drawing/2014/main" id="{FBEC1555-864E-AC5E-105F-F6AB875C25BB}"/>
+                </a:ext>
+              </a:extLst>
+            </p:cNvPr>
+            <p:cNvCxnSpPr>
+              <a:cxnSpLocks/>
+              <a:stCxn id="15" idx="4"/>
+            </p:cNvCxnSpPr>
+            <p:nvPr/>
+          </p:nvCxnSpPr>
+          <p:spPr>
+            <a:xfrm rot="16200000" flipH="1">
+              <a:off x="1315049" y="2195581"/>
+              <a:ext cx="972883" cy="1299220"/>
+            </a:xfrm>
+            <a:prstGeom prst="bentConnector2">
+              <a:avLst/>
+            </a:prstGeom>
+            <a:ln w="63500">
+              <a:gradFill>
+                <a:gsLst>
+                  <a:gs pos="0">
+                    <a:schemeClr val="tx1"/>
+                  </a:gs>
+                  <a:gs pos="74000">
+                    <a:schemeClr val="accent3">
+                      <a:lumMod val="40000"/>
+                      <a:lumOff val="60000"/>
+                    </a:schemeClr>
+                  </a:gs>
+                  <a:gs pos="83000">
+                    <a:schemeClr val="accent3">
+                      <a:lumMod val="60000"/>
+                      <a:lumOff val="40000"/>
+                    </a:schemeClr>
+                  </a:gs>
+                  <a:gs pos="100000">
+                    <a:schemeClr val="accent3">
+                      <a:lumMod val="20000"/>
+                      <a:lumOff val="80000"/>
+                    </a:schemeClr>
+                  </a:gs>
+                </a:gsLst>
+                <a:lin ang="5400000" scaled="1"/>
+              </a:gradFill>
+              <a:headEnd type="oval"/>
+              <a:tailEnd type="oval"/>
+            </a:ln>
+          </p:spPr>
+          <p:style>
+            <a:lnRef idx="2">
+              <a:schemeClr val="accent1"/>
+            </a:lnRef>
+            <a:fillRef idx="0">
+              <a:schemeClr val="accent1"/>
+            </a:fillRef>
+            <a:effectRef idx="1">
+              <a:schemeClr val="accent1"/>
+            </a:effectRef>
+            <a:fontRef idx="minor">
+              <a:schemeClr val="tx1"/>
+            </a:fontRef>
+          </p:style>
+        </p:cxnSp>
+      </p:grpSp>
+      <p:sp>
+        <p:nvSpPr>
+          <p:cNvPr id="53" name="四角形: 角を丸くする 52">
+            <a:extLst>
+              <a:ext uri="{FF2B5EF4-FFF2-40B4-BE49-F238E27FC236}">
+                <a16:creationId xmlns:a16="http://schemas.microsoft.com/office/drawing/2014/main" id="{99270C89-52BF-982D-7F9A-E9E26517D088}"/>
+              </a:ext>
+            </a:extLst>
+          </p:cNvPr>
+          <p:cNvSpPr/>
+          <p:nvPr/>
+        </p:nvSpPr>
+        <p:spPr>
+          <a:xfrm flipH="1">
+            <a:off x="5474778" y="666230"/>
+            <a:ext cx="3372889" cy="662435"/>
+          </a:xfrm>
+          <a:prstGeom prst="roundRect">
+            <a:avLst/>
+          </a:prstGeom>
+          <a:solidFill>
+            <a:schemeClr val="bg1">
+              <a:lumMod val="10000"/>
+              <a:lumOff val="90000"/>
+              <a:alpha val="50000"/>
+            </a:schemeClr>
+          </a:solidFill>
+          <a:ln>
+            <a:solidFill>
+              <a:schemeClr val="tx1">
+                <a:lumMod val="10000"/>
+              </a:schemeClr>
+            </a:solidFill>
+          </a:ln>
+        </p:spPr>
+        <p:style>
+          <a:lnRef idx="2">
+            <a:schemeClr val="accent1">
+              <a:shade val="15000"/>
+            </a:schemeClr>
+          </a:lnRef>
+          <a:fillRef idx="1">
+            <a:schemeClr val="accent1"/>
+          </a:fillRef>
+          <a:effectRef idx="0">
+            <a:schemeClr val="accent1"/>
+          </a:effectRef>
+          <a:fontRef idx="minor">
+            <a:schemeClr val="lt1"/>
+          </a:fontRef>
+        </p:style>
+        <p:txBody>
+          <a:bodyPr rtlCol="0" anchor="ctr"/>
+          <a:lstStyle/>
+          <a:p>
+            <a:pPr algn="ctr"/>
+            <a:endParaRPr kumimoji="1" lang="ja-JP" altLang="en-US"/>
+          </a:p>
+        </p:txBody>
+      </p:sp>
+      <p:sp>
+        <p:nvSpPr>
+          <p:cNvPr id="57" name="楕円 56">
+            <a:extLst>
+              <a:ext uri="{FF2B5EF4-FFF2-40B4-BE49-F238E27FC236}">
+                <a16:creationId xmlns:a16="http://schemas.microsoft.com/office/drawing/2014/main" id="{F40EC533-CECD-E2A4-72F3-ECC3D9BB02EB}"/>
+              </a:ext>
+            </a:extLst>
+          </p:cNvPr>
+          <p:cNvSpPr/>
+          <p:nvPr/>
+        </p:nvSpPr>
+        <p:spPr>
+          <a:xfrm flipH="1">
+            <a:off x="7907861" y="666231"/>
+            <a:ext cx="1692519" cy="1692519"/>
+          </a:xfrm>
+          <a:prstGeom prst="ellipse">
+            <a:avLst/>
+          </a:prstGeom>
+          <a:solidFill>
+            <a:schemeClr val="accent1"/>
+          </a:solidFill>
+          <a:ln w="38100">
+            <a:solidFill>
+              <a:schemeClr val="tx1">
+                <a:lumMod val="10000"/>
+              </a:schemeClr>
+            </a:solidFill>
+          </a:ln>
+          <a:effectLst>
+            <a:glow rad="88900">
+              <a:schemeClr val="tx1">
+                <a:lumMod val="10000"/>
+                <a:alpha val="60000"/>
+              </a:schemeClr>
+            </a:glow>
+          </a:effectLst>
+          <a:scene3d>
+            <a:camera prst="perspectiveLeft" fov="1200000">
+              <a:rot lat="0" lon="600002" rev="0"/>
+            </a:camera>
+            <a:lightRig rig="threePt" dir="t"/>
+          </a:scene3d>
+        </p:spPr>
+        <p:style>
+          <a:lnRef idx="2">
+            <a:schemeClr val="accent1">
+              <a:shade val="15000"/>
+            </a:schemeClr>
+          </a:lnRef>
+          <a:fillRef idx="1">
+            <a:schemeClr val="accent1"/>
+          </a:fillRef>
+          <a:effectRef idx="0">
+            <a:schemeClr val="accent1"/>
+          </a:effectRef>
+          <a:fontRef idx="minor">
+            <a:schemeClr val="lt1"/>
+          </a:fontRef>
+        </p:style>
+        <p:txBody>
+          <a:bodyPr rtlCol="0" anchor="ctr"/>
+          <a:lstStyle/>
+          <a:p>
+            <a:pPr algn="ctr"/>
+            <a:endParaRPr kumimoji="1" lang="ja-JP" altLang="en-US"/>
+          </a:p>
+        </p:txBody>
+      </p:sp>
+      <p:sp>
+        <p:nvSpPr>
+          <p:cNvPr id="55" name="テキスト ボックス 54">
+            <a:extLst>
+              <a:ext uri="{FF2B5EF4-FFF2-40B4-BE49-F238E27FC236}">
+                <a16:creationId xmlns:a16="http://schemas.microsoft.com/office/drawing/2014/main" id="{5380F6AA-D9AD-33D8-EF93-A2BD0EA0CCCD}"/>
+              </a:ext>
+            </a:extLst>
+          </p:cNvPr>
+          <p:cNvSpPr txBox="1"/>
+          <p:nvPr/>
+        </p:nvSpPr>
+        <p:spPr>
+          <a:xfrm flipH="1">
+            <a:off x="5677971" y="675387"/>
+            <a:ext cx="2236510" cy="707886"/>
+          </a:xfrm>
+          <a:prstGeom prst="rect">
+            <a:avLst/>
+          </a:prstGeom>
+          <a:noFill/>
+        </p:spPr>
+        <p:txBody>
+          <a:bodyPr wrap="none" rtlCol="0">
+            <a:spAutoFit/>
+          </a:bodyPr>
+          <a:lstStyle/>
+          <a:p>
+            <a:pPr algn="ctr"/>
+            <a:r>
+              <a:rPr kumimoji="1" lang="ja-JP" altLang="en-US" sz="4000">
+                <a:solidFill>
+                  <a:schemeClr val="tx1">
+                    <a:lumMod val="10000"/>
+                  </a:schemeClr>
+                </a:solidFill>
+                <a:latin typeface="+mn-ea"/>
+              </a:rPr>
+              <a:t>モノノケ</a:t>
+            </a:r>
+            <a:endParaRPr kumimoji="1" lang="ja-JP" altLang="en-US" sz="5400">
+              <a:solidFill>
+                <a:schemeClr val="tx1">
+                  <a:lumMod val="10000"/>
+                </a:schemeClr>
+              </a:solidFill>
+              <a:latin typeface="+mn-ea"/>
+            </a:endParaRPr>
+          </a:p>
+        </p:txBody>
+      </p:sp>
+      <p:cxnSp>
+        <p:nvCxnSpPr>
+          <p:cNvPr id="56" name="コネクタ: カギ線 55">
+            <a:extLst>
+              <a:ext uri="{FF2B5EF4-FFF2-40B4-BE49-F238E27FC236}">
+                <a16:creationId xmlns:a16="http://schemas.microsoft.com/office/drawing/2014/main" id="{2D025796-BCCE-1174-297B-C627E291035C}"/>
+              </a:ext>
+            </a:extLst>
+          </p:cNvPr>
+          <p:cNvCxnSpPr>
+            <a:cxnSpLocks/>
+            <a:stCxn id="57" idx="4"/>
+          </p:cNvCxnSpPr>
+          <p:nvPr/>
+        </p:nvCxnSpPr>
+        <p:spPr>
+          <a:xfrm rot="5400000">
+            <a:off x="7618069" y="2195581"/>
+            <a:ext cx="972882" cy="1299220"/>
+          </a:xfrm>
+          <a:prstGeom prst="bentConnector2">
+            <a:avLst/>
+          </a:prstGeom>
+          <a:ln w="63500">
+            <a:gradFill>
+              <a:gsLst>
+                <a:gs pos="0">
+                  <a:schemeClr val="tx1">
+                    <a:lumMod val="10000"/>
+                  </a:schemeClr>
+                </a:gs>
+                <a:gs pos="74000">
+                  <a:schemeClr val="accent1">
+                    <a:lumMod val="45000"/>
+                    <a:lumOff val="55000"/>
+                  </a:schemeClr>
+                </a:gs>
+                <a:gs pos="83000">
+                  <a:schemeClr val="accent1">
+                    <a:lumMod val="45000"/>
+                    <a:lumOff val="55000"/>
+                  </a:schemeClr>
+                </a:gs>
+                <a:gs pos="100000">
+                  <a:schemeClr val="accent1">
+                    <a:lumMod val="30000"/>
+                    <a:lumOff val="70000"/>
+                  </a:schemeClr>
+                </a:gs>
+              </a:gsLst>
+              <a:lin ang="5400000" scaled="1"/>
+            </a:gradFill>
+            <a:headEnd type="oval"/>
+            <a:tailEnd type="oval"/>
+          </a:ln>
+        </p:spPr>
+        <p:style>
+          <a:lnRef idx="2">
+            <a:schemeClr val="accent1"/>
+          </a:lnRef>
+          <a:fillRef idx="0">
+            <a:schemeClr val="accent1"/>
+          </a:fillRef>
+          <a:effectRef idx="1">
+            <a:schemeClr val="accent1"/>
+          </a:effectRef>
+          <a:fontRef idx="minor">
+            <a:schemeClr val="tx1"/>
+          </a:fontRef>
+        </p:style>
+      </p:cxnSp>
+      <p:grpSp>
+        <p:nvGrpSpPr>
+          <p:cNvPr id="62" name="グループ化 61">
+            <a:extLst>
+              <a:ext uri="{FF2B5EF4-FFF2-40B4-BE49-F238E27FC236}">
+                <a16:creationId xmlns:a16="http://schemas.microsoft.com/office/drawing/2014/main" id="{168600B9-9A1C-3BCA-24E2-780FEBCC6522}"/>
+              </a:ext>
+            </a:extLst>
+          </p:cNvPr>
+          <p:cNvGrpSpPr/>
+          <p:nvPr/>
+        </p:nvGrpSpPr>
+        <p:grpSpPr>
+          <a:xfrm flipH="1">
+            <a:off x="5474777" y="3971499"/>
+            <a:ext cx="4125603" cy="1802769"/>
+            <a:chOff x="305620" y="3971499"/>
+            <a:chExt cx="4125603" cy="1802769"/>
+          </a:xfrm>
+        </p:grpSpPr>
+        <p:sp>
+          <p:nvSpPr>
+            <p:cNvPr id="63" name="テキスト ボックス 62">
+              <a:extLst>
+                <a:ext uri="{FF2B5EF4-FFF2-40B4-BE49-F238E27FC236}">
+                  <a16:creationId xmlns:a16="http://schemas.microsoft.com/office/drawing/2014/main" id="{2B8977FA-3407-5B3B-39C1-7FA633DB6CA8}"/>
+                </a:ext>
+              </a:extLst>
+            </p:cNvPr>
+            <p:cNvSpPr txBox="1"/>
+            <p:nvPr/>
+          </p:nvSpPr>
+          <p:spPr>
+            <a:xfrm>
+              <a:off x="799996" y="4723413"/>
+              <a:ext cx="3416320" cy="954107"/>
+            </a:xfrm>
+            <a:prstGeom prst="rect">
+              <a:avLst/>
+            </a:prstGeom>
+            <a:noFill/>
+          </p:spPr>
+          <p:txBody>
+            <a:bodyPr wrap="none" rtlCol="0">
+              <a:spAutoFit/>
+            </a:bodyPr>
+            <a:lstStyle/>
+            <a:p>
+              <a:r>
+                <a:rPr kumimoji="1" lang="ja-JP" altLang="en-US" sz="2800">
+                  <a:solidFill>
+                    <a:schemeClr val="tx1">
+                      <a:lumMod val="10000"/>
+                    </a:schemeClr>
+                  </a:solidFill>
+                  <a:latin typeface="+mn-ea"/>
+                </a:rPr>
+                <a:t>ハコの封印を解除し</a:t>
+              </a:r>
+              <a:br>
+                <a:rPr kumimoji="1" lang="en-US" altLang="ja-JP" sz="2800">
+                  <a:solidFill>
+                    <a:schemeClr val="tx1">
+                      <a:lumMod val="10000"/>
+                    </a:schemeClr>
+                  </a:solidFill>
+                  <a:latin typeface="+mn-ea"/>
+                </a:rPr>
+              </a:br>
+              <a:r>
+                <a:rPr kumimoji="1" lang="ja-JP" altLang="en-US" sz="2800">
+                  <a:solidFill>
+                    <a:schemeClr val="tx1">
+                      <a:lumMod val="10000"/>
+                    </a:schemeClr>
+                  </a:solidFill>
+                  <a:latin typeface="+mn-ea"/>
+                </a:rPr>
+                <a:t>ジュツシに復讐する</a:t>
+              </a:r>
+              <a:endParaRPr kumimoji="1" lang="ja-JP" altLang="en-US" sz="4000">
+                <a:solidFill>
+                  <a:schemeClr val="tx1">
+                    <a:lumMod val="10000"/>
+                  </a:schemeClr>
+                </a:solidFill>
+                <a:latin typeface="+mn-ea"/>
+              </a:endParaRPr>
+            </a:p>
+          </p:txBody>
+        </p:sp>
+        <p:sp>
+          <p:nvSpPr>
+            <p:cNvPr id="64" name="テキスト ボックス 63">
+              <a:extLst>
+                <a:ext uri="{FF2B5EF4-FFF2-40B4-BE49-F238E27FC236}">
+                  <a16:creationId xmlns:a16="http://schemas.microsoft.com/office/drawing/2014/main" id="{55A4A79F-F297-F163-6E92-84B9227BAAF4}"/>
+                </a:ext>
+              </a:extLst>
+            </p:cNvPr>
+            <p:cNvSpPr txBox="1"/>
+            <p:nvPr/>
+          </p:nvSpPr>
+          <p:spPr>
+            <a:xfrm>
+              <a:off x="445438" y="3971499"/>
+              <a:ext cx="1210588" cy="707886"/>
+            </a:xfrm>
+            <a:prstGeom prst="rect">
+              <a:avLst/>
+            </a:prstGeom>
+            <a:noFill/>
+          </p:spPr>
+          <p:txBody>
+            <a:bodyPr wrap="none" rtlCol="0">
+              <a:spAutoFit/>
+            </a:bodyPr>
+            <a:lstStyle/>
+            <a:p>
+              <a:pPr algn="ctr"/>
+              <a:r>
+                <a:rPr kumimoji="1" lang="ja-JP" altLang="en-US" sz="4000">
+                  <a:solidFill>
+                    <a:schemeClr val="tx1">
+                      <a:lumMod val="10000"/>
+                    </a:schemeClr>
+                  </a:solidFill>
+                  <a:latin typeface="+mn-ea"/>
+                </a:rPr>
+                <a:t>目的</a:t>
+              </a:r>
+              <a:endParaRPr kumimoji="1" lang="ja-JP" altLang="en-US" sz="5400">
+                <a:solidFill>
+                  <a:schemeClr val="tx1">
+                    <a:lumMod val="10000"/>
+                  </a:schemeClr>
+                </a:solidFill>
+                <a:latin typeface="+mn-ea"/>
+              </a:endParaRPr>
+            </a:p>
+          </p:txBody>
+        </p:sp>
+        <p:cxnSp>
+          <p:nvCxnSpPr>
+            <p:cNvPr id="65" name="直線コネクタ 64">
+              <a:extLst>
+                <a:ext uri="{FF2B5EF4-FFF2-40B4-BE49-F238E27FC236}">
+                  <a16:creationId xmlns:a16="http://schemas.microsoft.com/office/drawing/2014/main" id="{48DA1C4C-F439-BBCA-3245-EF12ED95ECB4}"/>
+                </a:ext>
+              </a:extLst>
+            </p:cNvPr>
+            <p:cNvCxnSpPr>
+              <a:cxnSpLocks/>
+            </p:cNvCxnSpPr>
+            <p:nvPr/>
+          </p:nvCxnSpPr>
+          <p:spPr>
+            <a:xfrm>
+              <a:off x="305620" y="4669368"/>
+              <a:ext cx="1620547" cy="0"/>
+            </a:xfrm>
+            <a:prstGeom prst="line">
+              <a:avLst/>
+            </a:prstGeom>
+            <a:ln>
+              <a:solidFill>
+                <a:schemeClr val="tx1">
+                  <a:lumMod val="10000"/>
+                </a:schemeClr>
+              </a:solidFill>
+            </a:ln>
+          </p:spPr>
+          <p:style>
+            <a:lnRef idx="2">
+              <a:schemeClr val="accent1"/>
+            </a:lnRef>
+            <a:fillRef idx="0">
+              <a:schemeClr val="accent1"/>
+            </a:fillRef>
+            <a:effectRef idx="1">
+              <a:schemeClr val="accent1"/>
+            </a:effectRef>
+            <a:fontRef idx="minor">
+              <a:schemeClr val="tx1"/>
+            </a:fontRef>
+          </p:style>
+        </p:cxnSp>
+        <p:cxnSp>
+          <p:nvCxnSpPr>
+            <p:cNvPr id="66" name="直線コネクタ 65">
+              <a:extLst>
+                <a:ext uri="{FF2B5EF4-FFF2-40B4-BE49-F238E27FC236}">
+                  <a16:creationId xmlns:a16="http://schemas.microsoft.com/office/drawing/2014/main" id="{134D58B2-3F77-FFCF-ED1A-4BBB929C18F8}"/>
+                </a:ext>
+              </a:extLst>
+            </p:cNvPr>
+            <p:cNvCxnSpPr>
+              <a:cxnSpLocks/>
+            </p:cNvCxnSpPr>
+            <p:nvPr/>
+          </p:nvCxnSpPr>
+          <p:spPr>
+            <a:xfrm rot="16200000">
+              <a:off x="-359011" y="4821768"/>
+              <a:ext cx="1620547" cy="0"/>
+            </a:xfrm>
+            <a:prstGeom prst="line">
+              <a:avLst/>
+            </a:prstGeom>
+            <a:ln>
+              <a:solidFill>
+                <a:schemeClr val="tx1">
+                  <a:lumMod val="10000"/>
+                </a:schemeClr>
+              </a:solidFill>
+            </a:ln>
+          </p:spPr>
+          <p:style>
+            <a:lnRef idx="2">
+              <a:schemeClr val="accent1"/>
+            </a:lnRef>
+            <a:fillRef idx="0">
+              <a:schemeClr val="accent1"/>
+            </a:fillRef>
+            <a:effectRef idx="1">
+              <a:schemeClr val="accent1"/>
+            </a:effectRef>
+            <a:fontRef idx="minor">
+              <a:schemeClr val="tx1"/>
+            </a:fontRef>
+          </p:style>
+        </p:cxnSp>
+        <p:grpSp>
+          <p:nvGrpSpPr>
+            <p:cNvPr id="67" name="グループ化 66">
+              <a:extLst>
+                <a:ext uri="{FF2B5EF4-FFF2-40B4-BE49-F238E27FC236}">
+                  <a16:creationId xmlns:a16="http://schemas.microsoft.com/office/drawing/2014/main" id="{AAF999CF-6BCF-720C-33D8-C11DF61D7F7D}"/>
+                </a:ext>
+              </a:extLst>
+            </p:cNvPr>
+            <p:cNvGrpSpPr/>
+            <p:nvPr/>
+          </p:nvGrpSpPr>
+          <p:grpSpPr>
+            <a:xfrm rot="5400000" flipH="1">
+              <a:off x="3325884" y="4668929"/>
+              <a:ext cx="1056856" cy="1153822"/>
+              <a:chOff x="523224" y="4630621"/>
+              <a:chExt cx="1056856" cy="1153822"/>
+            </a:xfrm>
+          </p:grpSpPr>
+          <p:cxnSp>
+            <p:nvCxnSpPr>
+              <p:cNvPr id="68" name="直線コネクタ 67">
+                <a:extLst>
+                  <a:ext uri="{FF2B5EF4-FFF2-40B4-BE49-F238E27FC236}">
+                    <a16:creationId xmlns:a16="http://schemas.microsoft.com/office/drawing/2014/main" id="{1E8C1853-2DD5-770B-C0AA-F6606117D797}"/>
+                  </a:ext>
+                </a:extLst>
+              </p:cNvPr>
+              <p:cNvCxnSpPr>
+                <a:cxnSpLocks/>
+              </p:cNvCxnSpPr>
+              <p:nvPr/>
+            </p:nvCxnSpPr>
+            <p:spPr>
+              <a:xfrm rot="5400000" flipH="1" flipV="1">
+                <a:off x="1051652" y="4293339"/>
+                <a:ext cx="0" cy="1056856"/>
+              </a:xfrm>
+              <a:prstGeom prst="line">
+                <a:avLst/>
+              </a:prstGeom>
+              <a:ln>
+                <a:solidFill>
+                  <a:schemeClr val="tx1">
+                    <a:lumMod val="10000"/>
+                  </a:schemeClr>
+                </a:solidFill>
+              </a:ln>
+            </p:spPr>
+            <p:style>
+              <a:lnRef idx="2">
+                <a:schemeClr val="accent1"/>
+              </a:lnRef>
+              <a:fillRef idx="0">
+                <a:schemeClr val="accent1"/>
+              </a:fillRef>
+              <a:effectRef idx="1">
+                <a:schemeClr val="accent1"/>
+              </a:effectRef>
+              <a:fontRef idx="minor">
+                <a:schemeClr val="tx1"/>
+              </a:fontRef>
+            </p:style>
+          </p:cxnSp>
+          <p:cxnSp>
+            <p:nvCxnSpPr>
+              <p:cNvPr id="69" name="直線コネクタ 68">
+                <a:extLst>
+                  <a:ext uri="{FF2B5EF4-FFF2-40B4-BE49-F238E27FC236}">
+                    <a16:creationId xmlns:a16="http://schemas.microsoft.com/office/drawing/2014/main" id="{39AB0FA0-FC56-6078-20A7-ED5F49064B4D}"/>
+                  </a:ext>
+                </a:extLst>
+              </p:cNvPr>
+              <p:cNvCxnSpPr>
+                <a:cxnSpLocks/>
+              </p:cNvCxnSpPr>
+              <p:nvPr/>
+            </p:nvCxnSpPr>
+            <p:spPr>
+              <a:xfrm rot="5400000" flipH="1">
+                <a:off x="26752" y="5207532"/>
+                <a:ext cx="1153822" cy="0"/>
+              </a:xfrm>
+              <a:prstGeom prst="line">
+                <a:avLst/>
+              </a:prstGeom>
+              <a:ln>
+                <a:solidFill>
+                  <a:schemeClr val="tx1">
+                    <a:lumMod val="10000"/>
+                  </a:schemeClr>
+                </a:solidFill>
+              </a:ln>
+            </p:spPr>
+            <p:style>
+              <a:lnRef idx="2">
+                <a:schemeClr val="accent1"/>
+              </a:lnRef>
+              <a:fillRef idx="0">
+                <a:schemeClr val="accent1"/>
+              </a:fillRef>
+              <a:effectRef idx="1">
+                <a:schemeClr val="accent1"/>
+              </a:effectRef>
+              <a:fontRef idx="minor">
+                <a:schemeClr val="tx1"/>
+              </a:fontRef>
+            </p:style>
+          </p:cxnSp>
+        </p:grpSp>
+      </p:grpSp>
+      <p:pic>
+        <p:nvPicPr>
+          <p:cNvPr id="71" name="図 70">
+            <a:extLst>
+              <a:ext uri="{FF2B5EF4-FFF2-40B4-BE49-F238E27FC236}">
+                <a16:creationId xmlns:a16="http://schemas.microsoft.com/office/drawing/2014/main" id="{9A4A402A-FF10-8604-169A-4113A465E2E9}"/>
+              </a:ext>
+            </a:extLst>
+          </p:cNvPr>
+          <p:cNvPicPr>
+            <a:picLocks noChangeAspect="1"/>
+          </p:cNvPicPr>
+          <p:nvPr/>
+        </p:nvPicPr>
+        <p:blipFill>
+          <a:blip r:embed="rId3">
+            <a:extLst>
+              <a:ext uri="{28A0092B-C50C-407E-A947-70E740481C1C}">
+                <a14:useLocalDpi xmlns:a14="http://schemas.microsoft.com/office/drawing/2010/main" val="0"/>
+              </a:ext>
+            </a:extLst>
+          </a:blip>
+          <a:stretch>
+            <a:fillRect/>
+          </a:stretch>
+        </p:blipFill>
+        <p:spPr>
+          <a:xfrm>
+            <a:off x="8275841" y="1003220"/>
+            <a:ext cx="956558" cy="1018541"/>
+          </a:xfrm>
+          <a:prstGeom prst="rect">
+            <a:avLst/>
+          </a:prstGeom>
+          <a:scene3d>
+            <a:camera prst="perspectiveLeft" fov="1200000">
+              <a:rot lat="0" lon="600000" rev="0"/>
+            </a:camera>
+            <a:lightRig rig="threePt" dir="t"/>
+          </a:scene3d>
+        </p:spPr>
+      </p:pic>
+      <p:sp>
+        <p:nvSpPr>
+          <p:cNvPr id="74" name="直角三角形 73">
+            <a:extLst>
+              <a:ext uri="{FF2B5EF4-FFF2-40B4-BE49-F238E27FC236}">
+                <a16:creationId xmlns:a16="http://schemas.microsoft.com/office/drawing/2014/main" id="{82031ADE-7A66-5A53-59DE-3DF31FFCF37B}"/>
+              </a:ext>
+            </a:extLst>
+          </p:cNvPr>
+          <p:cNvSpPr/>
+          <p:nvPr/>
+        </p:nvSpPr>
+        <p:spPr>
+          <a:xfrm>
+            <a:off x="0" y="5861572"/>
+            <a:ext cx="914400" cy="995520"/>
+          </a:xfrm>
+          <a:prstGeom prst="rtTriangle">
+            <a:avLst/>
+          </a:prstGeom>
+          <a:solidFill>
+            <a:schemeClr val="accent3"/>
+          </a:solidFill>
+          <a:ln>
+            <a:noFill/>
+          </a:ln>
+        </p:spPr>
+        <p:style>
+          <a:lnRef idx="2">
+            <a:schemeClr val="accent1">
+              <a:shade val="15000"/>
+            </a:schemeClr>
+          </a:lnRef>
+          <a:fillRef idx="1">
+            <a:schemeClr val="accent1"/>
+          </a:fillRef>
+          <a:effectRef idx="0">
+            <a:schemeClr val="accent1"/>
+          </a:effectRef>
+          <a:fontRef idx="minor">
+            <a:schemeClr val="lt1"/>
+          </a:fontRef>
+        </p:style>
+        <p:txBody>
+          <a:bodyPr rtlCol="0" anchor="ctr"/>
+          <a:lstStyle/>
+          <a:p>
+            <a:pPr algn="ctr"/>
+            <a:endParaRPr kumimoji="1" lang="ja-JP" altLang="en-US"/>
+          </a:p>
+        </p:txBody>
+      </p:sp>
+      <p:sp>
+        <p:nvSpPr>
+          <p:cNvPr id="76" name="直角三角形 75">
+            <a:extLst>
+              <a:ext uri="{FF2B5EF4-FFF2-40B4-BE49-F238E27FC236}">
+                <a16:creationId xmlns:a16="http://schemas.microsoft.com/office/drawing/2014/main" id="{759D2810-4217-49A1-5F58-0AEBD443EA55}"/>
+              </a:ext>
+            </a:extLst>
+          </p:cNvPr>
+          <p:cNvSpPr/>
+          <p:nvPr/>
+        </p:nvSpPr>
+        <p:spPr>
+          <a:xfrm flipH="1">
+            <a:off x="8995933" y="5854356"/>
+            <a:ext cx="914400" cy="995520"/>
+          </a:xfrm>
+          <a:prstGeom prst="rtTriangle">
+            <a:avLst/>
+          </a:prstGeom>
+          <a:solidFill>
+            <a:schemeClr val="accent1"/>
+          </a:solidFill>
+          <a:ln>
+            <a:noFill/>
+          </a:ln>
+        </p:spPr>
+        <p:style>
+          <a:lnRef idx="2">
+            <a:schemeClr val="accent1">
+              <a:shade val="15000"/>
+            </a:schemeClr>
+          </a:lnRef>
+          <a:fillRef idx="1">
+            <a:schemeClr val="accent1"/>
+          </a:fillRef>
+          <a:effectRef idx="0">
+            <a:schemeClr val="accent1"/>
+          </a:effectRef>
+          <a:fontRef idx="minor">
+            <a:schemeClr val="lt1"/>
+          </a:fontRef>
+        </p:style>
+        <p:txBody>
+          <a:bodyPr rtlCol="0" anchor="ctr"/>
+          <a:lstStyle/>
+          <a:p>
+            <a:pPr algn="ctr"/>
+            <a:endParaRPr kumimoji="1" lang="ja-JP" altLang="en-US"/>
+          </a:p>
+        </p:txBody>
+      </p:sp>
+      <p:sp>
+        <p:nvSpPr>
+          <p:cNvPr id="83" name="テキスト ボックス 82">
+            <a:extLst>
+              <a:ext uri="{FF2B5EF4-FFF2-40B4-BE49-F238E27FC236}">
+                <a16:creationId xmlns:a16="http://schemas.microsoft.com/office/drawing/2014/main" id="{BC1A9EC0-139C-C4A1-B2D7-FBF9543FA06B}"/>
+              </a:ext>
+            </a:extLst>
+          </p:cNvPr>
+          <p:cNvSpPr txBox="1"/>
+          <p:nvPr/>
+        </p:nvSpPr>
+        <p:spPr>
+          <a:xfrm>
+            <a:off x="4496786" y="708633"/>
+            <a:ext cx="912429" cy="584775"/>
+          </a:xfrm>
+          <a:prstGeom prst="rect">
+            <a:avLst/>
+          </a:prstGeom>
+          <a:noFill/>
+        </p:spPr>
+        <p:txBody>
+          <a:bodyPr wrap="none" rtlCol="0">
+            <a:spAutoFit/>
+          </a:bodyPr>
+          <a:lstStyle/>
+          <a:p>
+            <a:pPr algn="ctr"/>
+            <a:r>
+              <a:rPr kumimoji="1" lang="en-US" altLang="ja-JP" sz="3200">
+                <a:latin typeface="KaitouYokokuGothic Heavy" panose="020B0A00000000000000" pitchFamily="34" charset="0"/>
+                <a:ea typeface="KaitouYokokuGothic Heavy" panose="020B0A00000000000000" pitchFamily="34" charset="0"/>
+              </a:rPr>
+              <a:t>V</a:t>
+            </a:r>
+            <a:r>
+              <a:rPr kumimoji="1" lang="en-US" altLang="ja-JP" sz="3200">
+                <a:solidFill>
+                  <a:schemeClr val="tx1">
+                    <a:lumMod val="10000"/>
+                  </a:schemeClr>
+                </a:solidFill>
+                <a:latin typeface="KaitouYokokuGothic Heavy" panose="020B0A00000000000000" pitchFamily="34" charset="0"/>
+                <a:ea typeface="KaitouYokokuGothic Heavy" panose="020B0A00000000000000" pitchFamily="34" charset="0"/>
+              </a:rPr>
+              <a:t>S</a:t>
+            </a:r>
+            <a:endParaRPr kumimoji="1" lang="ja-JP" altLang="en-US" sz="4400">
+              <a:solidFill>
+                <a:schemeClr val="tx1">
+                  <a:lumMod val="10000"/>
+                </a:schemeClr>
+              </a:solidFill>
+              <a:latin typeface="KaitouYokokuGothic Heavy" panose="020B0A00000000000000" pitchFamily="34" charset="0"/>
+              <a:ea typeface="KaitouYokokuGothic Heavy" panose="020B0A00000000000000" pitchFamily="34" charset="0"/>
+            </a:endParaRPr>
+          </a:p>
+        </p:txBody>
+      </p:sp>
+    </p:spTree>
+    <p:extLst>
+      <p:ext uri="{BB962C8B-B14F-4D97-AF65-F5344CB8AC3E}">
+        <p14:creationId xmlns:p14="http://schemas.microsoft.com/office/powerpoint/2010/main" val="354609332"/>
+      </p:ext>
+    </p:extLst>
+  </p:cSld>
+  <p:clrMapOvr>
+    <a:masterClrMapping/>
+  </p:clrMapOvr>
+</p:sld>
+</file>
+
+<file path=ppt/slides/slide4.xml><?xml version="1.0" encoding="utf-8"?>
+<p:sld xmlns:a="http://schemas.openxmlformats.org/drawingml/2006/main" xmlns:r="http://schemas.openxmlformats.org/officeDocument/2006/relationships" xmlns:p="http://schemas.openxmlformats.org/presentationml/2006/main">
+  <p:cSld>
+    <p:bg>
+      <p:bgPr>
+        <a:gradFill flip="none" rotWithShape="1">
+          <a:gsLst>
+            <a:gs pos="75000">
+              <a:schemeClr val="accent3"/>
+            </a:gs>
+            <a:gs pos="25000">
+              <a:schemeClr val="accent1"/>
+            </a:gs>
+          </a:gsLst>
+          <a:lin ang="13500000" scaled="1"/>
+          <a:tileRect/>
+        </a:gradFill>
+        <a:effectLst/>
+      </p:bgPr>
+    </p:bg>
+    <p:spTree>
+      <p:nvGrpSpPr>
+        <p:cNvPr id="1" name="">
+          <a:extLst>
+            <a:ext uri="{FF2B5EF4-FFF2-40B4-BE49-F238E27FC236}">
+              <a16:creationId xmlns:a16="http://schemas.microsoft.com/office/drawing/2014/main" id="{B82CA982-B0A6-9DD7-60F8-6F0746DC3F14}"/>
+            </a:ext>
+          </a:extLst>
+        </p:cNvPr>
+        <p:cNvGrpSpPr/>
+        <p:nvPr/>
+      </p:nvGrpSpPr>
+      <p:grpSpPr>
+        <a:xfrm>
+          <a:off x="0" y="0"/>
+          <a:ext cx="0" cy="0"/>
+          <a:chOff x="0" y="0"/>
+          <a:chExt cx="0" cy="0"/>
+        </a:xfrm>
+      </p:grpSpPr>
+      <p:sp>
+        <p:nvSpPr>
+          <p:cNvPr id="24" name="正方形/長方形 23">
+            <a:extLst>
+              <a:ext uri="{FF2B5EF4-FFF2-40B4-BE49-F238E27FC236}">
+                <a16:creationId xmlns:a16="http://schemas.microsoft.com/office/drawing/2014/main" id="{6BCDF59A-EDA2-6569-99E9-2998F49CEC16}"/>
+              </a:ext>
+            </a:extLst>
+          </p:cNvPr>
+          <p:cNvSpPr/>
+          <p:nvPr/>
+        </p:nvSpPr>
+        <p:spPr>
+          <a:xfrm>
+            <a:off x="-38101" y="1457997"/>
+            <a:ext cx="9994901" cy="3484808"/>
+          </a:xfrm>
+          <a:prstGeom prst="rect">
+            <a:avLst/>
+          </a:prstGeom>
+          <a:solidFill>
+            <a:schemeClr val="bg1"/>
+          </a:solidFill>
+          <a:ln w="31750">
+            <a:solidFill>
+              <a:schemeClr val="bg1">
+                <a:lumMod val="10000"/>
+                <a:lumOff val="90000"/>
+              </a:schemeClr>
+            </a:solidFill>
+          </a:ln>
+        </p:spPr>
+        <p:style>
+          <a:lnRef idx="2">
+            <a:schemeClr val="accent1">
+              <a:shade val="15000"/>
+            </a:schemeClr>
+          </a:lnRef>
+          <a:fillRef idx="1">
+            <a:schemeClr val="accent1"/>
+          </a:fillRef>
+          <a:effectRef idx="0">
+            <a:schemeClr val="accent1"/>
+          </a:effectRef>
+          <a:fontRef idx="minor">
+            <a:schemeClr val="lt1"/>
+          </a:fontRef>
+        </p:style>
+        <p:txBody>
+          <a:bodyPr rtlCol="0" anchor="ctr"/>
+          <a:lstStyle/>
+          <a:p>
+            <a:pPr algn="ctr"/>
+            <a:endParaRPr kumimoji="1" lang="ja-JP" altLang="en-US"/>
+          </a:p>
+        </p:txBody>
+      </p:sp>
+      <p:sp>
+        <p:nvSpPr>
+          <p:cNvPr id="5" name="テキスト ボックス 4">
+            <a:extLst>
+              <a:ext uri="{FF2B5EF4-FFF2-40B4-BE49-F238E27FC236}">
+                <a16:creationId xmlns:a16="http://schemas.microsoft.com/office/drawing/2014/main" id="{69373BEB-BCFC-905E-6C6F-8AF669850D72}"/>
+              </a:ext>
+            </a:extLst>
+          </p:cNvPr>
+          <p:cNvSpPr txBox="1"/>
+          <p:nvPr/>
+        </p:nvSpPr>
+        <p:spPr>
+          <a:xfrm>
+            <a:off x="365128" y="55291"/>
+            <a:ext cx="5910592" cy="707886"/>
+          </a:xfrm>
+          <a:prstGeom prst="rect">
+            <a:avLst/>
+          </a:prstGeom>
+          <a:noFill/>
+        </p:spPr>
+        <p:txBody>
+          <a:bodyPr wrap="none" rtlCol="0">
+            <a:spAutoFit/>
+          </a:bodyPr>
+          <a:lstStyle/>
+          <a:p>
+            <a:r>
+              <a:rPr kumimoji="1" lang="ja-JP" altLang="en-US" sz="4000">
+                <a:latin typeface="KaitouYokokuGothic Heavy" panose="020B0A00000000000000" pitchFamily="34" charset="0"/>
+                <a:ea typeface="KaitouYokokuGothic Heavy" panose="020B0A00000000000000" pitchFamily="34" charset="0"/>
+              </a:rPr>
+              <a:t>ハコの表面が戦場！？</a:t>
+            </a:r>
+            <a:endParaRPr kumimoji="1" lang="ja-JP" altLang="en-US" sz="5400">
+              <a:latin typeface="KaitouYokokuGothic Heavy" panose="020B0A00000000000000" pitchFamily="34" charset="0"/>
+              <a:ea typeface="KaitouYokokuGothic Heavy" panose="020B0A00000000000000" pitchFamily="34" charset="0"/>
+            </a:endParaRPr>
+          </a:p>
+        </p:txBody>
+      </p:sp>
+      <p:sp>
+        <p:nvSpPr>
+          <p:cNvPr id="3" name="テキスト ボックス 2">
+            <a:extLst>
+              <a:ext uri="{FF2B5EF4-FFF2-40B4-BE49-F238E27FC236}">
+                <a16:creationId xmlns:a16="http://schemas.microsoft.com/office/drawing/2014/main" id="{069B5687-9DD3-7572-E583-E719AAB6A385}"/>
+              </a:ext>
+            </a:extLst>
+          </p:cNvPr>
+          <p:cNvSpPr txBox="1"/>
+          <p:nvPr/>
+        </p:nvSpPr>
+        <p:spPr>
+          <a:xfrm>
+            <a:off x="2951885" y="6006771"/>
+            <a:ext cx="6885218" cy="707886"/>
+          </a:xfrm>
+          <a:prstGeom prst="rect">
+            <a:avLst/>
+          </a:prstGeom>
+          <a:noFill/>
+        </p:spPr>
+        <p:txBody>
+          <a:bodyPr wrap="none" rtlCol="0">
+            <a:spAutoFit/>
+          </a:bodyPr>
+          <a:lstStyle/>
+          <a:p>
+            <a:r>
+              <a:rPr kumimoji="1" lang="en-US" altLang="ja-JP" sz="4000">
+                <a:latin typeface="KaitouYokokuGothic Heavy" panose="020B0A00000000000000" pitchFamily="34" charset="0"/>
+                <a:ea typeface="KaitouYokokuGothic Heavy" panose="020B0A00000000000000" pitchFamily="34" charset="0"/>
+              </a:rPr>
+              <a:t>3</a:t>
+            </a:r>
+            <a:r>
+              <a:rPr kumimoji="1" lang="ja-JP" altLang="en-US" sz="4000">
+                <a:latin typeface="KaitouYokokuGothic Heavy" panose="020B0A00000000000000" pitchFamily="34" charset="0"/>
+                <a:ea typeface="KaitouYokokuGothic Heavy" panose="020B0A00000000000000" pitchFamily="34" charset="0"/>
+              </a:rPr>
+              <a:t>枚の「オフダ」で戦え！</a:t>
+            </a:r>
+            <a:endParaRPr kumimoji="1" lang="ja-JP" altLang="en-US" sz="5400">
+              <a:latin typeface="KaitouYokokuGothic Heavy" panose="020B0A00000000000000" pitchFamily="34" charset="0"/>
+              <a:ea typeface="KaitouYokokuGothic Heavy" panose="020B0A00000000000000" pitchFamily="34" charset="0"/>
+            </a:endParaRPr>
+          </a:p>
+        </p:txBody>
+      </p:sp>
+      <p:pic>
+        <p:nvPicPr>
+          <p:cNvPr id="6" name="図 5">
+            <a:extLst>
+              <a:ext uri="{FF2B5EF4-FFF2-40B4-BE49-F238E27FC236}">
+                <a16:creationId xmlns:a16="http://schemas.microsoft.com/office/drawing/2014/main" id="{129538D8-7661-0369-43E9-D8FE14F41070}"/>
+              </a:ext>
+            </a:extLst>
+          </p:cNvPr>
+          <p:cNvPicPr>
+            <a:picLocks noChangeAspect="1"/>
+          </p:cNvPicPr>
+          <p:nvPr/>
+        </p:nvPicPr>
+        <p:blipFill>
+          <a:blip r:embed="rId2">
+            <a:extLst>
+              <a:ext uri="{28A0092B-C50C-407E-A947-70E740481C1C}">
+                <a14:useLocalDpi xmlns:a14="http://schemas.microsoft.com/office/drawing/2010/main" val="0"/>
+              </a:ext>
+            </a:extLst>
+          </a:blip>
+          <a:stretch>
+            <a:fillRect/>
+          </a:stretch>
+        </p:blipFill>
+        <p:spPr>
+          <a:xfrm>
+            <a:off x="1904736" y="1485751"/>
+            <a:ext cx="6096528" cy="3429297"/>
+          </a:xfrm>
+          <a:prstGeom prst="rect">
+            <a:avLst/>
+          </a:prstGeom>
+          <a:ln w="31750">
+            <a:noFill/>
+          </a:ln>
+        </p:spPr>
+      </p:pic>
+      <p:cxnSp>
+        <p:nvCxnSpPr>
+          <p:cNvPr id="10" name="直線コネクタ 9">
+            <a:extLst>
+              <a:ext uri="{FF2B5EF4-FFF2-40B4-BE49-F238E27FC236}">
+                <a16:creationId xmlns:a16="http://schemas.microsoft.com/office/drawing/2014/main" id="{F56EE132-034C-11FE-0235-F338E3A5BF4C}"/>
+              </a:ext>
+            </a:extLst>
+          </p:cNvPr>
+          <p:cNvCxnSpPr>
+            <a:cxnSpLocks/>
+            <a:endCxn id="13" idx="3"/>
+          </p:cNvCxnSpPr>
+          <p:nvPr/>
+        </p:nvCxnSpPr>
+        <p:spPr>
+          <a:xfrm flipV="1">
+            <a:off x="4538133" y="2069951"/>
+            <a:ext cx="429689" cy="364216"/>
+          </a:xfrm>
+          <a:prstGeom prst="line">
+            <a:avLst/>
+          </a:prstGeom>
+          <a:ln w="63500">
+            <a:solidFill>
+              <a:schemeClr val="bg1">
+                <a:lumMod val="10000"/>
+                <a:lumOff val="90000"/>
+              </a:schemeClr>
+            </a:solidFill>
+            <a:headEnd type="oval"/>
+          </a:ln>
+          <a:effectLst>
+            <a:glow rad="63500">
+              <a:schemeClr val="tx1">
+                <a:alpha val="40000"/>
+              </a:schemeClr>
+            </a:glow>
+          </a:effectLst>
+        </p:spPr>
+        <p:style>
+          <a:lnRef idx="2">
+            <a:schemeClr val="accent1"/>
+          </a:lnRef>
+          <a:fillRef idx="0">
+            <a:schemeClr val="accent1"/>
+          </a:fillRef>
+          <a:effectRef idx="1">
+            <a:schemeClr val="accent1"/>
+          </a:effectRef>
+          <a:fontRef idx="minor">
+            <a:schemeClr val="tx1"/>
+          </a:fontRef>
+        </p:style>
+      </p:cxnSp>
+      <p:grpSp>
+        <p:nvGrpSpPr>
+          <p:cNvPr id="21" name="グループ化 20">
+            <a:extLst>
+              <a:ext uri="{FF2B5EF4-FFF2-40B4-BE49-F238E27FC236}">
+                <a16:creationId xmlns:a16="http://schemas.microsoft.com/office/drawing/2014/main" id="{FA9CB219-A19D-802A-66D2-57144D9AA400}"/>
+              </a:ext>
+            </a:extLst>
+          </p:cNvPr>
+          <p:cNvGrpSpPr/>
+          <p:nvPr/>
+        </p:nvGrpSpPr>
+        <p:grpSpPr>
+          <a:xfrm>
+            <a:off x="2760142" y="975388"/>
+            <a:ext cx="4415360" cy="1094563"/>
+            <a:chOff x="3365507" y="1203988"/>
+            <a:chExt cx="4415360" cy="1094563"/>
+          </a:xfrm>
+        </p:grpSpPr>
+        <p:grpSp>
+          <p:nvGrpSpPr>
+            <p:cNvPr id="14" name="グループ化 13">
+              <a:extLst>
+                <a:ext uri="{FF2B5EF4-FFF2-40B4-BE49-F238E27FC236}">
+                  <a16:creationId xmlns:a16="http://schemas.microsoft.com/office/drawing/2014/main" id="{E05C1F36-AF93-2171-5707-DC6BAC5C5A04}"/>
+                </a:ext>
+              </a:extLst>
+            </p:cNvPr>
+            <p:cNvGrpSpPr/>
+            <p:nvPr/>
+          </p:nvGrpSpPr>
+          <p:grpSpPr>
+            <a:xfrm>
+              <a:off x="3365507" y="1244600"/>
+              <a:ext cx="4415360" cy="1053951"/>
+              <a:chOff x="4872567" y="1295251"/>
+              <a:chExt cx="2180166" cy="838200"/>
+            </a:xfrm>
+            <a:effectLst>
+              <a:glow rad="63500">
+                <a:schemeClr val="tx1">
+                  <a:alpha val="40000"/>
+                </a:schemeClr>
+              </a:glow>
+            </a:effectLst>
+          </p:grpSpPr>
+          <p:sp>
+            <p:nvSpPr>
+              <p:cNvPr id="11" name="四角形: 上の 2 つの角を丸める 10">
+                <a:extLst>
+                  <a:ext uri="{FF2B5EF4-FFF2-40B4-BE49-F238E27FC236}">
+                    <a16:creationId xmlns:a16="http://schemas.microsoft.com/office/drawing/2014/main" id="{F0F7858D-2D84-46A5-F1E4-391C81F0BDF9}"/>
+                  </a:ext>
+                </a:extLst>
+              </p:cNvPr>
+              <p:cNvSpPr/>
+              <p:nvPr/>
+            </p:nvSpPr>
+            <p:spPr>
+              <a:xfrm>
+                <a:off x="4872567" y="1295251"/>
+                <a:ext cx="2180166" cy="351516"/>
+              </a:xfrm>
+              <a:prstGeom prst="round2SameRect">
+                <a:avLst/>
+              </a:prstGeom>
+              <a:solidFill>
+                <a:schemeClr val="bg1">
+                  <a:lumMod val="10000"/>
+                  <a:lumOff val="90000"/>
+                </a:schemeClr>
+              </a:solidFill>
+              <a:ln>
+                <a:solidFill>
+                  <a:schemeClr val="bg1">
+                    <a:lumMod val="10000"/>
+                    <a:lumOff val="90000"/>
+                  </a:schemeClr>
+                </a:solidFill>
+              </a:ln>
+            </p:spPr>
+            <p:style>
+              <a:lnRef idx="2">
+                <a:schemeClr val="accent1">
+                  <a:shade val="15000"/>
+                </a:schemeClr>
+              </a:lnRef>
+              <a:fillRef idx="1">
+                <a:schemeClr val="accent1"/>
+              </a:fillRef>
+              <a:effectRef idx="0">
+                <a:schemeClr val="accent1"/>
+              </a:effectRef>
+              <a:fontRef idx="minor">
+                <a:schemeClr val="lt1"/>
+              </a:fontRef>
+            </p:style>
+            <p:txBody>
+              <a:bodyPr rtlCol="0" anchor="ctr"/>
+              <a:lstStyle/>
+              <a:p>
+                <a:pPr algn="ctr"/>
+                <a:endParaRPr kumimoji="1" lang="ja-JP" altLang="en-US"/>
+              </a:p>
+            </p:txBody>
+          </p:sp>
+          <p:sp>
+            <p:nvSpPr>
+              <p:cNvPr id="13" name="四角形: 上の 2 つの角を丸める 12">
+                <a:extLst>
+                  <a:ext uri="{FF2B5EF4-FFF2-40B4-BE49-F238E27FC236}">
+                    <a16:creationId xmlns:a16="http://schemas.microsoft.com/office/drawing/2014/main" id="{A4E2792F-6D88-7475-FF7F-0BD88E90F42E}"/>
+                  </a:ext>
+                </a:extLst>
+              </p:cNvPr>
+              <p:cNvSpPr/>
+              <p:nvPr/>
+            </p:nvSpPr>
+            <p:spPr>
+              <a:xfrm flipV="1">
+                <a:off x="4872567" y="1646767"/>
+                <a:ext cx="2180166" cy="486684"/>
+              </a:xfrm>
+              <a:prstGeom prst="round2SameRect">
+                <a:avLst/>
+              </a:prstGeom>
+              <a:solidFill>
+                <a:schemeClr val="tx1">
+                  <a:lumMod val="75000"/>
+                </a:schemeClr>
+              </a:solidFill>
+              <a:ln>
+                <a:solidFill>
+                  <a:schemeClr val="bg1">
+                    <a:lumMod val="10000"/>
+                    <a:lumOff val="90000"/>
+                  </a:schemeClr>
+                </a:solidFill>
+              </a:ln>
+            </p:spPr>
+            <p:style>
+              <a:lnRef idx="2">
+                <a:schemeClr val="accent1">
+                  <a:shade val="15000"/>
+                </a:schemeClr>
+              </a:lnRef>
+              <a:fillRef idx="1">
+                <a:schemeClr val="accent1"/>
+              </a:fillRef>
+              <a:effectRef idx="0">
+                <a:schemeClr val="accent1"/>
+              </a:effectRef>
+              <a:fontRef idx="minor">
+                <a:schemeClr val="lt1"/>
+              </a:fontRef>
+            </p:style>
+            <p:txBody>
+              <a:bodyPr rtlCol="0" anchor="ctr"/>
+              <a:lstStyle/>
+              <a:p>
+                <a:pPr algn="ctr"/>
+                <a:endParaRPr kumimoji="1" lang="ja-JP" altLang="en-US"/>
+              </a:p>
+            </p:txBody>
+          </p:sp>
+        </p:grpSp>
+        <p:sp>
+          <p:nvSpPr>
+            <p:cNvPr id="16" name="テキスト ボックス 15">
+              <a:extLst>
+                <a:ext uri="{FF2B5EF4-FFF2-40B4-BE49-F238E27FC236}">
+                  <a16:creationId xmlns:a16="http://schemas.microsoft.com/office/drawing/2014/main" id="{0EB9E4DE-CF53-5A5E-6A9B-A8445360B308}"/>
+                </a:ext>
+              </a:extLst>
+            </p:cNvPr>
+            <p:cNvSpPr txBox="1"/>
+            <p:nvPr/>
+          </p:nvSpPr>
+          <p:spPr>
+            <a:xfrm>
+              <a:off x="4583173" y="1203988"/>
+              <a:ext cx="1980029" cy="523220"/>
+            </a:xfrm>
+            <a:prstGeom prst="rect">
+              <a:avLst/>
+            </a:prstGeom>
+            <a:noFill/>
+          </p:spPr>
+          <p:txBody>
+            <a:bodyPr wrap="none" rtlCol="0">
+              <a:spAutoFit/>
+            </a:bodyPr>
+            <a:lstStyle/>
+            <a:p>
+              <a:pPr algn="ctr"/>
+              <a:r>
+                <a:rPr kumimoji="1" lang="ja-JP" altLang="en-US" sz="2800">
+                  <a:solidFill>
+                    <a:schemeClr val="tx1">
+                      <a:lumMod val="10000"/>
+                    </a:schemeClr>
+                  </a:solidFill>
+                  <a:latin typeface="+mj-ea"/>
+                  <a:ea typeface="+mj-ea"/>
+                </a:rPr>
+                <a:t>ハコの表面</a:t>
+              </a:r>
+              <a:endParaRPr kumimoji="1" lang="ja-JP" altLang="en-US" sz="4000">
+                <a:solidFill>
+                  <a:schemeClr val="tx1">
+                    <a:lumMod val="10000"/>
+                  </a:schemeClr>
+                </a:solidFill>
+                <a:latin typeface="+mj-ea"/>
+                <a:ea typeface="+mj-ea"/>
+              </a:endParaRPr>
+            </a:p>
+          </p:txBody>
+        </p:sp>
+        <p:sp>
+          <p:nvSpPr>
+            <p:cNvPr id="18" name="テキスト ボックス 17">
+              <a:extLst>
+                <a:ext uri="{FF2B5EF4-FFF2-40B4-BE49-F238E27FC236}">
+                  <a16:creationId xmlns:a16="http://schemas.microsoft.com/office/drawing/2014/main" id="{7D25F57C-1276-256B-2626-A8C988B9CDF5}"/>
+                </a:ext>
+              </a:extLst>
+            </p:cNvPr>
+            <p:cNvSpPr txBox="1"/>
+            <p:nvPr/>
+          </p:nvSpPr>
+          <p:spPr>
+            <a:xfrm>
+              <a:off x="3557250" y="1812824"/>
+              <a:ext cx="4031873" cy="400110"/>
+            </a:xfrm>
+            <a:prstGeom prst="rect">
+              <a:avLst/>
+            </a:prstGeom>
+            <a:noFill/>
+          </p:spPr>
+          <p:txBody>
+            <a:bodyPr wrap="none" rtlCol="0">
+              <a:spAutoFit/>
+            </a:bodyPr>
+            <a:lstStyle/>
+            <a:p>
+              <a:r>
+                <a:rPr kumimoji="1" lang="ja-JP" altLang="en-US" sz="2000">
+                  <a:solidFill>
+                    <a:schemeClr val="tx1">
+                      <a:lumMod val="10000"/>
+                    </a:schemeClr>
+                  </a:solidFill>
+                  <a:latin typeface="+mn-ea"/>
+                </a:rPr>
+                <a:t>オフダの召喚物が自動で戦う戦場</a:t>
+              </a:r>
+              <a:endParaRPr kumimoji="1" lang="ja-JP" altLang="en-US" sz="3200">
+                <a:solidFill>
+                  <a:schemeClr val="tx1">
+                    <a:lumMod val="10000"/>
+                  </a:schemeClr>
+                </a:solidFill>
+                <a:latin typeface="+mn-ea"/>
+              </a:endParaRPr>
+            </a:p>
+          </p:txBody>
+        </p:sp>
+      </p:grpSp>
+      <p:grpSp>
+        <p:nvGrpSpPr>
+          <p:cNvPr id="26" name="グループ化 25">
+            <a:extLst>
+              <a:ext uri="{FF2B5EF4-FFF2-40B4-BE49-F238E27FC236}">
+                <a16:creationId xmlns:a16="http://schemas.microsoft.com/office/drawing/2014/main" id="{D83C3E3B-EA33-FE43-ABB6-909C85BF5BBE}"/>
+              </a:ext>
+            </a:extLst>
+          </p:cNvPr>
+          <p:cNvGrpSpPr/>
+          <p:nvPr/>
+        </p:nvGrpSpPr>
+        <p:grpSpPr>
+          <a:xfrm>
+            <a:off x="1537780" y="4826592"/>
+            <a:ext cx="6830441" cy="1053951"/>
+            <a:chOff x="4872567" y="1295251"/>
+            <a:chExt cx="2180166" cy="838200"/>
+          </a:xfrm>
+          <a:effectLst>
+            <a:glow rad="63500">
+              <a:schemeClr val="tx1">
+                <a:alpha val="40000"/>
+              </a:schemeClr>
+            </a:glow>
+          </a:effectLst>
+        </p:grpSpPr>
+        <p:sp>
+          <p:nvSpPr>
+            <p:cNvPr id="29" name="四角形: 上の 2 つの角を丸める 28">
+              <a:extLst>
+                <a:ext uri="{FF2B5EF4-FFF2-40B4-BE49-F238E27FC236}">
+                  <a16:creationId xmlns:a16="http://schemas.microsoft.com/office/drawing/2014/main" id="{EFADA4B1-4461-B0DB-64A1-E1E0EE6636AB}"/>
+                </a:ext>
+              </a:extLst>
+            </p:cNvPr>
+            <p:cNvSpPr/>
+            <p:nvPr/>
+          </p:nvSpPr>
+          <p:spPr>
+            <a:xfrm>
+              <a:off x="4872567" y="1295251"/>
+              <a:ext cx="2180166" cy="351516"/>
+            </a:xfrm>
+            <a:prstGeom prst="round2SameRect">
+              <a:avLst/>
+            </a:prstGeom>
+            <a:solidFill>
+              <a:schemeClr val="bg1">
+                <a:lumMod val="10000"/>
+                <a:lumOff val="90000"/>
+              </a:schemeClr>
+            </a:solidFill>
+            <a:ln>
+              <a:solidFill>
+                <a:schemeClr val="bg1">
+                  <a:lumMod val="10000"/>
+                  <a:lumOff val="90000"/>
+                </a:schemeClr>
+              </a:solidFill>
+            </a:ln>
+          </p:spPr>
+          <p:style>
+            <a:lnRef idx="2">
+              <a:schemeClr val="accent1">
+                <a:shade val="15000"/>
+              </a:schemeClr>
+            </a:lnRef>
+            <a:fillRef idx="1">
+              <a:schemeClr val="accent1"/>
+            </a:fillRef>
+            <a:effectRef idx="0">
+              <a:schemeClr val="accent1"/>
+            </a:effectRef>
+            <a:fontRef idx="minor">
+              <a:schemeClr val="lt1"/>
+            </a:fontRef>
+          </p:style>
+          <p:txBody>
+            <a:bodyPr rtlCol="0" anchor="ctr"/>
+            <a:lstStyle/>
+            <a:p>
+              <a:pPr algn="ctr"/>
+              <a:endParaRPr kumimoji="1" lang="ja-JP" altLang="en-US"/>
+            </a:p>
+          </p:txBody>
+        </p:sp>
+        <p:sp>
+          <p:nvSpPr>
+            <p:cNvPr id="30" name="四角形: 上の 2 つの角を丸める 29">
+              <a:extLst>
+                <a:ext uri="{FF2B5EF4-FFF2-40B4-BE49-F238E27FC236}">
+                  <a16:creationId xmlns:a16="http://schemas.microsoft.com/office/drawing/2014/main" id="{1C7AE10B-AC0F-ADB5-2038-621F6A6B1178}"/>
+                </a:ext>
+              </a:extLst>
+            </p:cNvPr>
+            <p:cNvSpPr/>
+            <p:nvPr/>
+          </p:nvSpPr>
+          <p:spPr>
+            <a:xfrm flipV="1">
+              <a:off x="4872567" y="1646767"/>
+              <a:ext cx="2180166" cy="486684"/>
+            </a:xfrm>
+            <a:prstGeom prst="round2SameRect">
+              <a:avLst/>
+            </a:prstGeom>
+            <a:solidFill>
+              <a:schemeClr val="tx1">
+                <a:lumMod val="75000"/>
+              </a:schemeClr>
+            </a:solidFill>
+            <a:ln>
+              <a:solidFill>
+                <a:schemeClr val="bg1">
+                  <a:lumMod val="10000"/>
+                  <a:lumOff val="90000"/>
+                </a:schemeClr>
+              </a:solidFill>
+            </a:ln>
+          </p:spPr>
+          <p:style>
+            <a:lnRef idx="2">
+              <a:schemeClr val="accent1">
+                <a:shade val="15000"/>
+              </a:schemeClr>
+            </a:lnRef>
+            <a:fillRef idx="1">
+              <a:schemeClr val="accent1"/>
+            </a:fillRef>
+            <a:effectRef idx="0">
+              <a:schemeClr val="accent1"/>
+            </a:effectRef>
+            <a:fontRef idx="minor">
+              <a:schemeClr val="lt1"/>
+            </a:fontRef>
+          </p:style>
+          <p:txBody>
+            <a:bodyPr rtlCol="0" anchor="ctr"/>
+            <a:lstStyle/>
+            <a:p>
+              <a:pPr algn="ctr"/>
+              <a:endParaRPr kumimoji="1" lang="ja-JP" altLang="en-US"/>
+            </a:p>
+          </p:txBody>
+        </p:sp>
+      </p:grpSp>
+      <p:sp>
+        <p:nvSpPr>
+          <p:cNvPr id="27" name="テキスト ボックス 26">
+            <a:extLst>
+              <a:ext uri="{FF2B5EF4-FFF2-40B4-BE49-F238E27FC236}">
+                <a16:creationId xmlns:a16="http://schemas.microsoft.com/office/drawing/2014/main" id="{2E25CD95-1F9E-73F4-9E8F-8C9B8881377E}"/>
+              </a:ext>
+            </a:extLst>
+          </p:cNvPr>
+          <p:cNvSpPr txBox="1"/>
+          <p:nvPr/>
+        </p:nvSpPr>
+        <p:spPr>
+          <a:xfrm>
+            <a:off x="4322058" y="4785980"/>
+            <a:ext cx="1261884" cy="523220"/>
+          </a:xfrm>
+          <a:prstGeom prst="rect">
+            <a:avLst/>
+          </a:prstGeom>
+          <a:noFill/>
+        </p:spPr>
+        <p:txBody>
+          <a:bodyPr wrap="none" rtlCol="0">
+            <a:spAutoFit/>
+          </a:bodyPr>
+          <a:lstStyle/>
+          <a:p>
+            <a:pPr algn="ctr"/>
+            <a:r>
+              <a:rPr kumimoji="1" lang="ja-JP" altLang="en-US" sz="2800">
+                <a:solidFill>
+                  <a:schemeClr val="tx1">
+                    <a:lumMod val="10000"/>
+                  </a:schemeClr>
+                </a:solidFill>
+                <a:latin typeface="+mj-ea"/>
+                <a:ea typeface="+mj-ea"/>
+              </a:rPr>
+              <a:t>オフダ</a:t>
+            </a:r>
+            <a:endParaRPr kumimoji="1" lang="ja-JP" altLang="en-US" sz="4000">
+              <a:solidFill>
+                <a:schemeClr val="tx1">
+                  <a:lumMod val="10000"/>
+                </a:schemeClr>
+              </a:solidFill>
+              <a:latin typeface="+mj-ea"/>
+              <a:ea typeface="+mj-ea"/>
+            </a:endParaRPr>
+          </a:p>
+        </p:txBody>
+      </p:sp>
+      <p:sp>
+        <p:nvSpPr>
+          <p:cNvPr id="28" name="テキスト ボックス 27">
+            <a:extLst>
+              <a:ext uri="{FF2B5EF4-FFF2-40B4-BE49-F238E27FC236}">
+                <a16:creationId xmlns:a16="http://schemas.microsoft.com/office/drawing/2014/main" id="{95C70EBD-0D1B-26B3-78C4-755FEAC0F323}"/>
+              </a:ext>
+            </a:extLst>
+          </p:cNvPr>
+          <p:cNvSpPr txBox="1"/>
+          <p:nvPr/>
+        </p:nvSpPr>
+        <p:spPr>
+          <a:xfrm>
+            <a:off x="1782902" y="5394816"/>
+            <a:ext cx="6340197" cy="400110"/>
+          </a:xfrm>
+          <a:prstGeom prst="rect">
+            <a:avLst/>
+          </a:prstGeom>
+          <a:noFill/>
+        </p:spPr>
+        <p:txBody>
+          <a:bodyPr wrap="none" rtlCol="0">
+            <a:spAutoFit/>
+          </a:bodyPr>
+          <a:lstStyle/>
+          <a:p>
+            <a:r>
+              <a:rPr kumimoji="1" lang="ja-JP" altLang="en-US" sz="2000">
+                <a:solidFill>
+                  <a:schemeClr val="tx1">
+                    <a:lumMod val="10000"/>
+                  </a:schemeClr>
+                </a:solidFill>
+                <a:latin typeface="+mn-ea"/>
+              </a:rPr>
+              <a:t>ハコに貼ると、種類に応じて異なるものを召喚出来る</a:t>
+            </a:r>
+            <a:endParaRPr kumimoji="1" lang="ja-JP" altLang="en-US" sz="3200">
+              <a:solidFill>
+                <a:schemeClr val="tx1">
+                  <a:lumMod val="10000"/>
+                </a:schemeClr>
+              </a:solidFill>
+              <a:latin typeface="+mn-ea"/>
+            </a:endParaRPr>
+          </a:p>
+        </p:txBody>
+      </p:sp>
+      <p:cxnSp>
+        <p:nvCxnSpPr>
+          <p:cNvPr id="33" name="直線コネクタ 32">
+            <a:extLst>
+              <a:ext uri="{FF2B5EF4-FFF2-40B4-BE49-F238E27FC236}">
+                <a16:creationId xmlns:a16="http://schemas.microsoft.com/office/drawing/2014/main" id="{DA4465D9-70A4-205C-84B6-2DD3DAFA4E69}"/>
+              </a:ext>
+            </a:extLst>
+          </p:cNvPr>
+          <p:cNvCxnSpPr>
+            <a:cxnSpLocks/>
+          </p:cNvCxnSpPr>
+          <p:nvPr/>
+        </p:nvCxnSpPr>
+        <p:spPr>
+          <a:xfrm>
+            <a:off x="2700867" y="3429000"/>
+            <a:ext cx="766233" cy="1397592"/>
+          </a:xfrm>
+          <a:prstGeom prst="line">
+            <a:avLst/>
+          </a:prstGeom>
+          <a:ln w="63500">
+            <a:solidFill>
+              <a:schemeClr val="bg1">
+                <a:lumMod val="10000"/>
+                <a:lumOff val="90000"/>
+              </a:schemeClr>
+            </a:solidFill>
+            <a:headEnd type="oval"/>
+          </a:ln>
+          <a:effectLst>
+            <a:glow rad="63500">
+              <a:schemeClr val="tx1">
+                <a:alpha val="40000"/>
+              </a:schemeClr>
+            </a:glow>
+          </a:effectLst>
+        </p:spPr>
+        <p:style>
+          <a:lnRef idx="2">
+            <a:schemeClr val="accent1"/>
+          </a:lnRef>
+          <a:fillRef idx="0">
+            <a:schemeClr val="accent1"/>
+          </a:fillRef>
+          <a:effectRef idx="1">
+            <a:schemeClr val="accent1"/>
+          </a:effectRef>
+          <a:fontRef idx="minor">
+            <a:schemeClr val="tx1"/>
+          </a:fontRef>
+        </p:style>
+      </p:cxnSp>
+      <p:cxnSp>
+        <p:nvCxnSpPr>
+          <p:cNvPr id="36" name="直線コネクタ 35">
+            <a:extLst>
+              <a:ext uri="{FF2B5EF4-FFF2-40B4-BE49-F238E27FC236}">
+                <a16:creationId xmlns:a16="http://schemas.microsoft.com/office/drawing/2014/main" id="{2EEB3BCF-191C-37C1-745C-0F98FC450DB7}"/>
+              </a:ext>
+            </a:extLst>
+          </p:cNvPr>
+          <p:cNvCxnSpPr>
+            <a:cxnSpLocks/>
+          </p:cNvCxnSpPr>
+          <p:nvPr/>
+        </p:nvCxnSpPr>
+        <p:spPr>
+          <a:xfrm flipH="1">
+            <a:off x="6692900" y="3762626"/>
+            <a:ext cx="482602" cy="1063965"/>
+          </a:xfrm>
+          <a:prstGeom prst="line">
+            <a:avLst/>
+          </a:prstGeom>
+          <a:ln w="63500">
+            <a:solidFill>
+              <a:schemeClr val="bg1">
+                <a:lumMod val="10000"/>
+                <a:lumOff val="90000"/>
+              </a:schemeClr>
+            </a:solidFill>
+            <a:headEnd type="oval"/>
+          </a:ln>
+          <a:effectLst>
+            <a:glow rad="63500">
+              <a:schemeClr val="tx1">
+                <a:alpha val="40000"/>
+              </a:schemeClr>
+            </a:glow>
+          </a:effectLst>
+        </p:spPr>
+        <p:style>
+          <a:lnRef idx="2">
+            <a:schemeClr val="accent1"/>
+          </a:lnRef>
+          <a:fillRef idx="0">
+            <a:schemeClr val="accent1"/>
+          </a:fillRef>
+          <a:effectRef idx="1">
+            <a:schemeClr val="accent1"/>
+          </a:effectRef>
+          <a:fontRef idx="minor">
+            <a:schemeClr val="tx1"/>
+          </a:fontRef>
+        </p:style>
+      </p:cxnSp>
+      <p:grpSp>
+        <p:nvGrpSpPr>
+          <p:cNvPr id="48" name="グループ化 47">
+            <a:extLst>
+              <a:ext uri="{FF2B5EF4-FFF2-40B4-BE49-F238E27FC236}">
+                <a16:creationId xmlns:a16="http://schemas.microsoft.com/office/drawing/2014/main" id="{821D4A76-9323-AFF0-BAD7-CBC2742EDE07}"/>
+              </a:ext>
+            </a:extLst>
+          </p:cNvPr>
+          <p:cNvGrpSpPr/>
+          <p:nvPr/>
+        </p:nvGrpSpPr>
+        <p:grpSpPr>
+          <a:xfrm>
+            <a:off x="7977952" y="1666837"/>
+            <a:ext cx="1812864" cy="2960197"/>
+            <a:chOff x="163277" y="1666837"/>
+            <a:chExt cx="1812864" cy="2960197"/>
+          </a:xfrm>
+        </p:grpSpPr>
+        <p:grpSp>
+          <p:nvGrpSpPr>
+            <p:cNvPr id="41" name="グループ化 40">
+              <a:extLst>
+                <a:ext uri="{FF2B5EF4-FFF2-40B4-BE49-F238E27FC236}">
+                  <a16:creationId xmlns:a16="http://schemas.microsoft.com/office/drawing/2014/main" id="{BB1D32C8-DA87-D34C-41FF-78CC63CF9BBD}"/>
+                </a:ext>
+              </a:extLst>
+            </p:cNvPr>
+            <p:cNvGrpSpPr/>
+            <p:nvPr/>
+          </p:nvGrpSpPr>
+          <p:grpSpPr>
+            <a:xfrm>
+              <a:off x="163277" y="1666837"/>
+              <a:ext cx="1806553" cy="2960197"/>
+              <a:chOff x="4872567" y="1295251"/>
+              <a:chExt cx="2180166" cy="1046156"/>
+            </a:xfrm>
+            <a:effectLst/>
+          </p:grpSpPr>
+          <p:sp>
+            <p:nvSpPr>
+              <p:cNvPr id="42" name="四角形: 上の 2 つの角を丸める 41">
+                <a:extLst>
+                  <a:ext uri="{FF2B5EF4-FFF2-40B4-BE49-F238E27FC236}">
+                    <a16:creationId xmlns:a16="http://schemas.microsoft.com/office/drawing/2014/main" id="{E01373B5-21AD-25C9-A237-690E9EA9AF22}"/>
+                  </a:ext>
+                </a:extLst>
+              </p:cNvPr>
+              <p:cNvSpPr/>
+              <p:nvPr/>
+            </p:nvSpPr>
+            <p:spPr>
+              <a:xfrm>
+                <a:off x="4872567" y="1295251"/>
+                <a:ext cx="2180166" cy="170888"/>
+              </a:xfrm>
+              <a:prstGeom prst="round2SameRect">
+                <a:avLst/>
+              </a:prstGeom>
+              <a:solidFill>
+                <a:schemeClr val="accent1">
+                  <a:lumMod val="20000"/>
+                  <a:lumOff val="80000"/>
+                  <a:alpha val="60000"/>
+                </a:schemeClr>
+              </a:solidFill>
+              <a:ln>
+                <a:noFill/>
+              </a:ln>
+            </p:spPr>
+            <p:style>
+              <a:lnRef idx="2">
+                <a:schemeClr val="accent1">
+                  <a:shade val="15000"/>
+                </a:schemeClr>
+              </a:lnRef>
+              <a:fillRef idx="1">
+                <a:schemeClr val="accent1"/>
+              </a:fillRef>
+              <a:effectRef idx="0">
+                <a:schemeClr val="accent1"/>
+              </a:effectRef>
+              <a:fontRef idx="minor">
+                <a:schemeClr val="lt1"/>
+              </a:fontRef>
+            </p:style>
+            <p:txBody>
+              <a:bodyPr rtlCol="0" anchor="ctr"/>
+              <a:lstStyle/>
+              <a:p>
+                <a:pPr algn="ctr"/>
+                <a:endParaRPr kumimoji="1" lang="ja-JP" altLang="en-US"/>
+              </a:p>
+            </p:txBody>
+          </p:sp>
+          <p:sp>
+            <p:nvSpPr>
+              <p:cNvPr id="43" name="四角形: 上の 2 つの角を丸める 42">
+                <a:extLst>
+                  <a:ext uri="{FF2B5EF4-FFF2-40B4-BE49-F238E27FC236}">
+                    <a16:creationId xmlns:a16="http://schemas.microsoft.com/office/drawing/2014/main" id="{31EB059E-151F-681F-C28D-0BDBB3C11130}"/>
+                  </a:ext>
+                </a:extLst>
+              </p:cNvPr>
+              <p:cNvSpPr/>
+              <p:nvPr/>
+            </p:nvSpPr>
+            <p:spPr>
+              <a:xfrm flipV="1">
+                <a:off x="4872567" y="1466139"/>
+                <a:ext cx="2180166" cy="875268"/>
+              </a:xfrm>
+              <a:prstGeom prst="round2SameRect">
+                <a:avLst>
+                  <a:gd name="adj1" fmla="val 9403"/>
+                  <a:gd name="adj2" fmla="val 0"/>
+                </a:avLst>
+              </a:prstGeom>
+              <a:solidFill>
+                <a:schemeClr val="accent1">
+                  <a:lumMod val="40000"/>
+                  <a:lumOff val="60000"/>
+                  <a:alpha val="60000"/>
+                </a:schemeClr>
+              </a:solidFill>
+              <a:ln>
+                <a:noFill/>
+              </a:ln>
+            </p:spPr>
+            <p:style>
+              <a:lnRef idx="2">
+                <a:schemeClr val="accent1">
+                  <a:shade val="15000"/>
+                </a:schemeClr>
+              </a:lnRef>
+              <a:fillRef idx="1">
+                <a:schemeClr val="accent1"/>
+              </a:fillRef>
+              <a:effectRef idx="0">
+                <a:schemeClr val="accent1"/>
+              </a:effectRef>
+              <a:fontRef idx="minor">
+                <a:schemeClr val="lt1"/>
+              </a:fontRef>
+            </p:style>
+            <p:txBody>
+              <a:bodyPr rtlCol="0" anchor="ctr"/>
+              <a:lstStyle/>
+              <a:p>
+                <a:pPr algn="ctr"/>
+                <a:endParaRPr kumimoji="1" lang="ja-JP" altLang="en-US"/>
+              </a:p>
+            </p:txBody>
+          </p:sp>
+        </p:grpSp>
+        <p:sp>
+          <p:nvSpPr>
+            <p:cNvPr id="40" name="テキスト ボックス 39">
+              <a:extLst>
+                <a:ext uri="{FF2B5EF4-FFF2-40B4-BE49-F238E27FC236}">
+                  <a16:creationId xmlns:a16="http://schemas.microsoft.com/office/drawing/2014/main" id="{7E668B10-4ACA-EBB6-207A-35CF4725272E}"/>
+                </a:ext>
+              </a:extLst>
+            </p:cNvPr>
+            <p:cNvSpPr txBox="1"/>
+            <p:nvPr/>
+          </p:nvSpPr>
+          <p:spPr>
+            <a:xfrm>
+              <a:off x="204779" y="1732792"/>
+              <a:ext cx="1723549" cy="400110"/>
+            </a:xfrm>
+            <a:prstGeom prst="rect">
+              <a:avLst/>
+            </a:prstGeom>
+            <a:noFill/>
+          </p:spPr>
+          <p:txBody>
+            <a:bodyPr wrap="none" rtlCol="0">
+              <a:spAutoFit/>
+            </a:bodyPr>
+            <a:lstStyle/>
+            <a:p>
+              <a:pPr algn="ctr"/>
+              <a:r>
+                <a:rPr kumimoji="1" lang="ja-JP" altLang="en-US" sz="2000">
+                  <a:latin typeface="+mn-ea"/>
+                </a:rPr>
+                <a:t>オフダ豆知識</a:t>
+              </a:r>
+              <a:endParaRPr kumimoji="1" lang="ja-JP" altLang="en-US" sz="3200">
+                <a:latin typeface="+mn-ea"/>
+              </a:endParaRPr>
+            </a:p>
+          </p:txBody>
+        </p:sp>
+        <p:sp>
+          <p:nvSpPr>
+            <p:cNvPr id="47" name="テキスト ボックス 46">
+              <a:extLst>
+                <a:ext uri="{FF2B5EF4-FFF2-40B4-BE49-F238E27FC236}">
+                  <a16:creationId xmlns:a16="http://schemas.microsoft.com/office/drawing/2014/main" id="{785A45F4-5F60-D7AC-FC77-42C8291502D6}"/>
+                </a:ext>
+              </a:extLst>
+            </p:cNvPr>
+            <p:cNvSpPr txBox="1"/>
+            <p:nvPr/>
+          </p:nvSpPr>
+          <p:spPr>
+            <a:xfrm>
+              <a:off x="175648" y="2357354"/>
+              <a:ext cx="1800493" cy="2031325"/>
+            </a:xfrm>
+            <a:prstGeom prst="rect">
+              <a:avLst/>
+            </a:prstGeom>
+            <a:noFill/>
+          </p:spPr>
+          <p:txBody>
+            <a:bodyPr wrap="none" rtlCol="0">
+              <a:spAutoFit/>
+            </a:bodyPr>
+            <a:lstStyle/>
+            <a:p>
+              <a:r>
+                <a:rPr kumimoji="1" lang="ja-JP" altLang="en-US" sz="1400">
+                  <a:latin typeface="+mn-ea"/>
+                </a:rPr>
+                <a:t>同じ種類なら</a:t>
+              </a:r>
+              <a:br>
+                <a:rPr kumimoji="1" lang="en-US" altLang="ja-JP" sz="1400">
+                  <a:latin typeface="+mn-ea"/>
+                </a:rPr>
+              </a:br>
+              <a:r>
+                <a:rPr kumimoji="1" lang="ja-JP" altLang="en-US" sz="1400">
+                  <a:latin typeface="+mn-ea"/>
+                </a:rPr>
+                <a:t>重ねて貼れる！</a:t>
+              </a:r>
+              <a:br>
+                <a:rPr kumimoji="1" lang="en-US" altLang="ja-JP" sz="1400">
+                  <a:latin typeface="+mn-ea"/>
+                </a:rPr>
+              </a:br>
+              <a:br>
+                <a:rPr kumimoji="1" lang="en-US" altLang="ja-JP" sz="1400">
+                  <a:latin typeface="+mn-ea"/>
+                </a:rPr>
+              </a:br>
+              <a:r>
+                <a:rPr kumimoji="1" lang="ja-JP" altLang="en-US" sz="1400">
+                  <a:latin typeface="+mn-ea"/>
+                </a:rPr>
+                <a:t>重ねれば</a:t>
+              </a:r>
+              <a:br>
+                <a:rPr kumimoji="1" lang="en-US" altLang="ja-JP" sz="1400">
+                  <a:latin typeface="+mn-ea"/>
+                </a:rPr>
+              </a:br>
+              <a:r>
+                <a:rPr kumimoji="1" lang="en-US" altLang="ja-JP" sz="1400">
+                  <a:latin typeface="+mn-ea"/>
+                </a:rPr>
+                <a:t>Lv</a:t>
+              </a:r>
+              <a:r>
+                <a:rPr kumimoji="1" lang="ja-JP" altLang="en-US" sz="1400">
+                  <a:latin typeface="+mn-ea"/>
+                </a:rPr>
+                <a:t>が上昇し、</a:t>
+              </a:r>
+              <a:br>
+                <a:rPr kumimoji="1" lang="en-US" altLang="ja-JP" sz="1400">
+                  <a:latin typeface="+mn-ea"/>
+                </a:rPr>
+              </a:br>
+              <a:r>
+                <a:rPr kumimoji="1" lang="ja-JP" altLang="en-US" sz="1400">
+                  <a:latin typeface="+mn-ea"/>
+                </a:rPr>
+                <a:t>召喚物が強力に！</a:t>
+              </a:r>
+              <a:br>
+                <a:rPr kumimoji="1" lang="en-US" altLang="ja-JP" sz="1400">
+                  <a:latin typeface="+mn-ea"/>
+                </a:rPr>
+              </a:br>
+              <a:br>
+                <a:rPr kumimoji="1" lang="en-US" altLang="ja-JP" sz="1400">
+                  <a:latin typeface="+mn-ea"/>
+                </a:rPr>
+              </a:br>
+              <a:r>
+                <a:rPr kumimoji="1" lang="ja-JP" altLang="en-US" sz="1400">
+                  <a:latin typeface="+mn-ea"/>
+                </a:rPr>
+                <a:t>貼る枚数は無制限、</a:t>
+              </a:r>
+              <a:br>
+                <a:rPr kumimoji="1" lang="en-US" altLang="ja-JP" sz="1400">
+                  <a:latin typeface="+mn-ea"/>
+                </a:rPr>
+              </a:br>
+              <a:r>
+                <a:rPr kumimoji="1" lang="ja-JP" altLang="en-US" sz="1400">
+                  <a:latin typeface="+mn-ea"/>
+                </a:rPr>
+                <a:t>クールタイムに注意</a:t>
+              </a:r>
+              <a:endParaRPr kumimoji="1" lang="ja-JP" altLang="en-US" sz="2000">
+                <a:latin typeface="+mn-ea"/>
+              </a:endParaRPr>
+            </a:p>
+          </p:txBody>
+        </p:sp>
+      </p:grpSp>
+      <p:grpSp>
+        <p:nvGrpSpPr>
+          <p:cNvPr id="49" name="グループ化 48">
+            <a:extLst>
+              <a:ext uri="{FF2B5EF4-FFF2-40B4-BE49-F238E27FC236}">
+                <a16:creationId xmlns:a16="http://schemas.microsoft.com/office/drawing/2014/main" id="{7C706DB8-8E31-4CCD-D425-B5C7B1C80923}"/>
+              </a:ext>
+            </a:extLst>
+          </p:cNvPr>
+          <p:cNvGrpSpPr/>
+          <p:nvPr/>
+        </p:nvGrpSpPr>
+        <p:grpSpPr>
+          <a:xfrm>
+            <a:off x="134644" y="1662196"/>
+            <a:ext cx="1866217" cy="2960197"/>
+            <a:chOff x="146017" y="1666837"/>
+            <a:chExt cx="1866217" cy="2960197"/>
+          </a:xfrm>
+        </p:grpSpPr>
+        <p:grpSp>
+          <p:nvGrpSpPr>
+            <p:cNvPr id="50" name="グループ化 49">
+              <a:extLst>
+                <a:ext uri="{FF2B5EF4-FFF2-40B4-BE49-F238E27FC236}">
+                  <a16:creationId xmlns:a16="http://schemas.microsoft.com/office/drawing/2014/main" id="{F024FAE4-2E32-800E-603F-3C801881C759}"/>
+                </a:ext>
+              </a:extLst>
+            </p:cNvPr>
+            <p:cNvGrpSpPr/>
+            <p:nvPr/>
+          </p:nvGrpSpPr>
+          <p:grpSpPr>
+            <a:xfrm>
+              <a:off x="163277" y="1666837"/>
+              <a:ext cx="1806553" cy="2960197"/>
+              <a:chOff x="4872567" y="1295251"/>
+              <a:chExt cx="2180166" cy="1046156"/>
+            </a:xfrm>
+            <a:effectLst/>
+          </p:grpSpPr>
+          <p:sp>
+            <p:nvSpPr>
+              <p:cNvPr id="53" name="四角形: 上の 2 つの角を丸める 52">
+                <a:extLst>
+                  <a:ext uri="{FF2B5EF4-FFF2-40B4-BE49-F238E27FC236}">
+                    <a16:creationId xmlns:a16="http://schemas.microsoft.com/office/drawing/2014/main" id="{7B2291F8-DD65-72EA-39EC-FC19F6C93F7E}"/>
+                  </a:ext>
+                </a:extLst>
+              </p:cNvPr>
+              <p:cNvSpPr/>
+              <p:nvPr/>
+            </p:nvSpPr>
+            <p:spPr>
+              <a:xfrm>
+                <a:off x="4872567" y="1295251"/>
+                <a:ext cx="2180166" cy="170888"/>
+              </a:xfrm>
+              <a:prstGeom prst="round2SameRect">
+                <a:avLst/>
+              </a:prstGeom>
+              <a:solidFill>
+                <a:schemeClr val="accent3">
+                  <a:lumMod val="20000"/>
+                  <a:lumOff val="80000"/>
+                  <a:alpha val="60000"/>
+                </a:schemeClr>
+              </a:solidFill>
+              <a:ln>
+                <a:noFill/>
+              </a:ln>
+            </p:spPr>
+            <p:style>
+              <a:lnRef idx="2">
+                <a:schemeClr val="accent1">
+                  <a:shade val="15000"/>
+                </a:schemeClr>
+              </a:lnRef>
+              <a:fillRef idx="1">
+                <a:schemeClr val="accent1"/>
+              </a:fillRef>
+              <a:effectRef idx="0">
+                <a:schemeClr val="accent1"/>
+              </a:effectRef>
+              <a:fontRef idx="minor">
+                <a:schemeClr val="lt1"/>
+              </a:fontRef>
+            </p:style>
+            <p:txBody>
+              <a:bodyPr rtlCol="0" anchor="ctr"/>
+              <a:lstStyle/>
+              <a:p>
+                <a:pPr algn="ctr"/>
+                <a:endParaRPr kumimoji="1" lang="ja-JP" altLang="en-US">
+                  <a:latin typeface="+mj-ea"/>
+                  <a:ea typeface="+mj-ea"/>
+                </a:endParaRPr>
+              </a:p>
+            </p:txBody>
+          </p:sp>
+          <p:sp>
+            <p:nvSpPr>
+              <p:cNvPr id="54" name="四角形: 上の 2 つの角を丸める 53">
+                <a:extLst>
+                  <a:ext uri="{FF2B5EF4-FFF2-40B4-BE49-F238E27FC236}">
+                    <a16:creationId xmlns:a16="http://schemas.microsoft.com/office/drawing/2014/main" id="{B2A20362-BE10-2EC5-36A6-F85F9A32DC53}"/>
+                  </a:ext>
+                </a:extLst>
+              </p:cNvPr>
+              <p:cNvSpPr/>
+              <p:nvPr/>
+            </p:nvSpPr>
+            <p:spPr>
+              <a:xfrm flipV="1">
+                <a:off x="4872567" y="1466139"/>
+                <a:ext cx="2180166" cy="875268"/>
+              </a:xfrm>
+              <a:prstGeom prst="round2SameRect">
+                <a:avLst>
+                  <a:gd name="adj1" fmla="val 9403"/>
+                  <a:gd name="adj2" fmla="val 0"/>
+                </a:avLst>
+              </a:prstGeom>
+              <a:solidFill>
+                <a:schemeClr val="accent3">
+                  <a:lumMod val="40000"/>
+                  <a:lumOff val="60000"/>
+                  <a:alpha val="60000"/>
+                </a:schemeClr>
+              </a:solidFill>
+              <a:ln>
+                <a:noFill/>
+              </a:ln>
+            </p:spPr>
+            <p:style>
+              <a:lnRef idx="2">
+                <a:schemeClr val="accent1">
+                  <a:shade val="15000"/>
+                </a:schemeClr>
+              </a:lnRef>
+              <a:fillRef idx="1">
+                <a:schemeClr val="accent1"/>
+              </a:fillRef>
+              <a:effectRef idx="0">
+                <a:schemeClr val="accent1"/>
+              </a:effectRef>
+              <a:fontRef idx="minor">
+                <a:schemeClr val="lt1"/>
+              </a:fontRef>
+            </p:style>
+            <p:txBody>
+              <a:bodyPr rtlCol="0" anchor="ctr"/>
+              <a:lstStyle/>
+              <a:p>
+                <a:pPr algn="ctr"/>
+                <a:endParaRPr kumimoji="1" lang="ja-JP" altLang="en-US">
+                  <a:latin typeface="+mj-ea"/>
+                  <a:ea typeface="+mj-ea"/>
+                </a:endParaRPr>
+              </a:p>
+            </p:txBody>
+          </p:sp>
+        </p:grpSp>
+        <p:sp>
+          <p:nvSpPr>
+            <p:cNvPr id="51" name="テキスト ボックス 50">
+              <a:extLst>
+                <a:ext uri="{FF2B5EF4-FFF2-40B4-BE49-F238E27FC236}">
+                  <a16:creationId xmlns:a16="http://schemas.microsoft.com/office/drawing/2014/main" id="{77CBE823-EACE-643E-3E0C-1298FD206125}"/>
+                </a:ext>
+              </a:extLst>
+            </p:cNvPr>
+            <p:cNvSpPr txBox="1"/>
+            <p:nvPr/>
+          </p:nvSpPr>
+          <p:spPr>
+            <a:xfrm>
+              <a:off x="333019" y="1732792"/>
+              <a:ext cx="1467068" cy="400110"/>
+            </a:xfrm>
+            <a:prstGeom prst="rect">
+              <a:avLst/>
+            </a:prstGeom>
+            <a:noFill/>
+          </p:spPr>
+          <p:txBody>
+            <a:bodyPr wrap="none" rtlCol="0">
+              <a:spAutoFit/>
+            </a:bodyPr>
+            <a:lstStyle/>
+            <a:p>
+              <a:pPr algn="ctr"/>
+              <a:r>
+                <a:rPr kumimoji="1" lang="ja-JP" altLang="en-US" sz="2000">
+                  <a:latin typeface="+mj-ea"/>
+                  <a:ea typeface="+mj-ea"/>
+                </a:rPr>
+                <a:t>ハコ豆知識</a:t>
+              </a:r>
+              <a:endParaRPr kumimoji="1" lang="ja-JP" altLang="en-US" sz="3200">
+                <a:latin typeface="+mj-ea"/>
+                <a:ea typeface="+mj-ea"/>
+              </a:endParaRPr>
+            </a:p>
+          </p:txBody>
+        </p:sp>
+        <p:sp>
+          <p:nvSpPr>
+            <p:cNvPr id="52" name="テキスト ボックス 51">
+              <a:extLst>
+                <a:ext uri="{FF2B5EF4-FFF2-40B4-BE49-F238E27FC236}">
+                  <a16:creationId xmlns:a16="http://schemas.microsoft.com/office/drawing/2014/main" id="{E5DFE4BE-0B9B-C772-ADB9-68D1B27751C5}"/>
+                </a:ext>
+              </a:extLst>
+            </p:cNvPr>
+            <p:cNvSpPr txBox="1"/>
+            <p:nvPr/>
+          </p:nvSpPr>
+          <p:spPr>
+            <a:xfrm>
+              <a:off x="146017" y="2293859"/>
+              <a:ext cx="1866217" cy="2031325"/>
+            </a:xfrm>
+            <a:prstGeom prst="rect">
+              <a:avLst/>
+            </a:prstGeom>
+            <a:noFill/>
+          </p:spPr>
+          <p:txBody>
+            <a:bodyPr wrap="none" rtlCol="0">
+              <a:spAutoFit/>
+            </a:bodyPr>
+            <a:lstStyle/>
+            <a:p>
+              <a:r>
+                <a:rPr kumimoji="1" lang="ja-JP" altLang="en-US" sz="1400">
+                  <a:latin typeface="+mj-ea"/>
+                  <a:ea typeface="+mj-ea"/>
+                </a:rPr>
+                <a:t>ハコには必ず</a:t>
+              </a:r>
+              <a:br>
+                <a:rPr kumimoji="1" lang="en-US" altLang="ja-JP" sz="1400">
+                  <a:latin typeface="+mj-ea"/>
+                  <a:ea typeface="+mj-ea"/>
+                </a:rPr>
+              </a:br>
+              <a:r>
+                <a:rPr kumimoji="1" lang="ja-JP" altLang="en-US" sz="1400">
+                  <a:latin typeface="+mj-ea"/>
+                  <a:ea typeface="+mj-ea"/>
+                </a:rPr>
+                <a:t>「決着メーター」が</a:t>
+              </a:r>
+              <a:br>
+                <a:rPr kumimoji="1" lang="en-US" altLang="ja-JP" sz="1400">
+                  <a:latin typeface="+mj-ea"/>
+                  <a:ea typeface="+mj-ea"/>
+                </a:rPr>
+              </a:br>
+              <a:r>
+                <a:rPr kumimoji="1" lang="ja-JP" altLang="en-US" sz="1400">
+                  <a:latin typeface="+mj-ea"/>
+                  <a:ea typeface="+mj-ea"/>
+                </a:rPr>
+                <a:t>存在するらしい</a:t>
+              </a:r>
+              <a:r>
+                <a:rPr kumimoji="1" lang="en-US" altLang="ja-JP" sz="1400">
+                  <a:latin typeface="+mj-ea"/>
+                  <a:ea typeface="+mj-ea"/>
+                </a:rPr>
+                <a:t>…</a:t>
+              </a:r>
+              <a:br>
+                <a:rPr kumimoji="1" lang="en-US" altLang="ja-JP" sz="1400">
+                  <a:latin typeface="+mj-ea"/>
+                  <a:ea typeface="+mj-ea"/>
+                </a:rPr>
+              </a:br>
+              <a:br>
+                <a:rPr kumimoji="1" lang="en-US" altLang="ja-JP" sz="1400">
+                  <a:latin typeface="+mj-ea"/>
+                  <a:ea typeface="+mj-ea"/>
+                </a:rPr>
+              </a:br>
+              <a:r>
+                <a:rPr kumimoji="1" lang="ja-JP" altLang="en-US" sz="1400">
+                  <a:latin typeface="+mj-ea"/>
+                  <a:ea typeface="+mj-ea"/>
+                </a:rPr>
+                <a:t>選択中の面にしか</a:t>
+              </a:r>
+              <a:br>
+                <a:rPr kumimoji="1" lang="en-US" altLang="ja-JP" sz="1400">
+                  <a:latin typeface="+mj-ea"/>
+                  <a:ea typeface="+mj-ea"/>
+                </a:rPr>
+              </a:br>
+              <a:r>
+                <a:rPr kumimoji="1" lang="ja-JP" altLang="en-US" sz="1400">
+                  <a:latin typeface="+mj-ea"/>
+                  <a:ea typeface="+mj-ea"/>
+                </a:rPr>
+                <a:t>オフダは貼れない！</a:t>
+              </a:r>
+              <a:br>
+                <a:rPr kumimoji="1" lang="en-US" altLang="ja-JP" sz="1400">
+                  <a:latin typeface="+mj-ea"/>
+                  <a:ea typeface="+mj-ea"/>
+                </a:rPr>
+              </a:br>
+              <a:br>
+                <a:rPr kumimoji="1" lang="en-US" altLang="ja-JP" sz="1400">
+                  <a:latin typeface="+mj-ea"/>
+                  <a:ea typeface="+mj-ea"/>
+                </a:rPr>
+              </a:br>
+              <a:r>
+                <a:rPr kumimoji="1" lang="ja-JP" altLang="en-US" sz="1400">
+                  <a:latin typeface="+mj-ea"/>
+                  <a:ea typeface="+mj-ea"/>
+                </a:rPr>
+                <a:t>フリック</a:t>
+              </a:r>
+              <a:r>
+                <a:rPr kumimoji="1" lang="en-US" altLang="ja-JP" sz="1400">
+                  <a:latin typeface="+mj-ea"/>
+                  <a:ea typeface="+mj-ea"/>
+                </a:rPr>
+                <a:t>or</a:t>
+              </a:r>
+              <a:r>
+                <a:rPr kumimoji="1" lang="ja-JP" altLang="en-US" sz="1400">
+                  <a:latin typeface="+mj-ea"/>
+                  <a:ea typeface="+mj-ea"/>
+                </a:rPr>
+                <a:t>タッチで</a:t>
+              </a:r>
+              <a:br>
+                <a:rPr kumimoji="1" lang="en-US" altLang="ja-JP" sz="1400">
+                  <a:latin typeface="+mj-ea"/>
+                  <a:ea typeface="+mj-ea"/>
+                </a:rPr>
+              </a:br>
+              <a:r>
+                <a:rPr kumimoji="1" lang="ja-JP" altLang="en-US" sz="1400">
+                  <a:latin typeface="+mj-ea"/>
+                  <a:ea typeface="+mj-ea"/>
+                </a:rPr>
+                <a:t>ハコの面を選択！</a:t>
+              </a:r>
+              <a:endParaRPr kumimoji="1" lang="ja-JP" altLang="en-US" sz="2000">
+                <a:latin typeface="+mj-ea"/>
+                <a:ea typeface="+mj-ea"/>
+              </a:endParaRPr>
+            </a:p>
+          </p:txBody>
+        </p:sp>
+      </p:grpSp>
+    </p:spTree>
+    <p:extLst>
+      <p:ext uri="{BB962C8B-B14F-4D97-AF65-F5344CB8AC3E}">
+        <p14:creationId xmlns:p14="http://schemas.microsoft.com/office/powerpoint/2010/main" val="460419930"/>
+      </p:ext>
+    </p:extLst>
+  </p:cSld>
+  <p:clrMapOvr>
+    <a:masterClrMapping/>
+  </p:clrMapOvr>
+</p:sld>
+</file>
+
+<file path=ppt/slides/slide5.xml><?xml version="1.0" encoding="utf-8"?>
+<p:sld xmlns:a="http://schemas.openxmlformats.org/drawingml/2006/main" xmlns:r="http://schemas.openxmlformats.org/officeDocument/2006/relationships" xmlns:p="http://schemas.openxmlformats.org/presentationml/2006/main">
+  <p:cSld>
+    <p:spTree>
+      <p:nvGrpSpPr>
+        <p:cNvPr id="1" name="">
+          <a:extLst>
+            <a:ext uri="{FF2B5EF4-FFF2-40B4-BE49-F238E27FC236}">
+              <a16:creationId xmlns:a16="http://schemas.microsoft.com/office/drawing/2014/main" id="{790CCF19-A270-9305-7737-F7D37F115080}"/>
+            </a:ext>
+          </a:extLst>
+        </p:cNvPr>
+        <p:cNvGrpSpPr/>
+        <p:nvPr/>
+      </p:nvGrpSpPr>
+      <p:grpSpPr>
+        <a:xfrm>
+          <a:off x="0" y="0"/>
+          <a:ext cx="0" cy="0"/>
+          <a:chOff x="0" y="0"/>
+          <a:chExt cx="0" cy="0"/>
+        </a:xfrm>
+      </p:grpSpPr>
+      <p:sp>
+        <p:nvSpPr>
+          <p:cNvPr id="5" name="テキスト ボックス 4">
+            <a:extLst>
+              <a:ext uri="{FF2B5EF4-FFF2-40B4-BE49-F238E27FC236}">
+                <a16:creationId xmlns:a16="http://schemas.microsoft.com/office/drawing/2014/main" id="{B9C48685-7F76-CDBA-B5CF-30C8CF247013}"/>
+              </a:ext>
+            </a:extLst>
+          </p:cNvPr>
+          <p:cNvSpPr txBox="1"/>
+          <p:nvPr/>
+        </p:nvSpPr>
+        <p:spPr>
+          <a:xfrm>
+            <a:off x="1314420" y="279401"/>
+            <a:ext cx="7407797" cy="707886"/>
+          </a:xfrm>
+          <a:prstGeom prst="rect">
+            <a:avLst/>
+          </a:prstGeom>
+          <a:noFill/>
+        </p:spPr>
+        <p:txBody>
+          <a:bodyPr wrap="none" rtlCol="0">
+            <a:spAutoFit/>
+          </a:bodyPr>
+          <a:lstStyle/>
+          <a:p>
+            <a:pPr algn="ctr"/>
+            <a:r>
+              <a:rPr kumimoji="1" lang="ja-JP" altLang="en-US" sz="4000">
+                <a:latin typeface="KaitouYokokuGothic Heavy" panose="020B0A00000000000000" pitchFamily="34" charset="0"/>
+                <a:ea typeface="KaitouYokokuGothic Heavy" panose="020B0A00000000000000" pitchFamily="34" charset="0"/>
+              </a:rPr>
+              <a:t>相手のオフダを無力化して</a:t>
+            </a:r>
+            <a:endParaRPr kumimoji="1" lang="ja-JP" altLang="en-US" sz="5400">
+              <a:latin typeface="KaitouYokokuGothic Heavy" panose="020B0A00000000000000" pitchFamily="34" charset="0"/>
+              <a:ea typeface="KaitouYokokuGothic Heavy" panose="020B0A00000000000000" pitchFamily="34" charset="0"/>
+            </a:endParaRPr>
+          </a:p>
+        </p:txBody>
+      </p:sp>
+      <p:sp>
+        <p:nvSpPr>
+          <p:cNvPr id="3" name="テキスト ボックス 2">
+            <a:extLst>
+              <a:ext uri="{FF2B5EF4-FFF2-40B4-BE49-F238E27FC236}">
+                <a16:creationId xmlns:a16="http://schemas.microsoft.com/office/drawing/2014/main" id="{340EAA9D-5EFD-D310-311E-97B60D4B81C8}"/>
+              </a:ext>
+            </a:extLst>
+          </p:cNvPr>
+          <p:cNvSpPr txBox="1"/>
+          <p:nvPr/>
+        </p:nvSpPr>
+        <p:spPr>
+          <a:xfrm>
+            <a:off x="2719886" y="5545667"/>
+            <a:ext cx="4766048" cy="707886"/>
+          </a:xfrm>
+          <a:prstGeom prst="rect">
+            <a:avLst/>
+          </a:prstGeom>
+          <a:noFill/>
+        </p:spPr>
+        <p:txBody>
+          <a:bodyPr wrap="none" rtlCol="0">
+            <a:spAutoFit/>
+          </a:bodyPr>
+          <a:lstStyle/>
+          <a:p>
+            <a:pPr algn="ctr"/>
+            <a:r>
+              <a:rPr kumimoji="1" lang="ja-JP" altLang="en-US" sz="4000">
+                <a:latin typeface="KaitouYokokuGothic Heavy" panose="020B0A00000000000000" pitchFamily="34" charset="0"/>
+                <a:ea typeface="KaitouYokokuGothic Heavy" panose="020B0A00000000000000" pitchFamily="34" charset="0"/>
+              </a:rPr>
+              <a:t>ハコを占領しろ！</a:t>
+            </a:r>
+            <a:endParaRPr kumimoji="1" lang="ja-JP" altLang="en-US" sz="5400">
+              <a:latin typeface="KaitouYokokuGothic Heavy" panose="020B0A00000000000000" pitchFamily="34" charset="0"/>
+              <a:ea typeface="KaitouYokokuGothic Heavy" panose="020B0A00000000000000" pitchFamily="34" charset="0"/>
+            </a:endParaRPr>
+          </a:p>
+        </p:txBody>
+      </p:sp>
+    </p:spTree>
+    <p:extLst>
+      <p:ext uri="{BB962C8B-B14F-4D97-AF65-F5344CB8AC3E}">
+        <p14:creationId xmlns:p14="http://schemas.microsoft.com/office/powerpoint/2010/main" val="1771460332"/>
+      </p:ext>
+    </p:extLst>
+  </p:cSld>
+  <p:clrMapOvr>
+    <a:masterClrMapping/>
+  </p:clrMapOvr>
+</p:sld>
+</file>
+
+<file path=ppt/slides/slide6.xml><?xml version="1.0" encoding="utf-8"?>
+<p:sld xmlns:a="http://schemas.openxmlformats.org/drawingml/2006/main" xmlns:r="http://schemas.openxmlformats.org/officeDocument/2006/relationships" xmlns:p="http://schemas.openxmlformats.org/presentationml/2006/main">
+  <p:cSld>
+    <p:spTree>
+      <p:nvGrpSpPr>
+        <p:cNvPr id="1" name="">
+          <a:extLst>
+            <a:ext uri="{FF2B5EF4-FFF2-40B4-BE49-F238E27FC236}">
+              <a16:creationId xmlns:a16="http://schemas.microsoft.com/office/drawing/2014/main" id="{C94D30AD-BCCB-6BF4-50F4-79EEF548D141}"/>
+            </a:ext>
+          </a:extLst>
+        </p:cNvPr>
+        <p:cNvGrpSpPr/>
+        <p:nvPr/>
+      </p:nvGrpSpPr>
+      <p:grpSpPr>
+        <a:xfrm>
+          <a:off x="0" y="0"/>
+          <a:ext cx="0" cy="0"/>
+          <a:chOff x="0" y="0"/>
+          <a:chExt cx="0" cy="0"/>
+        </a:xfrm>
+      </p:grpSpPr>
+      <p:sp>
+        <p:nvSpPr>
+          <p:cNvPr id="5" name="テキスト ボックス 4">
+            <a:extLst>
+              <a:ext uri="{FF2B5EF4-FFF2-40B4-BE49-F238E27FC236}">
+                <a16:creationId xmlns:a16="http://schemas.microsoft.com/office/drawing/2014/main" id="{50C0E699-91BA-5E3A-4151-6C9B80441ADD}"/>
+              </a:ext>
+            </a:extLst>
+          </p:cNvPr>
+          <p:cNvSpPr txBox="1"/>
+          <p:nvPr/>
+        </p:nvSpPr>
+        <p:spPr>
+          <a:xfrm>
+            <a:off x="1136620" y="1502834"/>
+            <a:ext cx="2815194" cy="707886"/>
+          </a:xfrm>
+          <a:prstGeom prst="rect">
+            <a:avLst/>
+          </a:prstGeom>
+          <a:noFill/>
+        </p:spPr>
+        <p:txBody>
+          <a:bodyPr wrap="none" rtlCol="0">
+            <a:spAutoFit/>
+          </a:bodyPr>
+          <a:lstStyle/>
+          <a:p>
+            <a:r>
+              <a:rPr kumimoji="1" lang="ja-JP" altLang="en-US" sz="4000">
+                <a:latin typeface="HGP創英角ｺﾞｼｯｸUB" panose="020B0900000000000000" pitchFamily="50" charset="-128"/>
+                <a:ea typeface="HGP創英角ｺﾞｼｯｸUB" panose="020B0900000000000000" pitchFamily="50" charset="-128"/>
+              </a:rPr>
+              <a:t>ゲームフロー</a:t>
+            </a:r>
+            <a:endParaRPr kumimoji="1" lang="ja-JP" altLang="en-US" sz="5400">
+              <a:latin typeface="HGP創英角ｺﾞｼｯｸUB" panose="020B0900000000000000" pitchFamily="50" charset="-128"/>
+              <a:ea typeface="HGP創英角ｺﾞｼｯｸUB" panose="020B0900000000000000" pitchFamily="50" charset="-128"/>
+            </a:endParaRPr>
+          </a:p>
+        </p:txBody>
+      </p:sp>
+    </p:spTree>
+    <p:extLst>
+      <p:ext uri="{BB962C8B-B14F-4D97-AF65-F5344CB8AC3E}">
+        <p14:creationId xmlns:p14="http://schemas.microsoft.com/office/powerpoint/2010/main" val="285984860"/>
+      </p:ext>
+    </p:extLst>
+  </p:cSld>
+  <p:clrMapOvr>
+    <a:masterClrMapping/>
+  </p:clrMapOvr>
+</p:sld>
+</file>
+
+<file path=ppt/slides/slide7.xml><?xml version="1.0" encoding="utf-8"?>
+<p:sld xmlns:a="http://schemas.openxmlformats.org/drawingml/2006/main" xmlns:r="http://schemas.openxmlformats.org/officeDocument/2006/relationships" xmlns:p="http://schemas.openxmlformats.org/presentationml/2006/main">
+  <p:cSld>
+    <p:spTree>
+      <p:nvGrpSpPr>
+        <p:cNvPr id="1" name="">
+          <a:extLst>
+            <a:ext uri="{FF2B5EF4-FFF2-40B4-BE49-F238E27FC236}">
+              <a16:creationId xmlns:a16="http://schemas.microsoft.com/office/drawing/2014/main" id="{628BE71C-DB4B-2755-A4A5-3AEB95295457}"/>
+            </a:ext>
+          </a:extLst>
+        </p:cNvPr>
+        <p:cNvGrpSpPr/>
+        <p:nvPr/>
+      </p:nvGrpSpPr>
+      <p:grpSpPr>
+        <a:xfrm>
+          <a:off x="0" y="0"/>
+          <a:ext cx="0" cy="0"/>
+          <a:chOff x="0" y="0"/>
+          <a:chExt cx="0" cy="0"/>
+        </a:xfrm>
+      </p:grpSpPr>
+      <p:sp>
+        <p:nvSpPr>
+          <p:cNvPr id="3" name="テキスト ボックス 2">
+            <a:extLst>
+              <a:ext uri="{FF2B5EF4-FFF2-40B4-BE49-F238E27FC236}">
+                <a16:creationId xmlns:a16="http://schemas.microsoft.com/office/drawing/2014/main" id="{B69EFA91-CA53-4D41-BE0E-1B3F174C860B}"/>
+              </a:ext>
+            </a:extLst>
+          </p:cNvPr>
+          <p:cNvSpPr txBox="1"/>
+          <p:nvPr/>
+        </p:nvSpPr>
+        <p:spPr>
+          <a:xfrm>
+            <a:off x="868047" y="1061647"/>
+            <a:ext cx="2350323" cy="707886"/>
+          </a:xfrm>
+          <a:prstGeom prst="rect">
+            <a:avLst/>
+          </a:prstGeom>
+          <a:noFill/>
+        </p:spPr>
+        <p:txBody>
+          <a:bodyPr wrap="none" rtlCol="0">
+            <a:spAutoFit/>
+          </a:bodyPr>
+          <a:lstStyle/>
+          <a:p>
+            <a:r>
+              <a:rPr kumimoji="1" lang="ja-JP" altLang="en-US" sz="4000">
+                <a:latin typeface="HGP創英角ｺﾞｼｯｸUB" panose="020B0900000000000000" pitchFamily="50" charset="-128"/>
+                <a:ea typeface="HGP創英角ｺﾞｼｯｸUB" panose="020B0900000000000000" pitchFamily="50" charset="-128"/>
+              </a:rPr>
+              <a:t>マネタイズ</a:t>
+            </a:r>
+            <a:endParaRPr kumimoji="1" lang="ja-JP" altLang="en-US" sz="5400">
+              <a:latin typeface="HGP創英角ｺﾞｼｯｸUB" panose="020B0900000000000000" pitchFamily="50" charset="-128"/>
+              <a:ea typeface="HGP創英角ｺﾞｼｯｸUB" panose="020B0900000000000000" pitchFamily="50" charset="-128"/>
+            </a:endParaRPr>
+          </a:p>
+        </p:txBody>
+      </p:sp>
+      <p:sp>
+        <p:nvSpPr>
+          <p:cNvPr id="6" name="テキスト ボックス 5">
+            <a:extLst>
+              <a:ext uri="{FF2B5EF4-FFF2-40B4-BE49-F238E27FC236}">
+                <a16:creationId xmlns:a16="http://schemas.microsoft.com/office/drawing/2014/main" id="{998B39E4-D80E-F630-886F-461AA45CADC5}"/>
+              </a:ext>
+            </a:extLst>
+          </p:cNvPr>
+          <p:cNvSpPr txBox="1"/>
+          <p:nvPr/>
+        </p:nvSpPr>
+        <p:spPr>
+          <a:xfrm>
+            <a:off x="924954" y="4734524"/>
+            <a:ext cx="2236510" cy="707886"/>
+          </a:xfrm>
+          <a:prstGeom prst="rect">
+            <a:avLst/>
+          </a:prstGeom>
+          <a:noFill/>
+        </p:spPr>
+        <p:txBody>
+          <a:bodyPr wrap="none" rtlCol="0">
+            <a:spAutoFit/>
+          </a:bodyPr>
+          <a:lstStyle/>
+          <a:p>
+            <a:r>
+              <a:rPr kumimoji="1" lang="ja-JP" altLang="en-US" sz="4000">
+                <a:latin typeface="HGP創英角ｺﾞｼｯｸUB" panose="020B0900000000000000" pitchFamily="50" charset="-128"/>
+                <a:ea typeface="HGP創英角ｺﾞｼｯｸUB" panose="020B0900000000000000" pitchFamily="50" charset="-128"/>
+              </a:rPr>
+              <a:t>開発環境</a:t>
+            </a:r>
+            <a:endParaRPr kumimoji="1" lang="ja-JP" altLang="en-US" sz="5400">
+              <a:latin typeface="HGP創英角ｺﾞｼｯｸUB" panose="020B0900000000000000" pitchFamily="50" charset="-128"/>
+              <a:ea typeface="HGP創英角ｺﾞｼｯｸUB" panose="020B0900000000000000" pitchFamily="50" charset="-128"/>
+            </a:endParaRPr>
+          </a:p>
+        </p:txBody>
+      </p:sp>
+    </p:spTree>
+    <p:extLst>
+      <p:ext uri="{BB962C8B-B14F-4D97-AF65-F5344CB8AC3E}">
+        <p14:creationId xmlns:p14="http://schemas.microsoft.com/office/powerpoint/2010/main" val="1225539444"/>
+      </p:ext>
+    </p:extLst>
+  </p:cSld>
+  <p:clrMapOvr>
+    <a:masterClrMapping/>
+  </p:clrMapOvr>
+</p:sld>
+</file>
+
+<file path=ppt/slides/slide8.xml><?xml version="1.0" encoding="utf-8"?>
+<p:sld xmlns:a="http://schemas.openxmlformats.org/drawingml/2006/main" xmlns:r="http://schemas.openxmlformats.org/officeDocument/2006/relationships" xmlns:p="http://schemas.openxmlformats.org/presentationml/2006/main">
+  <p:cSld>
+    <p:spTree>
+      <p:nvGrpSpPr>
+        <p:cNvPr id="1" name="">
+          <a:extLst>
+            <a:ext uri="{FF2B5EF4-FFF2-40B4-BE49-F238E27FC236}">
+              <a16:creationId xmlns:a16="http://schemas.microsoft.com/office/drawing/2014/main" id="{05ABADD9-D75A-D53E-0C18-CDD014A0B3F6}"/>
+            </a:ext>
+          </a:extLst>
+        </p:cNvPr>
+        <p:cNvGrpSpPr/>
+        <p:nvPr/>
+      </p:nvGrpSpPr>
+      <p:grpSpPr>
+        <a:xfrm>
+          <a:off x="0" y="0"/>
+          <a:ext cx="0" cy="0"/>
+          <a:chOff x="0" y="0"/>
+          <a:chExt cx="0" cy="0"/>
+        </a:xfrm>
+      </p:grpSpPr>
+      <p:sp>
+        <p:nvSpPr>
+          <p:cNvPr id="5" name="テキスト ボックス 4">
+            <a:extLst>
+              <a:ext uri="{FF2B5EF4-FFF2-40B4-BE49-F238E27FC236}">
+                <a16:creationId xmlns:a16="http://schemas.microsoft.com/office/drawing/2014/main" id="{74746CF6-6B3F-34B8-221F-FFDAE34DADB1}"/>
+              </a:ext>
+            </a:extLst>
+          </p:cNvPr>
+          <p:cNvSpPr txBox="1"/>
+          <p:nvPr/>
+        </p:nvSpPr>
+        <p:spPr>
+          <a:xfrm>
+            <a:off x="1136620" y="1502834"/>
+            <a:ext cx="1952779" cy="707886"/>
+          </a:xfrm>
+          <a:prstGeom prst="rect">
+            <a:avLst/>
+          </a:prstGeom>
+          <a:noFill/>
+        </p:spPr>
+        <p:txBody>
+          <a:bodyPr wrap="none" rtlCol="0">
+            <a:spAutoFit/>
+          </a:bodyPr>
+          <a:lstStyle/>
+          <a:p>
+            <a:r>
+              <a:rPr kumimoji="1" lang="ja-JP" altLang="en-US" sz="4000">
+                <a:latin typeface="HGP創英角ｺﾞｼｯｸUB" panose="020B0900000000000000" pitchFamily="50" charset="-128"/>
+                <a:ea typeface="HGP創英角ｺﾞｼｯｸUB" panose="020B0900000000000000" pitchFamily="50" charset="-128"/>
+              </a:rPr>
+              <a:t>コピー用</a:t>
+            </a:r>
+            <a:endParaRPr kumimoji="1" lang="ja-JP" altLang="en-US" sz="5400">
+              <a:latin typeface="HGP創英角ｺﾞｼｯｸUB" panose="020B0900000000000000" pitchFamily="50" charset="-128"/>
+              <a:ea typeface="HGP創英角ｺﾞｼｯｸUB" panose="020B0900000000000000" pitchFamily="50" charset="-128"/>
+            </a:endParaRPr>
+          </a:p>
+        </p:txBody>
+      </p:sp>
+    </p:spTree>
+    <p:extLst>
+      <p:ext uri="{BB962C8B-B14F-4D97-AF65-F5344CB8AC3E}">
+        <p14:creationId xmlns:p14="http://schemas.microsoft.com/office/powerpoint/2010/main" val="4247369263"/>
+      </p:ext>
+    </p:extLst>
+  </p:cSld>
+  <p:clrMapOvr>
+    <a:masterClrMapping/>
+  </p:clrMapOvr>
+</p:sld>
+</file>
+
+<file path=ppt/slides/slide9.xml><?xml version="1.0" encoding="utf-8"?>
+<p:sld xmlns:a="http://schemas.openxmlformats.org/drawingml/2006/main" xmlns:r="http://schemas.openxmlformats.org/officeDocument/2006/relationships" xmlns:p="http://schemas.openxmlformats.org/presentationml/2006/main" show="0">
+  <p:cSld>
+    <p:spTree>
+      <p:nvGrpSpPr>
+        <p:cNvPr id="1" name="">
+          <a:extLst>
+            <a:ext uri="{FF2B5EF4-FFF2-40B4-BE49-F238E27FC236}">
+              <a16:creationId xmlns:a16="http://schemas.microsoft.com/office/drawing/2014/main" id="{ADD0AB13-4A4A-F7FA-AA96-AAB564FC11A6}"/>
+            </a:ext>
+          </a:extLst>
+        </p:cNvPr>
+        <p:cNvGrpSpPr/>
+        <p:nvPr/>
+      </p:nvGrpSpPr>
+      <p:grpSpPr>
+        <a:xfrm>
+          <a:off x="0" y="0"/>
+          <a:ext cx="0" cy="0"/>
+          <a:chOff x="0" y="0"/>
+          <a:chExt cx="0" cy="0"/>
+        </a:xfrm>
+      </p:grpSpPr>
+      <p:sp>
+        <p:nvSpPr>
+          <p:cNvPr id="5" name="テキスト ボックス 4">
+            <a:extLst>
+              <a:ext uri="{FF2B5EF4-FFF2-40B4-BE49-F238E27FC236}">
+                <a16:creationId xmlns:a16="http://schemas.microsoft.com/office/drawing/2014/main" id="{228C8DA6-06B6-5F36-5AC2-52551519CC68}"/>
+              </a:ext>
+            </a:extLst>
+          </p:cNvPr>
+          <p:cNvSpPr txBox="1"/>
+          <p:nvPr/>
+        </p:nvSpPr>
+        <p:spPr>
+          <a:xfrm>
+            <a:off x="3871353" y="2527301"/>
+            <a:ext cx="2382383" cy="1569660"/>
+          </a:xfrm>
+          <a:prstGeom prst="rect">
+            <a:avLst/>
+          </a:prstGeom>
+          <a:noFill/>
+        </p:spPr>
+        <p:txBody>
+          <a:bodyPr wrap="none" rtlCol="0">
+            <a:spAutoFit/>
+          </a:bodyPr>
+          <a:lstStyle/>
+          <a:p>
+            <a:r>
+              <a:rPr kumimoji="1" lang="ja-JP" altLang="en-US" sz="9600">
+                <a:latin typeface="HGP創英角ｺﾞｼｯｸUB" panose="020B0900000000000000" pitchFamily="50" charset="-128"/>
+                <a:ea typeface="HGP創英角ｺﾞｼｯｸUB" panose="020B0900000000000000" pitchFamily="50" charset="-128"/>
+              </a:rPr>
+              <a:t>ボツ</a:t>
+            </a:r>
+          </a:p>
+        </p:txBody>
+      </p:sp>
+    </p:spTree>
+    <p:extLst>
+      <p:ext uri="{BB962C8B-B14F-4D97-AF65-F5344CB8AC3E}">
+        <p14:creationId xmlns:p14="http://schemas.microsoft.com/office/powerpoint/2010/main" val="3749587117"/>
       </p:ext>
     </p:extLst>
   </p:cSld>
@@ -3373,15 +8439,15 @@
         <a:srgbClr val="002060"/>
       </a:folHlink>
     </a:clrScheme>
-    <a:fontScheme name="ユーザー定義 4">
+    <a:fontScheme name="ユーザー定義 6">
       <a:majorFont>
         <a:latin typeface="Aptos Display"/>
-        <a:ea typeface="游ゴシック Light"/>
+        <a:ea typeface="クラフト明朝"/>
         <a:cs typeface=""/>
       </a:majorFont>
       <a:minorFont>
-        <a:latin typeface="Aptos"/>
-        <a:ea typeface="游ゴシック"/>
+        <a:latin typeface="KaitouYokokuGothic Heavy"/>
+        <a:ea typeface="装甲明朝"/>
         <a:cs typeface=""/>
       </a:minorFont>
     </a:fontScheme>
